--- a/assets/结构图/顺序流程-001/example.pptx
+++ b/assets/结构图/顺序流程-001/example.pptx
@@ -2,13 +2,13 @@
 <file path=ppt/presentation.xml><?xml version="1.0" encoding="utf-8"?>
 <p:presentation xmlns:p="http://schemas.openxmlformats.org/presentationml/2006/main">
   <p:sldMasterIdLst>
-    <p:sldMasterId xmlns:r="http://schemas.openxmlformats.org/officeDocument/2006/relationships" id="2147483648" r:id="Rb45c53bfe2c14031"/>
+    <p:sldMasterId xmlns:r="http://schemas.openxmlformats.org/officeDocument/2006/relationships" id="2147483648" r:id="R78195fe58ceb4819"/>
   </p:sldMasterIdLst>
   <p:notesMasterIdLst>
-    <p:notesMasterId xmlns:r="http://schemas.openxmlformats.org/officeDocument/2006/relationships" r:id="R7a8681880d5c4844"/>
+    <p:notesMasterId xmlns:r="http://schemas.openxmlformats.org/officeDocument/2006/relationships" r:id="R5927a62b908c46c3"/>
   </p:notesMasterIdLst>
   <p:sldIdLst>
-    <p:sldId xmlns:r="http://schemas.openxmlformats.org/officeDocument/2006/relationships" id="256" r:id="R4ae0ae82fd604570"/>
+    <p:sldId xmlns:r="http://schemas.openxmlformats.org/officeDocument/2006/relationships" id="256" r:id="Rf02c2282fb1a4b5f"/>
   </p:sldIdLst>
   <p:sldSz cx="12192000" cy="6858000"/>
   <p:notesSz cx="6858000" cy="9144000"/>
@@ -506,7 +506,7 @@
   </p:cSld>
   <p:clrMap bg1="lt1" tx1="dk1" bg2="lt2" tx2="dk2" accent1="accent1" accent2="accent2" accent3="accent3" accent4="accent4" accent5="accent5" accent6="accent6" hlink="hlink" folHlink="folHlink"/>
   <p:sldLayoutIdLst>
-    <p:sldLayoutId xmlns:r="http://schemas.openxmlformats.org/officeDocument/2006/relationships" id="2147483649" r:id="R0488d39353f9491c"/>
+    <p:sldLayoutId xmlns:r="http://schemas.openxmlformats.org/officeDocument/2006/relationships" id="2147483649" r:id="R303b1f6ae8da4da2"/>
   </p:sldLayoutIdLst>
   <p:txStyles>
     <p:titleStyle>
@@ -1057,7 +1057,7 @@
           <p:cNvPr id="22" name="">
             <a:extLst xmlns:a="http://schemas.openxmlformats.org/drawingml/2006/main">
               <a:ext uri="{FF2B5EF4-FFF2-40B4-BE49-F238E27FC236}">
-                <a16:creationId xmlns:a16="http://schemas.microsoft.com/office/drawing/2014/main" id="{44C8013A-147E-453D-BDC3-C490824C4788}"/>
+                <a16:creationId xmlns:a16="http://schemas.microsoft.com/office/drawing/2014/main" id="{EA59DB0F-0A2E-4AF4-9B66-13241CCBD7C6}"/>
               </a:ext>
             </a:extLst>
           </p:cNvPr>
@@ -1115,7 +1115,7 @@
           <p:cNvPr id="2" name="">
             <a:extLst xmlns:a="http://schemas.openxmlformats.org/drawingml/2006/main">
               <a:ext uri="{FF2B5EF4-FFF2-40B4-BE49-F238E27FC236}">
-                <a16:creationId xmlns:a16="http://schemas.microsoft.com/office/drawing/2014/main" id="{242E7FAD-B391-43E8-A66D-908FDA757126}"/>
+                <a16:creationId xmlns:a16="http://schemas.microsoft.com/office/drawing/2014/main" id="{4A3D313D-5974-44E8-9F2A-BA67A819BD87}"/>
               </a:ext>
             </a:extLst>
           </p:cNvPr>
@@ -1170,10 +1170,10 @@
       </p:sp>
       <p:sp>
         <p:nvSpPr>
-          <p:cNvPr id="3" name="">
+          <p:cNvPr id="3" name="PPAGENT_QA|parent=sequential-step-0|domains=sequential-steps">
             <a:extLst xmlns:a="http://schemas.openxmlformats.org/drawingml/2006/main">
               <a:ext uri="{FF2B5EF4-FFF2-40B4-BE49-F238E27FC236}">
-                <a16:creationId xmlns:a16="http://schemas.microsoft.com/office/drawing/2014/main" id="{F0CE8886-5C3C-422E-B23B-D2C4898A8AD3}"/>
+                <a16:creationId xmlns:a16="http://schemas.microsoft.com/office/drawing/2014/main" id="{D01C4B88-D267-4B4A-B7EA-58E6D22524BA}"/>
               </a:ext>
             </a:extLst>
           </p:cNvPr>
@@ -1209,10 +1209,10 @@
       </p:sp>
       <p:sp>
         <p:nvSpPr>
-          <p:cNvPr id="4" name="">
+          <p:cNvPr id="4" name="PPAGENT_QA|parent=sequential-step-1|domains=sequential-steps">
             <a:extLst xmlns:a="http://schemas.openxmlformats.org/drawingml/2006/main">
               <a:ext uri="{FF2B5EF4-FFF2-40B4-BE49-F238E27FC236}">
-                <a16:creationId xmlns:a16="http://schemas.microsoft.com/office/drawing/2014/main" id="{65A04C89-7D35-4F1A-8E65-D3B2118AD8F2}"/>
+                <a16:creationId xmlns:a16="http://schemas.microsoft.com/office/drawing/2014/main" id="{E5ADBB9B-B6FB-4322-AA10-2CC674B2EC8A}"/>
               </a:ext>
             </a:extLst>
           </p:cNvPr>
@@ -1248,10 +1248,10 @@
       </p:sp>
       <p:sp>
         <p:nvSpPr>
-          <p:cNvPr id="5" name="">
+          <p:cNvPr id="5" name="PPAGENT_QA|parent=sequential-step-2|domains=sequential-steps">
             <a:extLst xmlns:a="http://schemas.openxmlformats.org/drawingml/2006/main">
               <a:ext uri="{FF2B5EF4-FFF2-40B4-BE49-F238E27FC236}">
-                <a16:creationId xmlns:a16="http://schemas.microsoft.com/office/drawing/2014/main" id="{9E568A6B-890B-48B3-960D-27A0E92B1CFE}"/>
+                <a16:creationId xmlns:a16="http://schemas.microsoft.com/office/drawing/2014/main" id="{65F1334A-2EBC-4CBC-978E-FCAE87E16558}"/>
               </a:ext>
             </a:extLst>
           </p:cNvPr>
@@ -1287,10 +1287,10 @@
       </p:sp>
       <p:sp>
         <p:nvSpPr>
-          <p:cNvPr id="6" name="">
+          <p:cNvPr id="6" name="PPAGENT_QA|parent=sequential-step-3|domains=sequential-steps">
             <a:extLst xmlns:a="http://schemas.openxmlformats.org/drawingml/2006/main">
               <a:ext uri="{FF2B5EF4-FFF2-40B4-BE49-F238E27FC236}">
-                <a16:creationId xmlns:a16="http://schemas.microsoft.com/office/drawing/2014/main" id="{F9696C71-06AC-4960-BFEA-1479E163DE6F}"/>
+                <a16:creationId xmlns:a16="http://schemas.microsoft.com/office/drawing/2014/main" id="{CF6461C7-9C8E-4446-8404-6541D1129F34}"/>
               </a:ext>
             </a:extLst>
           </p:cNvPr>
@@ -1407,7 +1407,7 @@
           <p:cNvPr id="10" name="">
             <a:extLst xmlns:a="http://schemas.openxmlformats.org/drawingml/2006/main">
               <a:ext uri="{FF2B5EF4-FFF2-40B4-BE49-F238E27FC236}">
-                <a16:creationId xmlns:a16="http://schemas.microsoft.com/office/drawing/2014/main" id="{0C3F8828-787D-4AF1-AA29-15C9FE5D791F}"/>
+                <a16:creationId xmlns:a16="http://schemas.microsoft.com/office/drawing/2014/main" id="{9A23AEDE-A9A8-4461-BFC0-4967E8309847}"/>
               </a:ext>
             </a:extLst>
           </p:cNvPr>
@@ -1433,8 +1433,8 @@
           </a:ln>
         </p:spPr>
         <p:txBody>
-          <a:bodyPr xmlns:a="http://schemas.openxmlformats.org/drawingml/2006/main" lIns="114300" tIns="76200" rIns="114300" bIns="76200" anchor="ctr">
-            <a:normAutofit fontScale="57764"/>
+          <a:bodyPr xmlns:a="http://schemas.openxmlformats.org/drawingml/2006/main" lIns="0" tIns="0" rIns="0" bIns="0" anchor="ctr">
+            <a:normAutofit fontScale="100000"/>
           </a:bodyPr>
           <a:lstStyle xmlns:a="http://schemas.openxmlformats.org/drawingml/2006/main"/>
           <a:p xmlns:a="http://schemas.openxmlformats.org/drawingml/2006/main">
@@ -1464,10 +1464,10 @@
       </p:sp>
       <p:sp>
         <p:nvSpPr>
-          <p:cNvPr id="11" name="">
+          <p:cNvPr id="11" name="PPAGENT_QA|within=sequential-step-0|role=title">
             <a:extLst xmlns:a="http://schemas.openxmlformats.org/drawingml/2006/main">
               <a:ext uri="{FF2B5EF4-FFF2-40B4-BE49-F238E27FC236}">
-                <a16:creationId xmlns:a16="http://schemas.microsoft.com/office/drawing/2014/main" id="{E0A785C8-C051-49BD-8D23-3465486094DF}"/>
+                <a16:creationId xmlns:a16="http://schemas.microsoft.com/office/drawing/2014/main" id="{506D057F-7BAA-44ED-92BA-49B9C53C79CA}"/>
               </a:ext>
             </a:extLst>
           </p:cNvPr>
@@ -1522,10 +1522,10 @@
       </p:sp>
       <p:sp>
         <p:nvSpPr>
-          <p:cNvPr id="12" name="">
+          <p:cNvPr id="12" name="PPAGENT_QA|within=sequential-step-0|role=body">
             <a:extLst xmlns:a="http://schemas.openxmlformats.org/drawingml/2006/main">
               <a:ext uri="{FF2B5EF4-FFF2-40B4-BE49-F238E27FC236}">
-                <a16:creationId xmlns:a16="http://schemas.microsoft.com/office/drawing/2014/main" id="{AC4A079A-9C84-4FD6-AB51-1EE6C50FF5C1}"/>
+                <a16:creationId xmlns:a16="http://schemas.microsoft.com/office/drawing/2014/main" id="{603191C5-909B-46A1-9909-2D8032570616}"/>
               </a:ext>
             </a:extLst>
           </p:cNvPr>
@@ -1555,7 +1555,7 @@
           <a:lstStyle xmlns:a="http://schemas.openxmlformats.org/drawingml/2006/main"/>
           <a:p xmlns:a="http://schemas.openxmlformats.org/drawingml/2006/main">
             <a:pPr algn="ctr">
-              <a:defRPr sz="1200" b="0">
+              <a:defRPr sz="1350" b="0">
                 <a:solidFill>
                   <a:srgbClr val="EAF6FF"/>
                 </a:solidFill>
@@ -1565,7 +1565,7 @@
               </a:defRPr>
             </a:pPr>
             <a:r>
-              <a:rPr sz="1200" b="0">
+              <a:rPr sz="1350" b="0">
                 <a:solidFill>
                   <a:srgbClr val="EAF6FF"/>
                 </a:solidFill>
@@ -1583,7 +1583,7 @@
           <p:cNvPr id="13" name="">
             <a:extLst xmlns:a="http://schemas.openxmlformats.org/drawingml/2006/main">
               <a:ext uri="{FF2B5EF4-FFF2-40B4-BE49-F238E27FC236}">
-                <a16:creationId xmlns:a16="http://schemas.microsoft.com/office/drawing/2014/main" id="{3D81B48C-B6AD-4279-806D-2E79F6A15D11}"/>
+                <a16:creationId xmlns:a16="http://schemas.microsoft.com/office/drawing/2014/main" id="{9144BBEE-862C-4091-86A0-2ED15D7D2E3E}"/>
               </a:ext>
             </a:extLst>
           </p:cNvPr>
@@ -1609,8 +1609,8 @@
           </a:ln>
         </p:spPr>
         <p:txBody>
-          <a:bodyPr xmlns:a="http://schemas.openxmlformats.org/drawingml/2006/main" lIns="114300" tIns="76200" rIns="114300" bIns="76200" anchor="ctr">
-            <a:normAutofit fontScale="57764"/>
+          <a:bodyPr xmlns:a="http://schemas.openxmlformats.org/drawingml/2006/main" lIns="0" tIns="0" rIns="0" bIns="0" anchor="ctr">
+            <a:normAutofit fontScale="100000"/>
           </a:bodyPr>
           <a:lstStyle xmlns:a="http://schemas.openxmlformats.org/drawingml/2006/main"/>
           <a:p xmlns:a="http://schemas.openxmlformats.org/drawingml/2006/main">
@@ -1640,10 +1640,10 @@
       </p:sp>
       <p:sp>
         <p:nvSpPr>
-          <p:cNvPr id="14" name="">
+          <p:cNvPr id="14" name="PPAGENT_QA|within=sequential-step-1|role=title">
             <a:extLst xmlns:a="http://schemas.openxmlformats.org/drawingml/2006/main">
               <a:ext uri="{FF2B5EF4-FFF2-40B4-BE49-F238E27FC236}">
-                <a16:creationId xmlns:a16="http://schemas.microsoft.com/office/drawing/2014/main" id="{0F1FB11A-86A0-434A-BF38-BA17406F0BD2}"/>
+                <a16:creationId xmlns:a16="http://schemas.microsoft.com/office/drawing/2014/main" id="{1D37EF8F-2841-4E23-84D9-BA11B9CC5DF5}"/>
               </a:ext>
             </a:extLst>
           </p:cNvPr>
@@ -1698,10 +1698,10 @@
       </p:sp>
       <p:sp>
         <p:nvSpPr>
-          <p:cNvPr id="15" name="">
+          <p:cNvPr id="15" name="PPAGENT_QA|within=sequential-step-1|role=body">
             <a:extLst xmlns:a="http://schemas.openxmlformats.org/drawingml/2006/main">
               <a:ext uri="{FF2B5EF4-FFF2-40B4-BE49-F238E27FC236}">
-                <a16:creationId xmlns:a16="http://schemas.microsoft.com/office/drawing/2014/main" id="{481226B6-15A6-482F-84E3-3CDF0E9C7C4F}"/>
+                <a16:creationId xmlns:a16="http://schemas.microsoft.com/office/drawing/2014/main" id="{8D91A8A4-75E2-4ED8-83E4-63A816A17A5D}"/>
               </a:ext>
             </a:extLst>
           </p:cNvPr>
@@ -1731,7 +1731,7 @@
           <a:lstStyle xmlns:a="http://schemas.openxmlformats.org/drawingml/2006/main"/>
           <a:p xmlns:a="http://schemas.openxmlformats.org/drawingml/2006/main">
             <a:pPr algn="ctr">
-              <a:defRPr sz="1200" b="0">
+              <a:defRPr sz="1350" b="0">
                 <a:solidFill>
                   <a:srgbClr val="EAF6FF"/>
                 </a:solidFill>
@@ -1741,7 +1741,7 @@
               </a:defRPr>
             </a:pPr>
             <a:r>
-              <a:rPr sz="1200" b="0">
+              <a:rPr sz="1350" b="0">
                 <a:solidFill>
                   <a:srgbClr val="EAF6FF"/>
                 </a:solidFill>
@@ -1759,7 +1759,7 @@
           <p:cNvPr id="16" name="">
             <a:extLst xmlns:a="http://schemas.openxmlformats.org/drawingml/2006/main">
               <a:ext uri="{FF2B5EF4-FFF2-40B4-BE49-F238E27FC236}">
-                <a16:creationId xmlns:a16="http://schemas.microsoft.com/office/drawing/2014/main" id="{FDD1B7AB-D688-4C4C-8AEF-1B44C30CBE90}"/>
+                <a16:creationId xmlns:a16="http://schemas.microsoft.com/office/drawing/2014/main" id="{FE3513FF-0DF3-4AC1-9601-B263E53DD767}"/>
               </a:ext>
             </a:extLst>
           </p:cNvPr>
@@ -1785,8 +1785,8 @@
           </a:ln>
         </p:spPr>
         <p:txBody>
-          <a:bodyPr xmlns:a="http://schemas.openxmlformats.org/drawingml/2006/main" lIns="114300" tIns="76200" rIns="114300" bIns="76200" anchor="ctr">
-            <a:normAutofit fontScale="57764"/>
+          <a:bodyPr xmlns:a="http://schemas.openxmlformats.org/drawingml/2006/main" lIns="0" tIns="0" rIns="0" bIns="0" anchor="ctr">
+            <a:normAutofit fontScale="100000"/>
           </a:bodyPr>
           <a:lstStyle xmlns:a="http://schemas.openxmlformats.org/drawingml/2006/main"/>
           <a:p xmlns:a="http://schemas.openxmlformats.org/drawingml/2006/main">
@@ -1816,10 +1816,10 @@
       </p:sp>
       <p:sp>
         <p:nvSpPr>
-          <p:cNvPr id="17" name="">
+          <p:cNvPr id="17" name="PPAGENT_QA|within=sequential-step-2|role=title">
             <a:extLst xmlns:a="http://schemas.openxmlformats.org/drawingml/2006/main">
               <a:ext uri="{FF2B5EF4-FFF2-40B4-BE49-F238E27FC236}">
-                <a16:creationId xmlns:a16="http://schemas.microsoft.com/office/drawing/2014/main" id="{993A3354-EDB7-49BE-89AC-D6432BFBBBDE}"/>
+                <a16:creationId xmlns:a16="http://schemas.microsoft.com/office/drawing/2014/main" id="{97564F43-3A57-472F-A4E2-9E2DEF7A1AE3}"/>
               </a:ext>
             </a:extLst>
           </p:cNvPr>
@@ -1874,10 +1874,10 @@
       </p:sp>
       <p:sp>
         <p:nvSpPr>
-          <p:cNvPr id="18" name="">
+          <p:cNvPr id="18" name="PPAGENT_QA|within=sequential-step-2|role=body">
             <a:extLst xmlns:a="http://schemas.openxmlformats.org/drawingml/2006/main">
               <a:ext uri="{FF2B5EF4-FFF2-40B4-BE49-F238E27FC236}">
-                <a16:creationId xmlns:a16="http://schemas.microsoft.com/office/drawing/2014/main" id="{4C1A4D97-AF4B-4010-9021-EEEACBB0CDCF}"/>
+                <a16:creationId xmlns:a16="http://schemas.microsoft.com/office/drawing/2014/main" id="{95AC3E6C-F54D-4D87-A30B-F9E0FBEBC3C8}"/>
               </a:ext>
             </a:extLst>
           </p:cNvPr>
@@ -1907,7 +1907,7 @@
           <a:lstStyle xmlns:a="http://schemas.openxmlformats.org/drawingml/2006/main"/>
           <a:p xmlns:a="http://schemas.openxmlformats.org/drawingml/2006/main">
             <a:pPr algn="ctr">
-              <a:defRPr sz="1200" b="0">
+              <a:defRPr sz="1350" b="0">
                 <a:solidFill>
                   <a:srgbClr val="EAF6FF"/>
                 </a:solidFill>
@@ -1917,7 +1917,7 @@
               </a:defRPr>
             </a:pPr>
             <a:r>
-              <a:rPr sz="1200" b="0">
+              <a:rPr sz="1350" b="0">
                 <a:solidFill>
                   <a:srgbClr val="EAF6FF"/>
                 </a:solidFill>
@@ -1935,7 +1935,7 @@
           <p:cNvPr id="19" name="">
             <a:extLst xmlns:a="http://schemas.openxmlformats.org/drawingml/2006/main">
               <a:ext uri="{FF2B5EF4-FFF2-40B4-BE49-F238E27FC236}">
-                <a16:creationId xmlns:a16="http://schemas.microsoft.com/office/drawing/2014/main" id="{DBF3AE69-B782-485A-A1BF-481040AFB619}"/>
+                <a16:creationId xmlns:a16="http://schemas.microsoft.com/office/drawing/2014/main" id="{BA574999-E959-4258-85A3-FC13FBB261F0}"/>
               </a:ext>
             </a:extLst>
           </p:cNvPr>
@@ -1961,8 +1961,8 @@
           </a:ln>
         </p:spPr>
         <p:txBody>
-          <a:bodyPr xmlns:a="http://schemas.openxmlformats.org/drawingml/2006/main" lIns="114300" tIns="76200" rIns="114300" bIns="76200" anchor="ctr">
-            <a:normAutofit fontScale="57764"/>
+          <a:bodyPr xmlns:a="http://schemas.openxmlformats.org/drawingml/2006/main" lIns="0" tIns="0" rIns="0" bIns="0" anchor="ctr">
+            <a:normAutofit fontScale="100000"/>
           </a:bodyPr>
           <a:lstStyle xmlns:a="http://schemas.openxmlformats.org/drawingml/2006/main"/>
           <a:p xmlns:a="http://schemas.openxmlformats.org/drawingml/2006/main">
@@ -1992,10 +1992,10 @@
       </p:sp>
       <p:sp>
         <p:nvSpPr>
-          <p:cNvPr id="20" name="">
+          <p:cNvPr id="20" name="PPAGENT_QA|within=sequential-step-3|role=title">
             <a:extLst xmlns:a="http://schemas.openxmlformats.org/drawingml/2006/main">
               <a:ext uri="{FF2B5EF4-FFF2-40B4-BE49-F238E27FC236}">
-                <a16:creationId xmlns:a16="http://schemas.microsoft.com/office/drawing/2014/main" id="{4A5696E5-BE0B-482F-9128-B6BFDE78B79E}"/>
+                <a16:creationId xmlns:a16="http://schemas.microsoft.com/office/drawing/2014/main" id="{80923ECD-7F88-4DCE-A42C-527F569F821A}"/>
               </a:ext>
             </a:extLst>
           </p:cNvPr>
@@ -2050,10 +2050,10 @@
       </p:sp>
       <p:sp>
         <p:nvSpPr>
-          <p:cNvPr id="21" name="">
+          <p:cNvPr id="21" name="PPAGENT_QA|within=sequential-step-3|role=body">
             <a:extLst xmlns:a="http://schemas.openxmlformats.org/drawingml/2006/main">
               <a:ext uri="{FF2B5EF4-FFF2-40B4-BE49-F238E27FC236}">
-                <a16:creationId xmlns:a16="http://schemas.microsoft.com/office/drawing/2014/main" id="{49C629C2-05AD-4096-BC96-154E021C5EE6}"/>
+                <a16:creationId xmlns:a16="http://schemas.microsoft.com/office/drawing/2014/main" id="{C85D1FC0-EFB6-4BFA-9767-3E72C3F7C392}"/>
               </a:ext>
             </a:extLst>
           </p:cNvPr>
@@ -2083,7 +2083,7 @@
           <a:lstStyle xmlns:a="http://schemas.openxmlformats.org/drawingml/2006/main"/>
           <a:p xmlns:a="http://schemas.openxmlformats.org/drawingml/2006/main">
             <a:pPr algn="ctr">
-              <a:defRPr sz="1200" b="0">
+              <a:defRPr sz="1350" b="0">
                 <a:solidFill>
                   <a:srgbClr val="EAF6FF"/>
                 </a:solidFill>
@@ -2093,7 +2093,7 @@
               </a:defRPr>
             </a:pPr>
             <a:r>
-              <a:rPr sz="1200" b="0">
+              <a:rPr sz="1350" b="0">
                 <a:solidFill>
                   <a:srgbClr val="EAF6FF"/>
                 </a:solidFill>
@@ -2109,7 +2109,7 @@
     </p:spTree>
     <p:extLst>
       <p:ext uri="{BB962C8B-B14F-4D97-AF65-F5344CB8AC3E}">
-        <p14:creationId xmlns:p14="http://schemas.microsoft.com/office/powerpoint/2010/main" val="1614019243"/>
+        <p14:creationId xmlns:p14="http://schemas.microsoft.com/office/powerpoint/2010/main" val="1717892373"/>
       </p:ext>
     </p:extLst>
   </p:cSld>

--- a/assets/结构图/顺序流程-001/example.pptx
+++ b/assets/结构图/顺序流程-001/example.pptx
@@ -2,13 +2,15 @@
 <file path=ppt/presentation.xml><?xml version="1.0" encoding="utf-8"?>
 <p:presentation xmlns:p="http://schemas.openxmlformats.org/presentationml/2006/main">
   <p:sldMasterIdLst>
-    <p:sldMasterId xmlns:r="http://schemas.openxmlformats.org/officeDocument/2006/relationships" id="2147483648" r:id="R78195fe58ceb4819"/>
+    <p:sldMasterId xmlns:r="http://schemas.openxmlformats.org/officeDocument/2006/relationships" id="2147483648" r:id="Rb214928639b44edd"/>
+    <p:sldMasterId xmlns:r="http://schemas.openxmlformats.org/officeDocument/2006/relationships" id="2147483660" r:id="R74a2c469a5934eb5"/>
+    <p:sldMasterId xmlns:r="http://schemas.openxmlformats.org/officeDocument/2006/relationships" id="2147483663" r:id="Rafc8cc573805428b"/>
   </p:sldMasterIdLst>
   <p:notesMasterIdLst>
-    <p:notesMasterId xmlns:r="http://schemas.openxmlformats.org/officeDocument/2006/relationships" r:id="R5927a62b908c46c3"/>
+    <p:notesMasterId xmlns:r="http://schemas.openxmlformats.org/officeDocument/2006/relationships" r:id="Rd3ef064e4c714f9e"/>
   </p:notesMasterIdLst>
   <p:sldIdLst>
-    <p:sldId xmlns:r="http://schemas.openxmlformats.org/officeDocument/2006/relationships" id="256" r:id="Rf02c2282fb1a4b5f"/>
+    <p:sldId xmlns:r="http://schemas.openxmlformats.org/officeDocument/2006/relationships" id="256" r:id="Rab1d121d24e34a2a"/>
   </p:sldIdLst>
   <p:sldSz cx="12192000" cy="6858000"/>
   <p:notesSz cx="6858000" cy="9144000"/>
@@ -157,65 +159,125 @@
 </p:notesMaster>
 </file>
 
-<file path=ppt/notesMasters/theme/theme3.xml><?xml version="1.0" encoding="utf-8"?>
-<a:theme xmlns:a="http://schemas.openxmlformats.org/drawingml/2006/main" name="ChatGPT">
+<file path=ppt/notesMasters/theme/theme5.xml><?xml version="1.0" encoding="utf-8"?>
+<a:theme xmlns:a="http://schemas.openxmlformats.org/drawingml/2006/main" name="Office 主题​​">
   <a:themeElements>
-    <a:clrScheme name="ChatGPT">
+    <a:clrScheme name="Office">
       <a:dk1>
-        <a:srgbClr val="000000"/>
+        <a:sysClr val="windowText" lastClr="000000"/>
       </a:dk1>
       <a:lt1>
-        <a:srgbClr val="FFFFFF"/>
+        <a:sysClr val="window" lastClr="FFFFFF"/>
       </a:lt1>
       <a:dk2>
-        <a:srgbClr val="0E2841"/>
+        <a:srgbClr val="44546A"/>
       </a:dk2>
       <a:lt2>
-        <a:srgbClr val="E8E8E8"/>
+        <a:srgbClr val="E7E6E6"/>
       </a:lt2>
       <a:accent1>
-        <a:srgbClr val="156082"/>
+        <a:srgbClr val="4472C4"/>
       </a:accent1>
       <a:accent2>
-        <a:srgbClr val="E97132"/>
+        <a:srgbClr val="ED7D31"/>
       </a:accent2>
       <a:accent3>
-        <a:srgbClr val="196B24"/>
+        <a:srgbClr val="A5A5A5"/>
       </a:accent3>
       <a:accent4>
-        <a:srgbClr val="0F9ED5"/>
+        <a:srgbClr val="FFC000"/>
       </a:accent4>
       <a:accent5>
-        <a:srgbClr val="A02B93"/>
+        <a:srgbClr val="5B9BD5"/>
       </a:accent5>
       <a:accent6>
-        <a:srgbClr val="4EA72E"/>
+        <a:srgbClr val="70AD47"/>
       </a:accent6>
       <a:hlink>
-        <a:srgbClr val="467886"/>
+        <a:srgbClr val="0563C1"/>
       </a:hlink>
       <a:folHlink>
-        <a:srgbClr val="96607D"/>
+        <a:srgbClr val="954F72"/>
       </a:folHlink>
     </a:clrScheme>
     <a:fontScheme name="Office">
       <a:majorFont>
-        <a:latin typeface="Calibri Light"/>
-        <a:ea typeface="Calibri Light"/>
-        <a:cs typeface="Calibri Light"/>
+        <a:latin typeface="等线 Light"/>
+        <a:ea typeface=""/>
+        <a:cs typeface=""/>
+        <a:font script="Jpan" typeface="游ゴシック Light"/>
+        <a:font script="Hang" typeface="맑은 고딕"/>
+        <a:font script="Hans" typeface="等线 Light"/>
+        <a:font script="Hant" typeface="新細明體"/>
+        <a:font script="Arab" typeface="Times New Roman"/>
+        <a:font script="Hebr" typeface="Times New Roman"/>
+        <a:font script="Thai" typeface="Angsana New"/>
+        <a:font script="Ethi" typeface="Nyala"/>
+        <a:font script="Beng" typeface="Vrinda"/>
+        <a:font script="Gujr" typeface="Shruti"/>
+        <a:font script="Khmr" typeface="MoolBoran"/>
+        <a:font script="Knda" typeface="Tunga"/>
+        <a:font script="Guru" typeface="Raavi"/>
+        <a:font script="Cans" typeface="Euphemia"/>
+        <a:font script="Cher" typeface="Plantagenet Cherokee"/>
+        <a:font script="Yiii" typeface="Microsoft Yi Baiti"/>
+        <a:font script="Tibt" typeface="Microsoft Himalaya"/>
+        <a:font script="Thaa" typeface="MV Boli"/>
+        <a:font script="Deva" typeface="Mangal"/>
+        <a:font script="Telu" typeface="Gautami"/>
+        <a:font script="Taml" typeface="Latha"/>
+        <a:font script="Syrc" typeface="Estrangelo Edessa"/>
+        <a:font script="Orya" typeface="Kalinga"/>
+        <a:font script="Mlym" typeface="Kartika"/>
+        <a:font script="Laoo" typeface="DokChampa"/>
+        <a:font script="Sinh" typeface="Iskoola Pota"/>
+        <a:font script="Mong" typeface="Mongolian Baiti"/>
+        <a:font script="Viet" typeface="Times New Roman"/>
+        <a:font script="Uigh" typeface="Microsoft Uighur"/>
+        <a:font script="Geor" typeface="Sylfaen"/>
       </a:majorFont>
       <a:minorFont>
-        <a:latin typeface="Calibri"/>
-        <a:ea typeface="Calibri"/>
-        <a:cs typeface="Calibri"/>
+        <a:latin typeface="等线"/>
+        <a:ea typeface=""/>
+        <a:cs typeface=""/>
+        <a:font script="Jpan" typeface="游ゴシック"/>
+        <a:font script="Hang" typeface="맑은 고딕"/>
+        <a:font script="Hans" typeface="等线"/>
+        <a:font script="Hant" typeface="新細明體"/>
+        <a:font script="Arab" typeface="Arial"/>
+        <a:font script="Hebr" typeface="Arial"/>
+        <a:font script="Thai" typeface="Cordia New"/>
+        <a:font script="Ethi" typeface="Nyala"/>
+        <a:font script="Beng" typeface="Vrinda"/>
+        <a:font script="Gujr" typeface="Shruti"/>
+        <a:font script="Khmr" typeface="DaunPenh"/>
+        <a:font script="Knda" typeface="Tunga"/>
+        <a:font script="Guru" typeface="Raavi"/>
+        <a:font script="Cans" typeface="Euphemia"/>
+        <a:font script="Cher" typeface="Plantagenet Cherokee"/>
+        <a:font script="Yiii" typeface="Microsoft Yi Baiti"/>
+        <a:font script="Tibt" typeface="Microsoft Himalaya"/>
+        <a:font script="Thaa" typeface="MV Boli"/>
+        <a:font script="Deva" typeface="Mangal"/>
+        <a:font script="Telu" typeface="Gautami"/>
+        <a:font script="Taml" typeface="Latha"/>
+        <a:font script="Syrc" typeface="Estrangelo Edessa"/>
+        <a:font script="Orya" typeface="Kalinga"/>
+        <a:font script="Mlym" typeface="Kartika"/>
+        <a:font script="Laoo" typeface="DokChampa"/>
+        <a:font script="Sinh" typeface="Iskoola Pota"/>
+        <a:font script="Mong" typeface="Mongolian Baiti"/>
+        <a:font script="Viet" typeface="Arial"/>
+        <a:font script="Uigh" typeface="Microsoft Uighur"/>
+        <a:font script="Geor" typeface="Sylfaen"/>
       </a:minorFont>
     </a:fontScheme>
-    <a:fmtScheme name="ChatGPT">
+    <a:fmtScheme name="Office">
       <a:fillStyleLst>
         <a:solidFill>
           <a:schemeClr val="phClr"/>
         </a:solidFill>
-        <a:gradFill>
+        <a:gradFill rotWithShape="1">
           <a:gsLst>
             <a:gs pos="0">
               <a:schemeClr val="phClr">
@@ -241,7 +303,7 @@
           </a:gsLst>
           <a:lin ang="5400000" scaled="0"/>
         </a:gradFill>
-        <a:gradFill>
+        <a:gradFill rotWithShape="1">
           <a:gsLst>
             <a:gs pos="0">
               <a:schemeClr val="phClr">
@@ -269,6 +331,12 @@
         </a:gradFill>
       </a:fillStyleLst>
       <a:lnStyleLst>
+        <a:ln w="6350">
+          <a:solidFill>
+            <a:schemeClr val="phClr"/>
+          </a:solidFill>
+          <a:prstDash val="solid"/>
+        </a:ln>
         <a:ln w="12700">
           <a:solidFill>
             <a:schemeClr val="phClr"/>
@@ -276,12 +344,6 @@
           <a:prstDash val="solid"/>
         </a:ln>
         <a:ln w="19050">
-          <a:solidFill>
-            <a:schemeClr val="phClr"/>
-          </a:solidFill>
-          <a:prstDash val="solid"/>
-        </a:ln>
-        <a:ln w="25400">
           <a:solidFill>
             <a:schemeClr val="phClr"/>
           </a:solidFill>
@@ -297,63 +359,9 @@
         </a:effectStyle>
         <a:effectStyle>
           <a:effectLst>
-            <a:outerShdw blurRad="57150" dist="19050" dir="5400000">
+            <a:outerShdw blurRad="57150" dist="19050" dir="5400000" algn="ctr" rotWithShape="0">
               <a:srgbClr val="000000">
-                <a:alpha val="16000"/>
-              </a:srgbClr>
-            </a:outerShdw>
-          </a:effectLst>
-        </a:effectStyle>
-        <a:effectStyle>
-          <a:effectLst>
-            <a:outerShdw blurRad="19050" dist="9525" dir="5400000">
-              <a:srgbClr val="000000">
-                <a:alpha val="6000"/>
-              </a:srgbClr>
-            </a:outerShdw>
-          </a:effectLst>
-        </a:effectStyle>
-        <a:effectStyle>
-          <a:effectLst>
-            <a:outerShdw blurRad="28575" dist="9525" dir="5400000">
-              <a:srgbClr val="000000">
-                <a:alpha val="8000"/>
-              </a:srgbClr>
-            </a:outerShdw>
-          </a:effectLst>
-        </a:effectStyle>
-        <a:effectStyle>
-          <a:effectLst>
-            <a:outerShdw blurRad="57150" dist="19050" dir="5400000">
-              <a:srgbClr val="000000">
-                <a:alpha val="10000"/>
-              </a:srgbClr>
-            </a:outerShdw>
-          </a:effectLst>
-        </a:effectStyle>
-        <a:effectStyle>
-          <a:effectLst>
-            <a:outerShdw blurRad="114300" dist="38100" dir="5400000">
-              <a:srgbClr val="000000">
-                <a:alpha val="12000"/>
-              </a:srgbClr>
-            </a:outerShdw>
-          </a:effectLst>
-        </a:effectStyle>
-        <a:effectStyle>
-          <a:effectLst>
-            <a:outerShdw blurRad="171450" dist="57150" dir="5400000">
-              <a:srgbClr val="000000">
-                <a:alpha val="16000"/>
-              </a:srgbClr>
-            </a:outerShdw>
-          </a:effectLst>
-        </a:effectStyle>
-        <a:effectStyle>
-          <a:effectLst>
-            <a:outerShdw blurRad="266700" dist="95250" dir="5400000">
-              <a:srgbClr val="000000">
-                <a:alpha val="24000"/>
+                <a:alpha val="63000"/>
               </a:srgbClr>
             </a:outerShdw>
           </a:effectLst>
@@ -369,7 +377,7 @@
             <a:satMod val="170000"/>
           </a:schemeClr>
         </a:solidFill>
-        <a:gradFill>
+        <a:gradFill rotWithShape="1">
           <a:gsLst>
             <a:gs pos="0">
               <a:schemeClr val="phClr">
@@ -440,7 +448,42 @@
         <p:txBody>
           <a:bodyPr xmlns:a="http://schemas.openxmlformats.org/drawingml/2006/main"/>
           <a:lstStyle xmlns:a="http://schemas.openxmlformats.org/drawingml/2006/main"/>
-          <a:p xmlns:a="http://schemas.openxmlformats.org/drawingml/2006/main"/>
+          <a:p xmlns:a="http://schemas.openxmlformats.org/drawingml/2006/main">
+            <a:r>
+              <a:t>[Sources]</a:t>
+            </a:r>
+            <a:endParaRPr/>
+          </a:p>
+          <a:p xmlns:a="http://schemas.openxmlformats.org/drawingml/2006/main">
+            <a:r>
+              <a:t>- Shell：PPT源/PPT模板-封面正文尾页.pptx 第 3 页</a:t>
+            </a:r>
+            <a:endParaRPr/>
+          </a:p>
+          <a:p xmlns:a="http://schemas.openxmlformats.org/drawingml/2006/main">
+            <a:r>
+              <a:t>- Style Group 来源：PPT源/狗哥蓝色-精美逻辑图PPT模板.pptx#27</a:t>
+            </a:r>
+            <a:endParaRPr/>
+          </a:p>
+          <a:p xmlns:a="http://schemas.openxmlformats.org/drawingml/2006/main">
+            <a:r>
+              <a:t>- 结构：sequence / sequence-arrow-cards-p27 / 4项</a:t>
+            </a:r>
+            <a:endParaRPr/>
+          </a:p>
+          <a:p xmlns:a="http://schemas.openxmlformats.org/drawingml/2006/main">
+            <a:r>
+              <a:t>- 媒体契约：no-image</a:t>
+            </a:r>
+            <a:endParaRPr/>
+          </a:p>
+          <a:p xmlns:a="http://schemas.openxmlformats.org/drawingml/2006/main">
+            <a:r>
+              <a:t>[/Sources]</a:t>
+            </a:r>
+            <a:endParaRPr/>
+          </a:p>
         </p:txBody>
       </p:sp>
       <p:sp>
@@ -469,8 +512,826 @@
 </file>
 
 <file path=ppt/slideLayouts/slideLayout1.xml><?xml version="1.0" encoding="utf-8"?>
-<p:sldLayout xmlns:p="http://schemas.openxmlformats.org/presentationml/2006/main" type="title">
-  <p:cSld name="Title Slide">
+<p:sldLayout xmlns:p="http://schemas.openxmlformats.org/presentationml/2006/main" preserve="1" userDrawn="1">
+  <p:cSld name="标题幻灯片">
+    <p:spTree>
+      <p:nvGrpSpPr>
+        <p:cNvPr id="1" name=""/>
+        <p:cNvGrpSpPr/>
+        <p:nvPr/>
+      </p:nvGrpSpPr>
+      <p:grpSpPr>
+        <a:xfrm xmlns:a="http://schemas.openxmlformats.org/drawingml/2006/main"/>
+      </p:grpSpPr>
+      <p:pic>
+        <p:nvPicPr>
+          <p:cNvPr id="4" name="图片 21"/>
+          <p:cNvPicPr>
+            <a:picLocks xmlns:a="http://schemas.openxmlformats.org/drawingml/2006/main" noChangeAspect="1"/>
+          </p:cNvPicPr>
+          <p:nvPr/>
+        </p:nvPicPr>
+        <p:blipFill>
+          <a:blip xmlns:r="http://schemas.openxmlformats.org/officeDocument/2006/relationships" xmlns:a="http://schemas.openxmlformats.org/drawingml/2006/main" r:embed="R6bcf542139954c8e">
+            <a:alphaModFix amt="20000"/>
+            <a:clrChange>
+              <a:clrFrom>
+                <a:srgbClr val="FFFFFF"/>
+              </a:clrFrom>
+              <a:clrTo>
+                <a:srgbClr val="FFFFFF">
+                  <a:alpha val="0"/>
+                </a:srgbClr>
+              </a:clrTo>
+            </a:clrChange>
+            <a:duotone>
+              <a:schemeClr val="bg2">
+                <a:shade val="45000"/>
+                <a:satMod val="135000"/>
+              </a:schemeClr>
+              <a:prstClr val="white"/>
+            </a:duotone>
+          </a:blip>
+          <a:srcRect xmlns:a="http://schemas.openxmlformats.org/drawingml/2006/main" l="-375" t="36417" r="375" b="17715"/>
+          <a:stretch xmlns:a="http://schemas.openxmlformats.org/drawingml/2006/main">
+            <a:fillRect l="0" t="0" r="0" b="0"/>
+          </a:stretch>
+        </p:blipFill>
+        <p:spPr>
+          <a:xfrm xmlns:a="http://schemas.openxmlformats.org/drawingml/2006/main">
+            <a:off x="-188953" y="3125718"/>
+            <a:ext cx="12697941" cy="4114800"/>
+          </a:xfrm>
+          <a:prstGeom xmlns:a="http://schemas.openxmlformats.org/drawingml/2006/main" prst="rect">
+            <a:avLst/>
+          </a:prstGeom>
+        </p:spPr>
+      </p:pic>
+      <p:pic>
+        <p:nvPicPr>
+          <p:cNvPr id="5" name="图片 24"/>
+          <p:cNvPicPr>
+            <a:picLocks xmlns:a="http://schemas.openxmlformats.org/drawingml/2006/main" noChangeAspect="1"/>
+          </p:cNvPicPr>
+          <p:nvPr/>
+        </p:nvPicPr>
+        <p:blipFill>
+          <a:blip xmlns:r="http://schemas.openxmlformats.org/officeDocument/2006/relationships" xmlns:a="http://schemas.openxmlformats.org/drawingml/2006/main" r:embed="R71aa1341dde5402a"/>
+          <a:srcRect xmlns:a="http://schemas.openxmlformats.org/drawingml/2006/main" l="0" t="0" r="0" b="60826"/>
+          <a:stretch xmlns:a="http://schemas.openxmlformats.org/drawingml/2006/main">
+            <a:fillRect l="0" t="0" r="0" b="0"/>
+          </a:stretch>
+        </p:blipFill>
+        <p:spPr>
+          <a:xfrm xmlns:a="http://schemas.openxmlformats.org/drawingml/2006/main">
+            <a:off x="133584" y="72497"/>
+            <a:ext cx="3337845" cy="708895"/>
+          </a:xfrm>
+          <a:prstGeom xmlns:a="http://schemas.openxmlformats.org/drawingml/2006/main" prst="rect">
+            <a:avLst/>
+          </a:prstGeom>
+        </p:spPr>
+      </p:pic>
+      <p:pic>
+        <p:nvPicPr>
+          <p:cNvPr id="6" name="图片 1"/>
+          <p:cNvPicPr>
+            <a:picLocks xmlns:a="http://schemas.openxmlformats.org/drawingml/2006/main" noChangeAspect="1"/>
+          </p:cNvPicPr>
+          <p:nvPr/>
+        </p:nvPicPr>
+        <p:blipFill>
+          <a:blip xmlns:r="http://schemas.openxmlformats.org/officeDocument/2006/relationships" xmlns:a="http://schemas.openxmlformats.org/drawingml/2006/main" r:embed="Rd3bc458e214d47ca"/>
+          <a:stretch xmlns:a="http://schemas.openxmlformats.org/drawingml/2006/main">
+            <a:fillRect l="0" t="0" r="0" b="0"/>
+          </a:stretch>
+        </p:blipFill>
+        <p:spPr>
+          <a:xfrm xmlns:a="http://schemas.openxmlformats.org/drawingml/2006/main">
+            <a:off x="7089206" y="72497"/>
+            <a:ext cx="5102794" cy="914479"/>
+          </a:xfrm>
+          <a:prstGeom xmlns:a="http://schemas.openxmlformats.org/drawingml/2006/main" prst="rect">
+            <a:avLst/>
+          </a:prstGeom>
+        </p:spPr>
+      </p:pic>
+    </p:spTree>
+  </p:cSld>
+</p:sldLayout>
+</file>
+
+<file path=ppt/slideLayouts/slideLayout10.xml><?xml version="1.0" encoding="utf-8"?>
+<p:sldLayout xmlns:p="http://schemas.openxmlformats.org/presentationml/2006/main" type="vertTx" preserve="1">
+  <p:cSld name="标题和竖排文字">
+    <p:spTree>
+      <p:nvGrpSpPr>
+        <p:cNvPr id="1" name=""/>
+        <p:cNvGrpSpPr/>
+        <p:nvPr/>
+      </p:nvGrpSpPr>
+      <p:grpSpPr>
+        <a:xfrm xmlns:a="http://schemas.openxmlformats.org/drawingml/2006/main"/>
+      </p:grpSpPr>
+      <p:sp>
+        <p:nvSpPr>
+          <p:cNvPr id="2" name="标题 1">
+            <a:extLst xmlns:a="http://schemas.openxmlformats.org/drawingml/2006/main">
+              <a:ext uri="{FF2B5EF4-FFF2-40B4-BE49-F238E27FC236}">
+                <a16:creationId xmlns:a16="http://schemas.microsoft.com/office/drawing/2014/main" id="{3DFB291A-61D6-4D3D-8825-B11D9FD43608}"/>
+              </a:ext>
+            </a:extLst>
+          </p:cNvPr>
+          <p:cNvSpPr>
+            <a:spLocks xmlns:a="http://schemas.openxmlformats.org/drawingml/2006/main" noGrp="1"/>
+          </p:cNvSpPr>
+          <p:nvPr>
+            <p:ph type="title" idx="0"/>
+          </p:nvPr>
+        </p:nvSpPr>
+        <p:spPr/>
+        <p:txBody>
+          <a:bodyPr xmlns:a="http://schemas.openxmlformats.org/drawingml/2006/main"/>
+          <a:lstStyle xmlns:a="http://schemas.openxmlformats.org/drawingml/2006/main"/>
+          <a:p xmlns:a="http://schemas.openxmlformats.org/drawingml/2006/main">
+            <a:r>
+              <a:t>单击此处编辑母版标题样式</a:t>
+            </a:r>
+          </a:p>
+        </p:txBody>
+      </p:sp>
+      <p:sp>
+        <p:nvSpPr>
+          <p:cNvPr id="3" name="竖排文字占位符 2">
+            <a:extLst xmlns:a="http://schemas.openxmlformats.org/drawingml/2006/main">
+              <a:ext uri="{FF2B5EF4-FFF2-40B4-BE49-F238E27FC236}">
+                <a16:creationId xmlns:a16="http://schemas.microsoft.com/office/drawing/2014/main" id="{374A710E-2331-4C75-AD97-05BBC8B975BF}"/>
+              </a:ext>
+            </a:extLst>
+          </p:cNvPr>
+          <p:cNvSpPr>
+            <a:spLocks xmlns:a="http://schemas.openxmlformats.org/drawingml/2006/main" noGrp="1"/>
+          </p:cNvSpPr>
+          <p:nvPr>
+            <p:ph type="body" idx="1"/>
+          </p:nvPr>
+        </p:nvSpPr>
+        <p:spPr/>
+        <p:txBody>
+          <a:bodyPr xmlns:a="http://schemas.openxmlformats.org/drawingml/2006/main" vert="eaVert"/>
+          <a:lstStyle xmlns:a="http://schemas.openxmlformats.org/drawingml/2006/main"/>
+          <a:p xmlns:a="http://schemas.openxmlformats.org/drawingml/2006/main">
+            <a:pPr lvl="0">
+              <a:buNone/>
+            </a:pPr>
+            <a:r>
+              <a:t>单击此处编辑母版文本样式</a:t>
+            </a:r>
+          </a:p>
+          <a:p xmlns:a="http://schemas.openxmlformats.org/drawingml/2006/main">
+            <a:pPr lvl="1">
+              <a:buNone/>
+            </a:pPr>
+            <a:r>
+              <a:t>二级</a:t>
+            </a:r>
+          </a:p>
+          <a:p xmlns:a="http://schemas.openxmlformats.org/drawingml/2006/main">
+            <a:pPr lvl="2">
+              <a:buNone/>
+            </a:pPr>
+            <a:r>
+              <a:t>三级</a:t>
+            </a:r>
+          </a:p>
+          <a:p xmlns:a="http://schemas.openxmlformats.org/drawingml/2006/main">
+            <a:pPr lvl="3">
+              <a:buNone/>
+            </a:pPr>
+            <a:r>
+              <a:t>四级</a:t>
+            </a:r>
+          </a:p>
+          <a:p xmlns:a="http://schemas.openxmlformats.org/drawingml/2006/main">
+            <a:pPr lvl="4">
+              <a:buNone/>
+            </a:pPr>
+            <a:r>
+              <a:t>五级</a:t>
+            </a:r>
+          </a:p>
+        </p:txBody>
+      </p:sp>
+      <p:sp>
+        <p:nvSpPr>
+          <p:cNvPr id="4" name="日期占位符 3">
+            <a:extLst xmlns:a="http://schemas.openxmlformats.org/drawingml/2006/main">
+              <a:ext uri="{FF2B5EF4-FFF2-40B4-BE49-F238E27FC236}">
+                <a16:creationId xmlns:a16="http://schemas.microsoft.com/office/drawing/2014/main" id="{E525E9E6-489D-48DF-98B4-8D62FE9E9182}"/>
+              </a:ext>
+            </a:extLst>
+          </p:cNvPr>
+          <p:cNvSpPr>
+            <a:spLocks xmlns:a="http://schemas.openxmlformats.org/drawingml/2006/main" noGrp="1"/>
+          </p:cNvSpPr>
+          <p:nvPr>
+            <p:ph type="dt" idx="10"/>
+          </p:nvPr>
+        </p:nvSpPr>
+        <p:spPr/>
+        <p:txBody>
+          <a:bodyPr xmlns:a="http://schemas.openxmlformats.org/drawingml/2006/main"/>
+          <a:lstStyle xmlns:a="http://schemas.openxmlformats.org/drawingml/2006/main"/>
+          <a:p xmlns:a="http://schemas.openxmlformats.org/drawingml/2006/main">
+            <a:fld id="{9F4852F6-D0EE-43FF-9758-4449F4064C7C}" type="datetimeFigureOut">
+              <a:t>2026/8/8</a:t>
+            </a:fld>
+            <a:endParaRPr/>
+          </a:p>
+        </p:txBody>
+      </p:sp>
+      <p:sp>
+        <p:nvSpPr>
+          <p:cNvPr id="5" name="页脚占位符 4">
+            <a:extLst xmlns:a="http://schemas.openxmlformats.org/drawingml/2006/main">
+              <a:ext uri="{FF2B5EF4-FFF2-40B4-BE49-F238E27FC236}">
+                <a16:creationId xmlns:a16="http://schemas.microsoft.com/office/drawing/2014/main" id="{FBF8C246-6583-48EC-87BF-4B727B5C96B3}"/>
+              </a:ext>
+            </a:extLst>
+          </p:cNvPr>
+          <p:cNvSpPr>
+            <a:spLocks xmlns:a="http://schemas.openxmlformats.org/drawingml/2006/main" noGrp="1"/>
+          </p:cNvSpPr>
+          <p:nvPr>
+            <p:ph type="ftr" idx="11"/>
+          </p:nvPr>
+        </p:nvSpPr>
+        <p:spPr/>
+        <p:txBody>
+          <a:bodyPr xmlns:a="http://schemas.openxmlformats.org/drawingml/2006/main"/>
+          <a:lstStyle xmlns:a="http://schemas.openxmlformats.org/drawingml/2006/main"/>
+          <a:p xmlns:a="http://schemas.openxmlformats.org/drawingml/2006/main">
+            <a:endParaRPr/>
+          </a:p>
+        </p:txBody>
+      </p:sp>
+      <p:sp>
+        <p:nvSpPr>
+          <p:cNvPr id="6" name="灯片编号占位符 5">
+            <a:extLst xmlns:a="http://schemas.openxmlformats.org/drawingml/2006/main">
+              <a:ext uri="{FF2B5EF4-FFF2-40B4-BE49-F238E27FC236}">
+                <a16:creationId xmlns:a16="http://schemas.microsoft.com/office/drawing/2014/main" id="{B2B31F33-7C1C-4413-B763-1A1FE161488F}"/>
+              </a:ext>
+            </a:extLst>
+          </p:cNvPr>
+          <p:cNvSpPr>
+            <a:spLocks xmlns:a="http://schemas.openxmlformats.org/drawingml/2006/main" noGrp="1"/>
+          </p:cNvSpPr>
+          <p:nvPr>
+            <p:ph type="sldNum" idx="12"/>
+          </p:nvPr>
+        </p:nvSpPr>
+        <p:spPr/>
+        <p:txBody>
+          <a:bodyPr xmlns:a="http://schemas.openxmlformats.org/drawingml/2006/main"/>
+          <a:lstStyle xmlns:a="http://schemas.openxmlformats.org/drawingml/2006/main"/>
+          <a:p xmlns:a="http://schemas.openxmlformats.org/drawingml/2006/main">
+            <a:fld id="{F60DD7EF-E908-4723-98EB-3DEAFF871F36}" type="slidenum">
+              <a:t>‹#›</a:t>
+            </a:fld>
+            <a:endParaRPr/>
+          </a:p>
+        </p:txBody>
+      </p:sp>
+    </p:spTree>
+  </p:cSld>
+</p:sldLayout>
+</file>
+
+<file path=ppt/slideLayouts/slideLayout11.xml><?xml version="1.0" encoding="utf-8"?>
+<p:sldLayout xmlns:p="http://schemas.openxmlformats.org/presentationml/2006/main" type="vertTitleAndTx" preserve="1">
+  <p:cSld name="竖排标题与文本">
+    <p:spTree>
+      <p:nvGrpSpPr>
+        <p:cNvPr id="1" name=""/>
+        <p:cNvGrpSpPr/>
+        <p:nvPr/>
+      </p:nvGrpSpPr>
+      <p:grpSpPr>
+        <a:xfrm xmlns:a="http://schemas.openxmlformats.org/drawingml/2006/main"/>
+      </p:grpSpPr>
+      <p:sp>
+        <p:nvSpPr>
+          <p:cNvPr id="2" name="竖排标题 1">
+            <a:extLst xmlns:a="http://schemas.openxmlformats.org/drawingml/2006/main">
+              <a:ext uri="{FF2B5EF4-FFF2-40B4-BE49-F238E27FC236}">
+                <a16:creationId xmlns:a16="http://schemas.microsoft.com/office/drawing/2014/main" id="{463ED077-1038-4CCB-A58F-2B46457CD575}"/>
+              </a:ext>
+            </a:extLst>
+          </p:cNvPr>
+          <p:cNvSpPr>
+            <a:spLocks xmlns:a="http://schemas.openxmlformats.org/drawingml/2006/main" noGrp="1"/>
+          </p:cNvSpPr>
+          <p:nvPr>
+            <p:ph type="title" idx="0"/>
+          </p:nvPr>
+        </p:nvSpPr>
+        <p:spPr>
+          <a:xfrm xmlns:a="http://schemas.openxmlformats.org/drawingml/2006/main">
+            <a:off x="8724900" y="365125"/>
+            <a:ext cx="2628900" cy="5811838"/>
+          </a:xfrm>
+        </p:spPr>
+        <p:txBody>
+          <a:bodyPr xmlns:a="http://schemas.openxmlformats.org/drawingml/2006/main" vert="eaVert"/>
+          <a:lstStyle xmlns:a="http://schemas.openxmlformats.org/drawingml/2006/main"/>
+          <a:p xmlns:a="http://schemas.openxmlformats.org/drawingml/2006/main">
+            <a:r>
+              <a:t>单击此处编辑母版标题样式</a:t>
+            </a:r>
+          </a:p>
+        </p:txBody>
+      </p:sp>
+      <p:sp>
+        <p:nvSpPr>
+          <p:cNvPr id="3" name="竖排文字占位符 2">
+            <a:extLst xmlns:a="http://schemas.openxmlformats.org/drawingml/2006/main">
+              <a:ext uri="{FF2B5EF4-FFF2-40B4-BE49-F238E27FC236}">
+                <a16:creationId xmlns:a16="http://schemas.microsoft.com/office/drawing/2014/main" id="{F1E81820-00CA-46BD-87AF-EF42F0638ADA}"/>
+              </a:ext>
+            </a:extLst>
+          </p:cNvPr>
+          <p:cNvSpPr>
+            <a:spLocks xmlns:a="http://schemas.openxmlformats.org/drawingml/2006/main" noGrp="1"/>
+          </p:cNvSpPr>
+          <p:nvPr>
+            <p:ph type="body" idx="1"/>
+          </p:nvPr>
+        </p:nvSpPr>
+        <p:spPr>
+          <a:xfrm xmlns:a="http://schemas.openxmlformats.org/drawingml/2006/main">
+            <a:off x="838200" y="365125"/>
+            <a:ext cx="7734300" cy="5811838"/>
+          </a:xfrm>
+        </p:spPr>
+        <p:txBody>
+          <a:bodyPr xmlns:a="http://schemas.openxmlformats.org/drawingml/2006/main" vert="eaVert"/>
+          <a:lstStyle xmlns:a="http://schemas.openxmlformats.org/drawingml/2006/main"/>
+          <a:p xmlns:a="http://schemas.openxmlformats.org/drawingml/2006/main">
+            <a:pPr lvl="0">
+              <a:buNone/>
+            </a:pPr>
+            <a:r>
+              <a:t>单击此处编辑母版文本样式</a:t>
+            </a:r>
+          </a:p>
+          <a:p xmlns:a="http://schemas.openxmlformats.org/drawingml/2006/main">
+            <a:pPr lvl="1">
+              <a:buNone/>
+            </a:pPr>
+            <a:r>
+              <a:t>二级</a:t>
+            </a:r>
+          </a:p>
+          <a:p xmlns:a="http://schemas.openxmlformats.org/drawingml/2006/main">
+            <a:pPr lvl="2">
+              <a:buNone/>
+            </a:pPr>
+            <a:r>
+              <a:t>三级</a:t>
+            </a:r>
+          </a:p>
+          <a:p xmlns:a="http://schemas.openxmlformats.org/drawingml/2006/main">
+            <a:pPr lvl="3">
+              <a:buNone/>
+            </a:pPr>
+            <a:r>
+              <a:t>四级</a:t>
+            </a:r>
+          </a:p>
+          <a:p xmlns:a="http://schemas.openxmlformats.org/drawingml/2006/main">
+            <a:pPr lvl="4">
+              <a:buNone/>
+            </a:pPr>
+            <a:r>
+              <a:t>五级</a:t>
+            </a:r>
+          </a:p>
+        </p:txBody>
+      </p:sp>
+      <p:sp>
+        <p:nvSpPr>
+          <p:cNvPr id="4" name="日期占位符 3">
+            <a:extLst xmlns:a="http://schemas.openxmlformats.org/drawingml/2006/main">
+              <a:ext uri="{FF2B5EF4-FFF2-40B4-BE49-F238E27FC236}">
+                <a16:creationId xmlns:a16="http://schemas.microsoft.com/office/drawing/2014/main" id="{62322561-297A-4894-A2B6-C70C014992C1}"/>
+              </a:ext>
+            </a:extLst>
+          </p:cNvPr>
+          <p:cNvSpPr>
+            <a:spLocks xmlns:a="http://schemas.openxmlformats.org/drawingml/2006/main" noGrp="1"/>
+          </p:cNvSpPr>
+          <p:nvPr>
+            <p:ph type="dt" idx="10"/>
+          </p:nvPr>
+        </p:nvSpPr>
+        <p:spPr/>
+        <p:txBody>
+          <a:bodyPr xmlns:a="http://schemas.openxmlformats.org/drawingml/2006/main"/>
+          <a:lstStyle xmlns:a="http://schemas.openxmlformats.org/drawingml/2006/main"/>
+          <a:p xmlns:a="http://schemas.openxmlformats.org/drawingml/2006/main">
+            <a:fld id="{9F4852F6-D0EE-43FF-9758-4449F4064C7C}" type="datetimeFigureOut">
+              <a:t>2026/8/8</a:t>
+            </a:fld>
+            <a:endParaRPr/>
+          </a:p>
+        </p:txBody>
+      </p:sp>
+      <p:sp>
+        <p:nvSpPr>
+          <p:cNvPr id="5" name="页脚占位符 4">
+            <a:extLst xmlns:a="http://schemas.openxmlformats.org/drawingml/2006/main">
+              <a:ext uri="{FF2B5EF4-FFF2-40B4-BE49-F238E27FC236}">
+                <a16:creationId xmlns:a16="http://schemas.microsoft.com/office/drawing/2014/main" id="{4D3B0073-AA2B-4211-9DDB-2797FAD372BE}"/>
+              </a:ext>
+            </a:extLst>
+          </p:cNvPr>
+          <p:cNvSpPr>
+            <a:spLocks xmlns:a="http://schemas.openxmlformats.org/drawingml/2006/main" noGrp="1"/>
+          </p:cNvSpPr>
+          <p:nvPr>
+            <p:ph type="ftr" idx="11"/>
+          </p:nvPr>
+        </p:nvSpPr>
+        <p:spPr/>
+        <p:txBody>
+          <a:bodyPr xmlns:a="http://schemas.openxmlformats.org/drawingml/2006/main"/>
+          <a:lstStyle xmlns:a="http://schemas.openxmlformats.org/drawingml/2006/main"/>
+          <a:p xmlns:a="http://schemas.openxmlformats.org/drawingml/2006/main">
+            <a:endParaRPr/>
+          </a:p>
+        </p:txBody>
+      </p:sp>
+      <p:sp>
+        <p:nvSpPr>
+          <p:cNvPr id="6" name="灯片编号占位符 5">
+            <a:extLst xmlns:a="http://schemas.openxmlformats.org/drawingml/2006/main">
+              <a:ext uri="{FF2B5EF4-FFF2-40B4-BE49-F238E27FC236}">
+                <a16:creationId xmlns:a16="http://schemas.microsoft.com/office/drawing/2014/main" id="{D0511962-D10A-40A8-BDF5-AD6E2191117E}"/>
+              </a:ext>
+            </a:extLst>
+          </p:cNvPr>
+          <p:cNvSpPr>
+            <a:spLocks xmlns:a="http://schemas.openxmlformats.org/drawingml/2006/main" noGrp="1"/>
+          </p:cNvSpPr>
+          <p:nvPr>
+            <p:ph type="sldNum" idx="12"/>
+          </p:nvPr>
+        </p:nvSpPr>
+        <p:spPr/>
+        <p:txBody>
+          <a:bodyPr xmlns:a="http://schemas.openxmlformats.org/drawingml/2006/main"/>
+          <a:lstStyle xmlns:a="http://schemas.openxmlformats.org/drawingml/2006/main"/>
+          <a:p xmlns:a="http://schemas.openxmlformats.org/drawingml/2006/main">
+            <a:fld id="{F60DD7EF-E908-4723-98EB-3DEAFF871F36}" type="slidenum">
+              <a:t>‹#›</a:t>
+            </a:fld>
+            <a:endParaRPr/>
+          </a:p>
+        </p:txBody>
+      </p:sp>
+    </p:spTree>
+  </p:cSld>
+</p:sldLayout>
+</file>
+
+<file path=ppt/slideLayouts/slideLayout12.xml><?xml version="1.0" encoding="utf-8"?>
+<p:sldLayout xmlns:p="http://schemas.openxmlformats.org/presentationml/2006/main" type="blank" preserve="1">
+  <p:cSld name="空白">
+    <p:spTree>
+      <p:nvGrpSpPr>
+        <p:cNvPr id="1" name=""/>
+        <p:cNvGrpSpPr/>
+        <p:nvPr/>
+      </p:nvGrpSpPr>
+      <p:grpSpPr>
+        <a:xfrm xmlns:a="http://schemas.openxmlformats.org/drawingml/2006/main"/>
+      </p:grpSpPr>
+      <p:pic>
+        <p:nvPicPr>
+          <p:cNvPr id="18" name="Picture 6"/>
+          <p:cNvPicPr>
+            <a:picLocks xmlns:a="http://schemas.openxmlformats.org/drawingml/2006/main" noChangeAspect="1"/>
+          </p:cNvPicPr>
+          <p:nvPr/>
+        </p:nvPicPr>
+        <p:blipFill>
+          <a:blip xmlns:r="http://schemas.openxmlformats.org/officeDocument/2006/relationships" xmlns:a="http://schemas.openxmlformats.org/drawingml/2006/main" r:embed="Rfdedf8e03962479c"/>
+          <a:srcRect xmlns:a="http://schemas.openxmlformats.org/drawingml/2006/main" l="0" t="0" r="0" b="14645"/>
+          <a:stretch xmlns:a="http://schemas.openxmlformats.org/drawingml/2006/main">
+            <a:fillRect l="0" t="0" r="0" b="0"/>
+          </a:stretch>
+        </p:blipFill>
+        <p:spPr>
+          <a:xfrm xmlns:a="http://schemas.openxmlformats.org/drawingml/2006/main">
+            <a:off x="0" y="584200"/>
+            <a:ext cx="12192000" cy="804333"/>
+          </a:xfrm>
+          <a:prstGeom xmlns:a="http://schemas.openxmlformats.org/drawingml/2006/main" prst="rect">
+            <a:avLst/>
+          </a:prstGeom>
+          <a:ln xmlns:a="http://schemas.openxmlformats.org/drawingml/2006/main">
+            <a:noFill/>
+          </a:ln>
+        </p:spPr>
+      </p:pic>
+      <p:sp>
+        <p:nvSpPr>
+          <p:cNvPr id="10" name="直接连接符 9">
+            <a:extLst xmlns:a="http://schemas.openxmlformats.org/drawingml/2006/main">
+              <a:ext uri="{FF2B5EF4-FFF2-40B4-BE49-F238E27FC236}">
+                <a16:creationId xmlns:a16="http://schemas.microsoft.com/office/drawing/2014/main" id="{E147CA5D-5D93-4DB2-A3D0-9018994B9EF0}"/>
+              </a:ext>
+            </a:extLst>
+          </p:cNvPr>
+          <p:cNvSpPr>
+            <a:spLocks xmlns:a="http://schemas.openxmlformats.org/drawingml/2006/main" noGrp="1"/>
+          </p:cNvSpPr>
+          <p:nvPr/>
+        </p:nvSpPr>
+        <p:spPr>
+          <a:xfrm xmlns:a="http://schemas.openxmlformats.org/drawingml/2006/main">
+            <a:off x="0" y="1411819"/>
+            <a:ext cx="12192000" cy="2116"/>
+          </a:xfrm>
+          <a:prstGeom xmlns:a="http://schemas.openxmlformats.org/drawingml/2006/main" prst="line">
+            <a:avLst/>
+          </a:prstGeom>
+          <a:ln xmlns:a="http://schemas.openxmlformats.org/drawingml/2006/main" w="28575">
+            <a:solidFill>
+              <a:schemeClr val="bg1"/>
+            </a:solidFill>
+          </a:ln>
+        </p:spPr>
+        <p:style>
+          <a:lnRef xmlns:a="http://schemas.openxmlformats.org/drawingml/2006/main" idx="1">
+            <a:schemeClr val="accent1"/>
+          </a:lnRef>
+          <a:fillRef xmlns:a="http://schemas.openxmlformats.org/drawingml/2006/main" idx="0">
+            <a:schemeClr val="accent1"/>
+          </a:fillRef>
+          <a:effectRef xmlns:a="http://schemas.openxmlformats.org/drawingml/2006/main" idx="0">
+            <a:schemeClr val="accent1"/>
+          </a:effectRef>
+          <a:fontRef xmlns:a="http://schemas.openxmlformats.org/drawingml/2006/main" idx="minor">
+            <a:schemeClr val="tx1"/>
+          </a:fontRef>
+        </p:style>
+      </p:sp>
+      <p:sp>
+        <p:nvSpPr>
+          <p:cNvPr id="7" name="矩形 6">
+            <a:extLst xmlns:a="http://schemas.openxmlformats.org/drawingml/2006/main">
+              <a:ext uri="{FF2B5EF4-FFF2-40B4-BE49-F238E27FC236}">
+                <a16:creationId xmlns:a16="http://schemas.microsoft.com/office/drawing/2014/main" id="{5DEE3068-45EC-4DFF-A52C-D5BDCB7F4004}"/>
+              </a:ext>
+            </a:extLst>
+          </p:cNvPr>
+          <p:cNvSpPr>
+            <a:spLocks xmlns:a="http://schemas.openxmlformats.org/drawingml/2006/main" noGrp="1"/>
+          </p:cNvSpPr>
+          <p:nvPr/>
+        </p:nvSpPr>
+        <p:spPr>
+          <a:xfrm xmlns:a="http://schemas.openxmlformats.org/drawingml/2006/main">
+            <a:off x="821267" y="584200"/>
+            <a:ext cx="8652933" cy="711200"/>
+          </a:xfrm>
+          <a:prstGeom xmlns:a="http://schemas.openxmlformats.org/drawingml/2006/main" prst="rect">
+            <a:avLst/>
+          </a:prstGeom>
+          <a:solidFill xmlns:a="http://schemas.openxmlformats.org/drawingml/2006/main">
+            <a:srgbClr val="005BAC"/>
+          </a:solidFill>
+          <a:ln xmlns:a="http://schemas.openxmlformats.org/drawingml/2006/main">
+            <a:noFill/>
+          </a:ln>
+        </p:spPr>
+        <p:style>
+          <a:lnRef xmlns:a="http://schemas.openxmlformats.org/drawingml/2006/main" idx="2">
+            <a:schemeClr val="accent1">
+              <a:shade val="50000"/>
+            </a:schemeClr>
+          </a:lnRef>
+          <a:fillRef xmlns:a="http://schemas.openxmlformats.org/drawingml/2006/main" idx="1">
+            <a:schemeClr val="accent1"/>
+          </a:fillRef>
+          <a:effectRef xmlns:a="http://schemas.openxmlformats.org/drawingml/2006/main" idx="0">
+            <a:schemeClr val="accent1"/>
+          </a:effectRef>
+          <a:fontRef xmlns:a="http://schemas.openxmlformats.org/drawingml/2006/main" idx="minor">
+            <a:schemeClr val="lt1"/>
+          </a:fontRef>
+        </p:style>
+        <p:txBody>
+          <a:bodyPr xmlns:a="http://schemas.openxmlformats.org/drawingml/2006/main" anchor="ctr"/>
+          <a:lstStyle xmlns:a="http://schemas.openxmlformats.org/drawingml/2006/main"/>
+          <a:p xmlns:a="http://schemas.openxmlformats.org/drawingml/2006/main">
+            <a:pPr algn="ctr">
+              <a:buNone/>
+            </a:pPr>
+            <a:endParaRPr sz="3200" b="1">
+              <a:solidFill>
+                <a:prstClr val="white"/>
+              </a:solidFill>
+            </a:endParaRPr>
+          </a:p>
+        </p:txBody>
+      </p:sp>
+      <p:sp>
+        <p:nvSpPr>
+          <p:cNvPr id="11" name="任意多边形 10">
+            <a:extLst xmlns:a="http://schemas.openxmlformats.org/drawingml/2006/main">
+              <a:ext uri="{FF2B5EF4-FFF2-40B4-BE49-F238E27FC236}">
+                <a16:creationId xmlns:a16="http://schemas.microsoft.com/office/drawing/2014/main" id="{4439DB34-7F99-49C5-932C-5A718AC06B12}"/>
+              </a:ext>
+            </a:extLst>
+          </p:cNvPr>
+          <p:cNvSpPr>
+            <a:spLocks xmlns:a="http://schemas.openxmlformats.org/drawingml/2006/main" noGrp="1"/>
+          </p:cNvSpPr>
+          <p:nvPr/>
+        </p:nvSpPr>
+        <p:spPr>
+          <a:xfrm xmlns:a="http://schemas.openxmlformats.org/drawingml/2006/main" rot="0" flipH="0" flipV="0">
+            <a:off x="2393370" y="1413933"/>
+            <a:ext cx="9798631" cy="101600"/>
+          </a:xfrm>
+          <a:custGeom xmlns:a="http://schemas.openxmlformats.org/drawingml/2006/main">
+            <a:gdLst>
+              <a:gd name="connsiteX0" fmla="*/ 68 w 11394"/>
+              <a:gd name="connsiteY0" fmla="*/ 0 h 126"/>
+              <a:gd name="connsiteX1" fmla="*/ 11394 w 11394"/>
+              <a:gd name="connsiteY1" fmla="*/ 6 h 126"/>
+              <a:gd name="connsiteX2" fmla="*/ 11394 w 11394"/>
+              <a:gd name="connsiteY2" fmla="*/ 126 h 126"/>
+              <a:gd name="connsiteX3" fmla="*/ 0 w 11394"/>
+              <a:gd name="connsiteY3" fmla="*/ 126 h 126"/>
+              <a:gd name="connsiteX4" fmla="*/ 68 w 11394"/>
+              <a:gd name="connsiteY4" fmla="*/ 0 h 126"/>
+            </a:gdLst>
+            <a:rect l="l" t="t" r="r" b="b"/>
+            <a:pathLst>
+              <a:path w="11394" h="126">
+                <a:moveTo>
+                  <a:pt x="68" y="0"/>
+                </a:moveTo>
+                <a:lnTo>
+                  <a:pt x="11394" y="6"/>
+                </a:lnTo>
+                <a:lnTo>
+                  <a:pt x="11394" y="126"/>
+                </a:lnTo>
+                <a:lnTo>
+                  <a:pt x="0" y="126"/>
+                </a:lnTo>
+                <a:lnTo>
+                  <a:pt x="68" y="0"/>
+                </a:lnTo>
+                <a:close/>
+              </a:path>
+            </a:pathLst>
+          </a:custGeom>
+          <a:solidFill xmlns:a="http://schemas.openxmlformats.org/drawingml/2006/main">
+            <a:srgbClr val="005BAC"/>
+          </a:solidFill>
+          <a:ln xmlns:a="http://schemas.openxmlformats.org/drawingml/2006/main">
+            <a:noFill/>
+          </a:ln>
+        </p:spPr>
+        <p:style>
+          <a:lnRef xmlns:a="http://schemas.openxmlformats.org/drawingml/2006/main" idx="2">
+            <a:schemeClr val="accent1">
+              <a:shade val="50000"/>
+            </a:schemeClr>
+          </a:lnRef>
+          <a:fillRef xmlns:a="http://schemas.openxmlformats.org/drawingml/2006/main" idx="1">
+            <a:schemeClr val="accent1"/>
+          </a:fillRef>
+          <a:effectRef xmlns:a="http://schemas.openxmlformats.org/drawingml/2006/main" idx="0">
+            <a:schemeClr val="accent1"/>
+          </a:effectRef>
+          <a:fontRef xmlns:a="http://schemas.openxmlformats.org/drawingml/2006/main" idx="minor">
+            <a:schemeClr val="lt1"/>
+          </a:fontRef>
+        </p:style>
+        <p:txBody>
+          <a:bodyPr xmlns:a="http://schemas.openxmlformats.org/drawingml/2006/main" anchor="ctr"/>
+          <a:lstStyle xmlns:a="http://schemas.openxmlformats.org/drawingml/2006/main"/>
+          <a:p xmlns:a="http://schemas.openxmlformats.org/drawingml/2006/main">
+            <a:pPr algn="ctr">
+              <a:buNone/>
+            </a:pPr>
+            <a:endParaRPr sz="2400"/>
+          </a:p>
+        </p:txBody>
+      </p:sp>
+      <p:sp>
+        <p:nvSpPr>
+          <p:cNvPr id="16" name="任意多边形 15">
+            <a:extLst xmlns:a="http://schemas.openxmlformats.org/drawingml/2006/main">
+              <a:ext uri="{FF2B5EF4-FFF2-40B4-BE49-F238E27FC236}">
+                <a16:creationId xmlns:a16="http://schemas.microsoft.com/office/drawing/2014/main" id="{49EB4AF1-E121-477D-8848-E546B93A5E4D}"/>
+              </a:ext>
+            </a:extLst>
+          </p:cNvPr>
+          <p:cNvSpPr>
+            <a:spLocks xmlns:a="http://schemas.openxmlformats.org/drawingml/2006/main" noGrp="1"/>
+          </p:cNvSpPr>
+          <p:nvPr/>
+        </p:nvSpPr>
+        <p:spPr>
+          <a:xfrm xmlns:a="http://schemas.openxmlformats.org/drawingml/2006/main" rot="0" flipH="0" flipV="0">
+            <a:off x="-2539" y="1414739"/>
+            <a:ext cx="2395908" cy="100793"/>
+          </a:xfrm>
+          <a:custGeom xmlns:a="http://schemas.openxmlformats.org/drawingml/2006/main">
+            <a:gdLst>
+              <a:gd name="connsiteX0" fmla="*/ 0 w 2693"/>
+              <a:gd name="connsiteY0" fmla="*/ 0 h 119"/>
+              <a:gd name="connsiteX1" fmla="*/ 2693 w 2693"/>
+              <a:gd name="connsiteY1" fmla="*/ 0 h 119"/>
+              <a:gd name="connsiteX2" fmla="*/ 2629 w 2693"/>
+              <a:gd name="connsiteY2" fmla="*/ 119 h 119"/>
+              <a:gd name="connsiteX3" fmla="*/ 0 w 2693"/>
+              <a:gd name="connsiteY3" fmla="*/ 119 h 119"/>
+              <a:gd name="connsiteX4" fmla="*/ 0 w 2693"/>
+              <a:gd name="connsiteY4" fmla="*/ 0 h 119"/>
+            </a:gdLst>
+            <a:rect l="l" t="t" r="r" b="b"/>
+            <a:pathLst>
+              <a:path w="2693" h="119">
+                <a:moveTo>
+                  <a:pt x="0" y="0"/>
+                </a:moveTo>
+                <a:lnTo>
+                  <a:pt x="2693" y="0"/>
+                </a:lnTo>
+                <a:lnTo>
+                  <a:pt x="2629" y="119"/>
+                </a:lnTo>
+                <a:lnTo>
+                  <a:pt x="0" y="119"/>
+                </a:lnTo>
+                <a:lnTo>
+                  <a:pt x="0" y="0"/>
+                </a:lnTo>
+                <a:close/>
+              </a:path>
+            </a:pathLst>
+          </a:custGeom>
+          <a:solidFill xmlns:a="http://schemas.openxmlformats.org/drawingml/2006/main">
+            <a:srgbClr val="F39800"/>
+          </a:solidFill>
+          <a:ln xmlns:a="http://schemas.openxmlformats.org/drawingml/2006/main">
+            <a:noFill/>
+          </a:ln>
+        </p:spPr>
+        <p:style>
+          <a:lnRef xmlns:a="http://schemas.openxmlformats.org/drawingml/2006/main" idx="2">
+            <a:schemeClr val="accent1">
+              <a:shade val="50000"/>
+            </a:schemeClr>
+          </a:lnRef>
+          <a:fillRef xmlns:a="http://schemas.openxmlformats.org/drawingml/2006/main" idx="1">
+            <a:schemeClr val="accent1"/>
+          </a:fillRef>
+          <a:effectRef xmlns:a="http://schemas.openxmlformats.org/drawingml/2006/main" idx="0">
+            <a:schemeClr val="accent1"/>
+          </a:effectRef>
+          <a:fontRef xmlns:a="http://schemas.openxmlformats.org/drawingml/2006/main" idx="minor">
+            <a:schemeClr val="lt1"/>
+          </a:fontRef>
+        </p:style>
+        <p:txBody>
+          <a:bodyPr xmlns:a="http://schemas.openxmlformats.org/drawingml/2006/main" anchor="ctr"/>
+          <a:lstStyle xmlns:a="http://schemas.openxmlformats.org/drawingml/2006/main"/>
+          <a:p xmlns:a="http://schemas.openxmlformats.org/drawingml/2006/main">
+            <a:pPr algn="ctr">
+              <a:buNone/>
+            </a:pPr>
+            <a:endParaRPr sz="2400"/>
+          </a:p>
+        </p:txBody>
+      </p:sp>
+    </p:spTree>
+  </p:cSld>
+</p:sldLayout>
+</file>
+
+<file path=ppt/slideLayouts/slideLayout13.xml><?xml version="1.0" encoding="utf-8"?>
+<p:sldLayout xmlns:p="http://schemas.openxmlformats.org/presentationml/2006/main" type="blank" preserve="1">
+  <p:cSld name="1_空白">
     <p:spTree>
       <p:nvGrpSpPr>
         <p:cNvPr id="1" name=""/>
@@ -485,9 +1346,2262 @@
 </p:sldLayout>
 </file>
 
+<file path=ppt/slideLayouts/slideLayout14.xml><?xml version="1.0" encoding="utf-8"?>
+<p:sldLayout xmlns:p="http://schemas.openxmlformats.org/presentationml/2006/main" type="blank" preserve="1">
+  <p:cSld name="空白">
+    <p:spTree>
+      <p:nvGrpSpPr>
+        <p:cNvPr id="1" name=""/>
+        <p:cNvGrpSpPr/>
+        <p:nvPr/>
+      </p:nvGrpSpPr>
+      <p:grpSpPr>
+        <a:xfrm xmlns:a="http://schemas.openxmlformats.org/drawingml/2006/main"/>
+      </p:grpSpPr>
+      <p:pic>
+        <p:nvPicPr>
+          <p:cNvPr id="18" name="Picture 6"/>
+          <p:cNvPicPr>
+            <a:picLocks xmlns:a="http://schemas.openxmlformats.org/drawingml/2006/main" noChangeAspect="1"/>
+          </p:cNvPicPr>
+          <p:nvPr/>
+        </p:nvPicPr>
+        <p:blipFill>
+          <a:blip xmlns:r="http://schemas.openxmlformats.org/officeDocument/2006/relationships" xmlns:a="http://schemas.openxmlformats.org/drawingml/2006/main" r:embed="R140c952c40774cac"/>
+          <a:srcRect xmlns:a="http://schemas.openxmlformats.org/drawingml/2006/main" l="0" t="0" r="0" b="14645"/>
+          <a:stretch xmlns:a="http://schemas.openxmlformats.org/drawingml/2006/main">
+            <a:fillRect l="0" t="0" r="0" b="0"/>
+          </a:stretch>
+        </p:blipFill>
+        <p:spPr>
+          <a:xfrm xmlns:a="http://schemas.openxmlformats.org/drawingml/2006/main">
+            <a:off x="0" y="584200"/>
+            <a:ext cx="12192000" cy="804333"/>
+          </a:xfrm>
+          <a:prstGeom xmlns:a="http://schemas.openxmlformats.org/drawingml/2006/main" prst="rect">
+            <a:avLst/>
+          </a:prstGeom>
+          <a:ln xmlns:a="http://schemas.openxmlformats.org/drawingml/2006/main">
+            <a:noFill/>
+          </a:ln>
+        </p:spPr>
+      </p:pic>
+      <p:sp>
+        <p:nvSpPr>
+          <p:cNvPr id="10" name="直接连接符 9">
+            <a:extLst xmlns:a="http://schemas.openxmlformats.org/drawingml/2006/main">
+              <a:ext uri="{FF2B5EF4-FFF2-40B4-BE49-F238E27FC236}">
+                <a16:creationId xmlns:a16="http://schemas.microsoft.com/office/drawing/2014/main" id="{44B39580-6C16-4FD3-94D8-E59E73CF1B3A}"/>
+              </a:ext>
+            </a:extLst>
+          </p:cNvPr>
+          <p:cNvSpPr>
+            <a:spLocks xmlns:a="http://schemas.openxmlformats.org/drawingml/2006/main" noGrp="1"/>
+          </p:cNvSpPr>
+          <p:nvPr/>
+        </p:nvSpPr>
+        <p:spPr>
+          <a:xfrm xmlns:a="http://schemas.openxmlformats.org/drawingml/2006/main">
+            <a:off x="0" y="1411819"/>
+            <a:ext cx="12192000" cy="2116"/>
+          </a:xfrm>
+          <a:prstGeom xmlns:a="http://schemas.openxmlformats.org/drawingml/2006/main" prst="line">
+            <a:avLst/>
+          </a:prstGeom>
+          <a:ln xmlns:a="http://schemas.openxmlformats.org/drawingml/2006/main" w="28575">
+            <a:solidFill>
+              <a:schemeClr val="bg1"/>
+            </a:solidFill>
+          </a:ln>
+        </p:spPr>
+        <p:style>
+          <a:lnRef xmlns:a="http://schemas.openxmlformats.org/drawingml/2006/main" idx="1">
+            <a:schemeClr val="accent1"/>
+          </a:lnRef>
+          <a:fillRef xmlns:a="http://schemas.openxmlformats.org/drawingml/2006/main" idx="0">
+            <a:schemeClr val="accent1"/>
+          </a:fillRef>
+          <a:effectRef xmlns:a="http://schemas.openxmlformats.org/drawingml/2006/main" idx="0">
+            <a:schemeClr val="accent1"/>
+          </a:effectRef>
+          <a:fontRef xmlns:a="http://schemas.openxmlformats.org/drawingml/2006/main" idx="minor">
+            <a:schemeClr val="tx1"/>
+          </a:fontRef>
+        </p:style>
+      </p:sp>
+      <p:sp>
+        <p:nvSpPr>
+          <p:cNvPr id="7" name="矩形 6">
+            <a:extLst xmlns:a="http://schemas.openxmlformats.org/drawingml/2006/main">
+              <a:ext uri="{FF2B5EF4-FFF2-40B4-BE49-F238E27FC236}">
+                <a16:creationId xmlns:a16="http://schemas.microsoft.com/office/drawing/2014/main" id="{AEC6B982-7612-40F6-9113-753E430EE956}"/>
+              </a:ext>
+            </a:extLst>
+          </p:cNvPr>
+          <p:cNvSpPr>
+            <a:spLocks xmlns:a="http://schemas.openxmlformats.org/drawingml/2006/main" noGrp="1"/>
+          </p:cNvSpPr>
+          <p:nvPr/>
+        </p:nvSpPr>
+        <p:spPr>
+          <a:xfrm xmlns:a="http://schemas.openxmlformats.org/drawingml/2006/main">
+            <a:off x="821267" y="584200"/>
+            <a:ext cx="8652933" cy="711200"/>
+          </a:xfrm>
+          <a:prstGeom xmlns:a="http://schemas.openxmlformats.org/drawingml/2006/main" prst="rect">
+            <a:avLst/>
+          </a:prstGeom>
+          <a:solidFill xmlns:a="http://schemas.openxmlformats.org/drawingml/2006/main">
+            <a:srgbClr val="005BAC"/>
+          </a:solidFill>
+          <a:ln xmlns:a="http://schemas.openxmlformats.org/drawingml/2006/main">
+            <a:noFill/>
+          </a:ln>
+        </p:spPr>
+        <p:style>
+          <a:lnRef xmlns:a="http://schemas.openxmlformats.org/drawingml/2006/main" idx="2">
+            <a:schemeClr val="accent1">
+              <a:shade val="50000"/>
+            </a:schemeClr>
+          </a:lnRef>
+          <a:fillRef xmlns:a="http://schemas.openxmlformats.org/drawingml/2006/main" idx="1">
+            <a:schemeClr val="accent1"/>
+          </a:fillRef>
+          <a:effectRef xmlns:a="http://schemas.openxmlformats.org/drawingml/2006/main" idx="0">
+            <a:schemeClr val="accent1"/>
+          </a:effectRef>
+          <a:fontRef xmlns:a="http://schemas.openxmlformats.org/drawingml/2006/main" idx="minor">
+            <a:schemeClr val="lt1"/>
+          </a:fontRef>
+        </p:style>
+        <p:txBody>
+          <a:bodyPr xmlns:a="http://schemas.openxmlformats.org/drawingml/2006/main" anchor="ctr"/>
+          <a:lstStyle xmlns:a="http://schemas.openxmlformats.org/drawingml/2006/main"/>
+          <a:p xmlns:a="http://schemas.openxmlformats.org/drawingml/2006/main">
+            <a:pPr algn="ctr">
+              <a:buNone/>
+            </a:pPr>
+            <a:endParaRPr sz="3200" b="1">
+              <a:solidFill>
+                <a:prstClr val="white"/>
+              </a:solidFill>
+            </a:endParaRPr>
+          </a:p>
+        </p:txBody>
+      </p:sp>
+      <p:sp>
+        <p:nvSpPr>
+          <p:cNvPr id="11" name="任意多边形 10">
+            <a:extLst xmlns:a="http://schemas.openxmlformats.org/drawingml/2006/main">
+              <a:ext uri="{FF2B5EF4-FFF2-40B4-BE49-F238E27FC236}">
+                <a16:creationId xmlns:a16="http://schemas.microsoft.com/office/drawing/2014/main" id="{EEF429FB-8A7B-4645-BAF1-7CAC5338C8F1}"/>
+              </a:ext>
+            </a:extLst>
+          </p:cNvPr>
+          <p:cNvSpPr>
+            <a:spLocks xmlns:a="http://schemas.openxmlformats.org/drawingml/2006/main" noGrp="1"/>
+          </p:cNvSpPr>
+          <p:nvPr/>
+        </p:nvSpPr>
+        <p:spPr>
+          <a:xfrm xmlns:a="http://schemas.openxmlformats.org/drawingml/2006/main" rot="0" flipH="0" flipV="0">
+            <a:off x="2393370" y="1413933"/>
+            <a:ext cx="9798631" cy="101600"/>
+          </a:xfrm>
+          <a:custGeom xmlns:a="http://schemas.openxmlformats.org/drawingml/2006/main">
+            <a:gdLst>
+              <a:gd name="connsiteX0" fmla="*/ 68 w 11394"/>
+              <a:gd name="connsiteY0" fmla="*/ 0 h 126"/>
+              <a:gd name="connsiteX1" fmla="*/ 11394 w 11394"/>
+              <a:gd name="connsiteY1" fmla="*/ 6 h 126"/>
+              <a:gd name="connsiteX2" fmla="*/ 11394 w 11394"/>
+              <a:gd name="connsiteY2" fmla="*/ 126 h 126"/>
+              <a:gd name="connsiteX3" fmla="*/ 0 w 11394"/>
+              <a:gd name="connsiteY3" fmla="*/ 126 h 126"/>
+              <a:gd name="connsiteX4" fmla="*/ 68 w 11394"/>
+              <a:gd name="connsiteY4" fmla="*/ 0 h 126"/>
+            </a:gdLst>
+            <a:rect l="l" t="t" r="r" b="b"/>
+            <a:pathLst>
+              <a:path w="11394" h="126">
+                <a:moveTo>
+                  <a:pt x="68" y="0"/>
+                </a:moveTo>
+                <a:lnTo>
+                  <a:pt x="11394" y="6"/>
+                </a:lnTo>
+                <a:lnTo>
+                  <a:pt x="11394" y="126"/>
+                </a:lnTo>
+                <a:lnTo>
+                  <a:pt x="0" y="126"/>
+                </a:lnTo>
+                <a:lnTo>
+                  <a:pt x="68" y="0"/>
+                </a:lnTo>
+                <a:close/>
+              </a:path>
+            </a:pathLst>
+          </a:custGeom>
+          <a:solidFill xmlns:a="http://schemas.openxmlformats.org/drawingml/2006/main">
+            <a:srgbClr val="005BAC"/>
+          </a:solidFill>
+          <a:ln xmlns:a="http://schemas.openxmlformats.org/drawingml/2006/main">
+            <a:noFill/>
+          </a:ln>
+        </p:spPr>
+        <p:style>
+          <a:lnRef xmlns:a="http://schemas.openxmlformats.org/drawingml/2006/main" idx="2">
+            <a:schemeClr val="accent1">
+              <a:shade val="50000"/>
+            </a:schemeClr>
+          </a:lnRef>
+          <a:fillRef xmlns:a="http://schemas.openxmlformats.org/drawingml/2006/main" idx="1">
+            <a:schemeClr val="accent1"/>
+          </a:fillRef>
+          <a:effectRef xmlns:a="http://schemas.openxmlformats.org/drawingml/2006/main" idx="0">
+            <a:schemeClr val="accent1"/>
+          </a:effectRef>
+          <a:fontRef xmlns:a="http://schemas.openxmlformats.org/drawingml/2006/main" idx="minor">
+            <a:schemeClr val="lt1"/>
+          </a:fontRef>
+        </p:style>
+        <p:txBody>
+          <a:bodyPr xmlns:a="http://schemas.openxmlformats.org/drawingml/2006/main" anchor="ctr"/>
+          <a:lstStyle xmlns:a="http://schemas.openxmlformats.org/drawingml/2006/main"/>
+          <a:p xmlns:a="http://schemas.openxmlformats.org/drawingml/2006/main">
+            <a:pPr algn="ctr">
+              <a:buNone/>
+            </a:pPr>
+            <a:endParaRPr sz="2400"/>
+          </a:p>
+        </p:txBody>
+      </p:sp>
+      <p:sp>
+        <p:nvSpPr>
+          <p:cNvPr id="16" name="任意多边形 15">
+            <a:extLst xmlns:a="http://schemas.openxmlformats.org/drawingml/2006/main">
+              <a:ext uri="{FF2B5EF4-FFF2-40B4-BE49-F238E27FC236}">
+                <a16:creationId xmlns:a16="http://schemas.microsoft.com/office/drawing/2014/main" id="{63A3A579-0B27-4649-9F93-3EEDA2B4AE4B}"/>
+              </a:ext>
+            </a:extLst>
+          </p:cNvPr>
+          <p:cNvSpPr>
+            <a:spLocks xmlns:a="http://schemas.openxmlformats.org/drawingml/2006/main" noGrp="1"/>
+          </p:cNvSpPr>
+          <p:nvPr/>
+        </p:nvSpPr>
+        <p:spPr>
+          <a:xfrm xmlns:a="http://schemas.openxmlformats.org/drawingml/2006/main" rot="0" flipH="0" flipV="0">
+            <a:off x="-2539" y="1414739"/>
+            <a:ext cx="2395908" cy="100793"/>
+          </a:xfrm>
+          <a:custGeom xmlns:a="http://schemas.openxmlformats.org/drawingml/2006/main">
+            <a:gdLst>
+              <a:gd name="connsiteX0" fmla="*/ 0 w 2693"/>
+              <a:gd name="connsiteY0" fmla="*/ 0 h 119"/>
+              <a:gd name="connsiteX1" fmla="*/ 2693 w 2693"/>
+              <a:gd name="connsiteY1" fmla="*/ 0 h 119"/>
+              <a:gd name="connsiteX2" fmla="*/ 2629 w 2693"/>
+              <a:gd name="connsiteY2" fmla="*/ 119 h 119"/>
+              <a:gd name="connsiteX3" fmla="*/ 0 w 2693"/>
+              <a:gd name="connsiteY3" fmla="*/ 119 h 119"/>
+              <a:gd name="connsiteX4" fmla="*/ 0 w 2693"/>
+              <a:gd name="connsiteY4" fmla="*/ 0 h 119"/>
+            </a:gdLst>
+            <a:rect l="l" t="t" r="r" b="b"/>
+            <a:pathLst>
+              <a:path w="2693" h="119">
+                <a:moveTo>
+                  <a:pt x="0" y="0"/>
+                </a:moveTo>
+                <a:lnTo>
+                  <a:pt x="2693" y="0"/>
+                </a:lnTo>
+                <a:lnTo>
+                  <a:pt x="2629" y="119"/>
+                </a:lnTo>
+                <a:lnTo>
+                  <a:pt x="0" y="119"/>
+                </a:lnTo>
+                <a:lnTo>
+                  <a:pt x="0" y="0"/>
+                </a:lnTo>
+                <a:close/>
+              </a:path>
+            </a:pathLst>
+          </a:custGeom>
+          <a:solidFill xmlns:a="http://schemas.openxmlformats.org/drawingml/2006/main">
+            <a:srgbClr val="F39800"/>
+          </a:solidFill>
+          <a:ln xmlns:a="http://schemas.openxmlformats.org/drawingml/2006/main">
+            <a:noFill/>
+          </a:ln>
+        </p:spPr>
+        <p:style>
+          <a:lnRef xmlns:a="http://schemas.openxmlformats.org/drawingml/2006/main" idx="2">
+            <a:schemeClr val="accent1">
+              <a:shade val="50000"/>
+            </a:schemeClr>
+          </a:lnRef>
+          <a:fillRef xmlns:a="http://schemas.openxmlformats.org/drawingml/2006/main" idx="1">
+            <a:schemeClr val="accent1"/>
+          </a:fillRef>
+          <a:effectRef xmlns:a="http://schemas.openxmlformats.org/drawingml/2006/main" idx="0">
+            <a:schemeClr val="accent1"/>
+          </a:effectRef>
+          <a:fontRef xmlns:a="http://schemas.openxmlformats.org/drawingml/2006/main" idx="minor">
+            <a:schemeClr val="lt1"/>
+          </a:fontRef>
+        </p:style>
+        <p:txBody>
+          <a:bodyPr xmlns:a="http://schemas.openxmlformats.org/drawingml/2006/main" anchor="ctr"/>
+          <a:lstStyle xmlns:a="http://schemas.openxmlformats.org/drawingml/2006/main"/>
+          <a:p xmlns:a="http://schemas.openxmlformats.org/drawingml/2006/main">
+            <a:pPr algn="ctr">
+              <a:buNone/>
+            </a:pPr>
+            <a:endParaRPr sz="2400"/>
+          </a:p>
+        </p:txBody>
+      </p:sp>
+    </p:spTree>
+  </p:cSld>
+</p:sldLayout>
+</file>
+
+<file path=ppt/slideLayouts/slideLayout15.xml><?xml version="1.0" encoding="utf-8"?>
+<p:sldLayout xmlns:p="http://schemas.openxmlformats.org/presentationml/2006/main" type="blank" preserve="1">
+  <p:cSld name="1_空白">
+    <p:spTree>
+      <p:nvGrpSpPr>
+        <p:cNvPr id="1" name=""/>
+        <p:cNvGrpSpPr/>
+        <p:nvPr/>
+      </p:nvGrpSpPr>
+      <p:grpSpPr>
+        <a:xfrm xmlns:a="http://schemas.openxmlformats.org/drawingml/2006/main"/>
+      </p:grpSpPr>
+    </p:spTree>
+  </p:cSld>
+</p:sldLayout>
+</file>
+
+<file path=ppt/slideLayouts/slideLayout2.xml><?xml version="1.0" encoding="utf-8"?>
+<p:sldLayout xmlns:p="http://schemas.openxmlformats.org/presentationml/2006/main" preserve="1" userDrawn="1">
+  <p:cSld name="标题和内容">
+    <p:spTree>
+      <p:nvGrpSpPr>
+        <p:cNvPr id="1" name=""/>
+        <p:cNvGrpSpPr/>
+        <p:nvPr/>
+      </p:nvGrpSpPr>
+      <p:grpSpPr>
+        <a:xfrm xmlns:a="http://schemas.openxmlformats.org/drawingml/2006/main"/>
+      </p:grpSpPr>
+    </p:spTree>
+  </p:cSld>
+</p:sldLayout>
+</file>
+
+<file path=ppt/slideLayouts/slideLayout3.xml><?xml version="1.0" encoding="utf-8"?>
+<p:sldLayout xmlns:p="http://schemas.openxmlformats.org/presentationml/2006/main" preserve="1" userDrawn="1">
+  <p:cSld name="节标题">
+    <p:spTree>
+      <p:nvGrpSpPr>
+        <p:cNvPr id="1" name=""/>
+        <p:cNvGrpSpPr/>
+        <p:nvPr/>
+      </p:nvGrpSpPr>
+      <p:grpSpPr>
+        <a:xfrm xmlns:a="http://schemas.openxmlformats.org/drawingml/2006/main"/>
+      </p:grpSpPr>
+      <p:sp>
+        <p:nvSpPr>
+          <p:cNvPr id="333" name="矩形 332">
+            <a:extLst xmlns:a="http://schemas.openxmlformats.org/drawingml/2006/main">
+              <a:ext uri="{FF2B5EF4-FFF2-40B4-BE49-F238E27FC236}">
+                <a16:creationId xmlns:a16="http://schemas.microsoft.com/office/drawing/2014/main" id="{2758DE98-D5A0-4D04-B6F9-7A5001698F83}"/>
+              </a:ext>
+            </a:extLst>
+          </p:cNvPr>
+          <p:cNvSpPr>
+            <a:spLocks xmlns:a="http://schemas.openxmlformats.org/drawingml/2006/main" noGrp="1"/>
+          </p:cNvSpPr>
+          <p:nvPr/>
+        </p:nvSpPr>
+        <p:spPr>
+          <a:xfrm xmlns:a="http://schemas.openxmlformats.org/drawingml/2006/main">
+            <a:off x="334962" y="833952"/>
+            <a:ext cx="11522073" cy="499299"/>
+          </a:xfrm>
+          <a:prstGeom xmlns:a="http://schemas.openxmlformats.org/drawingml/2006/main" prst="rect">
+            <a:avLst/>
+          </a:prstGeom>
+          <a:gradFill xmlns:a="http://schemas.openxmlformats.org/drawingml/2006/main">
+            <a:gsLst>
+              <a:gs pos="17500">
+                <a:srgbClr val="3E84EC"/>
+              </a:gs>
+              <a:gs pos="100000">
+                <a:schemeClr val="accent1">
+                  <a:lumMod val="75000"/>
+                </a:schemeClr>
+              </a:gs>
+              <a:gs pos="0">
+                <a:srgbClr val="0268FE">
+                  <a:lumMod val="75000"/>
+                  <a:lumOff val="25000"/>
+                  <a:alpha val="69000"/>
+                </a:srgbClr>
+              </a:gs>
+            </a:gsLst>
+            <a:path path="circle">
+              <a:fillToRect l="100000" t="0" r="0" b="100000"/>
+            </a:path>
+          </a:gradFill>
+          <a:ln xmlns:a="http://schemas.openxmlformats.org/drawingml/2006/main" w="12700" cmpd="sng">
+            <a:noFill/>
+            <a:prstDash val="solid"/>
+          </a:ln>
+        </p:spPr>
+        <p:txBody>
+          <a:bodyPr xmlns:a="http://schemas.openxmlformats.org/drawingml/2006/main" anchor="ctr"/>
+          <a:lstStyle xmlns:a="http://schemas.openxmlformats.org/drawingml/2006/main"/>
+          <a:p xmlns:a="http://schemas.openxmlformats.org/drawingml/2006/main">
+            <a:pPr marL="0" marR="0" lvl="0" indent="0" algn="ctr" defTabSz="914400">
+              <a:lnSpc>
+                <a:spcPct val="100000"/>
+              </a:lnSpc>
+              <a:spcBef>
+                <a:spcPts val="0"/>
+              </a:spcBef>
+              <a:spcAft>
+                <a:spcPts val="0"/>
+              </a:spcAft>
+              <a:buClrTx/>
+              <a:buSzTx/>
+              <a:buFontTx/>
+              <a:buNone/>
+            </a:pPr>
+            <a:endParaRPr sz="1800" b="0" i="0" u="none" kern="0" cap="none" spc="0" baseline="0">
+              <a:ln>
+                <a:noFill/>
+              </a:ln>
+              <a:solidFill>
+                <a:srgbClr val="FFFFFF"/>
+              </a:solidFill>
+              <a:latin typeface="等线"/>
+              <a:ea typeface="等线"/>
+              <a:cs typeface="等线"/>
+            </a:endParaRPr>
+          </a:p>
+        </p:txBody>
+      </p:sp>
+      <p:pic>
+        <p:nvPicPr>
+          <p:cNvPr id="336" name="图片 16"/>
+          <p:cNvPicPr>
+            <a:picLocks xmlns:a="http://schemas.openxmlformats.org/drawingml/2006/main" noChangeAspect="1"/>
+          </p:cNvPicPr>
+          <p:nvPr/>
+        </p:nvPicPr>
+        <p:blipFill>
+          <a:blip xmlns:r="http://schemas.openxmlformats.org/officeDocument/2006/relationships" xmlns:a="http://schemas.openxmlformats.org/drawingml/2006/main" r:embed="R99f6edc18dc34c31"/>
+          <a:srcRect xmlns:a="http://schemas.openxmlformats.org/drawingml/2006/main" l="0" t="0" r="0" b="59104"/>
+          <a:stretch xmlns:a="http://schemas.openxmlformats.org/drawingml/2006/main">
+            <a:fillRect l="0" t="0" r="0" b="0"/>
+          </a:stretch>
+        </p:blipFill>
+        <p:spPr>
+          <a:xfrm xmlns:a="http://schemas.openxmlformats.org/drawingml/2006/main">
+            <a:off x="9374637" y="198304"/>
+            <a:ext cx="2675956" cy="593304"/>
+          </a:xfrm>
+          <a:prstGeom xmlns:a="http://schemas.openxmlformats.org/drawingml/2006/main" prst="rect">
+            <a:avLst/>
+          </a:prstGeom>
+        </p:spPr>
+      </p:pic>
+      <p:sp>
+        <p:nvSpPr>
+          <p:cNvPr id="11" name="直接连接符 10">
+            <a:extLst xmlns:a="http://schemas.openxmlformats.org/drawingml/2006/main">
+              <a:ext uri="{FF2B5EF4-FFF2-40B4-BE49-F238E27FC236}">
+                <a16:creationId xmlns:a16="http://schemas.microsoft.com/office/drawing/2014/main" id="{B91F53A2-4C76-4312-8DF7-6498634AFA09}"/>
+              </a:ext>
+            </a:extLst>
+          </p:cNvPr>
+          <p:cNvSpPr>
+            <a:spLocks xmlns:a="http://schemas.openxmlformats.org/drawingml/2006/main" noGrp="1"/>
+          </p:cNvSpPr>
+          <p:nvPr/>
+        </p:nvSpPr>
+        <p:spPr>
+          <a:xfrm xmlns:a="http://schemas.openxmlformats.org/drawingml/2006/main">
+            <a:off x="334962" y="6564990"/>
+            <a:ext cx="11522076" cy="0"/>
+          </a:xfrm>
+          <a:prstGeom xmlns:a="http://schemas.openxmlformats.org/drawingml/2006/main" prst="line">
+            <a:avLst/>
+          </a:prstGeom>
+          <a:ln xmlns:a="http://schemas.openxmlformats.org/drawingml/2006/main" w="50800">
+            <a:solidFill>
+              <a:schemeClr val="accent1"/>
+            </a:solidFill>
+            <a:prstDash val="solid"/>
+          </a:ln>
+        </p:spPr>
+        <p:style>
+          <a:lnRef xmlns:a="http://schemas.openxmlformats.org/drawingml/2006/main" idx="1">
+            <a:schemeClr val="accent1"/>
+          </a:lnRef>
+          <a:fillRef xmlns:a="http://schemas.openxmlformats.org/drawingml/2006/main" idx="0">
+            <a:schemeClr val="accent1"/>
+          </a:fillRef>
+          <a:effectRef xmlns:a="http://schemas.openxmlformats.org/drawingml/2006/main" idx="0">
+            <a:schemeClr val="accent1"/>
+          </a:effectRef>
+          <a:fontRef xmlns:a="http://schemas.openxmlformats.org/drawingml/2006/main" idx="minor">
+            <a:schemeClr val="tx1"/>
+          </a:fontRef>
+        </p:style>
+      </p:sp>
+      <p:sp>
+        <p:nvSpPr>
+          <p:cNvPr id="10" name="直接连接符 9">
+            <a:extLst xmlns:a="http://schemas.openxmlformats.org/drawingml/2006/main">
+              <a:ext uri="{FF2B5EF4-FFF2-40B4-BE49-F238E27FC236}">
+                <a16:creationId xmlns:a16="http://schemas.microsoft.com/office/drawing/2014/main" id="{A7A5BEDC-1E45-49E9-B12D-61144AF0A81A}"/>
+              </a:ext>
+            </a:extLst>
+          </p:cNvPr>
+          <p:cNvSpPr>
+            <a:spLocks xmlns:a="http://schemas.openxmlformats.org/drawingml/2006/main" noGrp="1"/>
+          </p:cNvSpPr>
+          <p:nvPr/>
+        </p:nvSpPr>
+        <p:spPr>
+          <a:xfrm xmlns:a="http://schemas.openxmlformats.org/drawingml/2006/main">
+            <a:off x="334963" y="1402294"/>
+            <a:ext cx="11522075" cy="0"/>
+          </a:xfrm>
+          <a:prstGeom xmlns:a="http://schemas.openxmlformats.org/drawingml/2006/main" prst="line">
+            <a:avLst/>
+          </a:prstGeom>
+          <a:noFill xmlns:a="http://schemas.openxmlformats.org/drawingml/2006/main"/>
+          <a:ln xmlns:a="http://schemas.openxmlformats.org/drawingml/2006/main" w="25400">
+            <a:gradFill rotWithShape="1">
+              <a:gsLst>
+                <a:gs pos="100000">
+                  <a:schemeClr val="accent1">
+                    <a:lumMod val="97000"/>
+                  </a:schemeClr>
+                </a:gs>
+                <a:gs pos="0">
+                  <a:schemeClr val="accent1">
+                    <a:alpha val="0"/>
+                  </a:schemeClr>
+                </a:gs>
+              </a:gsLst>
+              <a:lin ang="10800000" scaled="1"/>
+              <a:tileRect/>
+            </a:gradFill>
+            <a:tailEnd type="none" w="med" len="sm"/>
+          </a:ln>
+          <a:effectLst xmlns:a="http://schemas.openxmlformats.org/drawingml/2006/main">
+            <a:outerShdw blurRad="63500" dist="50800" dir="4800000" sx="102000" sy="102000" algn="ctr" rotWithShape="0">
+              <a:schemeClr val="accent1">
+                <a:alpha val="40000"/>
+              </a:schemeClr>
+            </a:outerShdw>
+          </a:effectLst>
+        </p:spPr>
+        <p:style>
+          <a:lnRef xmlns:a="http://schemas.openxmlformats.org/drawingml/2006/main" idx="2">
+            <a:schemeClr val="accent1">
+              <a:shade val="50000"/>
+            </a:schemeClr>
+          </a:lnRef>
+          <a:fillRef xmlns:a="http://schemas.openxmlformats.org/drawingml/2006/main" idx="1">
+            <a:schemeClr val="accent1"/>
+          </a:fillRef>
+          <a:effectRef xmlns:a="http://schemas.openxmlformats.org/drawingml/2006/main" idx="0">
+            <a:schemeClr val="accent1"/>
+          </a:effectRef>
+          <a:fontRef xmlns:a="http://schemas.openxmlformats.org/drawingml/2006/main" idx="minor">
+            <a:schemeClr val="lt1"/>
+          </a:fontRef>
+        </p:style>
+      </p:sp>
+    </p:spTree>
+  </p:cSld>
+</p:sldLayout>
+</file>
+
+<file path=ppt/slideLayouts/slideLayout4.xml><?xml version="1.0" encoding="utf-8"?>
+<p:sldLayout xmlns:p="http://schemas.openxmlformats.org/presentationml/2006/main" preserve="1" userDrawn="1">
+  <p:cSld name="两栏内容">
+    <p:spTree>
+      <p:nvGrpSpPr>
+        <p:cNvPr id="1" name=""/>
+        <p:cNvGrpSpPr/>
+        <p:nvPr/>
+      </p:nvGrpSpPr>
+      <p:grpSpPr>
+        <a:xfrm xmlns:a="http://schemas.openxmlformats.org/drawingml/2006/main"/>
+      </p:grpSpPr>
+      <p:sp>
+        <p:nvSpPr>
+          <p:cNvPr id="87" name="任意多边形: 形状 86">
+            <a:extLst xmlns:a="http://schemas.openxmlformats.org/drawingml/2006/main">
+              <a:ext uri="{FF2B5EF4-FFF2-40B4-BE49-F238E27FC236}">
+                <a16:creationId xmlns:a16="http://schemas.microsoft.com/office/drawing/2014/main" id="{DA9A128E-109A-4353-9024-530C951E3A1D}"/>
+              </a:ext>
+            </a:extLst>
+          </p:cNvPr>
+          <p:cNvSpPr>
+            <a:spLocks xmlns:a="http://schemas.openxmlformats.org/drawingml/2006/main" noGrp="1"/>
+          </p:cNvSpPr>
+          <p:nvPr/>
+        </p:nvSpPr>
+        <p:spPr>
+          <a:xfrm xmlns:a="http://schemas.openxmlformats.org/drawingml/2006/main" rot="10800000">
+            <a:off x="2562" y="10535"/>
+            <a:ext cx="4440577" cy="2998608"/>
+          </a:xfrm>
+          <a:custGeom xmlns:a="http://schemas.openxmlformats.org/drawingml/2006/main">
+            <a:gdLst>
+              <a:gd name="connsiteX0" fmla="*/ 2893248 w 4163705"/>
+              <a:gd name="connsiteY0" fmla="*/ 0 h 2398711"/>
+              <a:gd name="connsiteX1" fmla="*/ 4039971 w 4163705"/>
+              <a:gd name="connsiteY1" fmla="*/ 231513 h 2398711"/>
+              <a:gd name="connsiteX2" fmla="*/ 4163705 w 4163705"/>
+              <a:gd name="connsiteY2" fmla="*/ 291119 h 2398711"/>
+              <a:gd name="connsiteX3" fmla="*/ 4163705 w 4163705"/>
+              <a:gd name="connsiteY3" fmla="*/ 2398711 h 2398711"/>
+              <a:gd name="connsiteX4" fmla="*/ 0 w 4163705"/>
+              <a:gd name="connsiteY4" fmla="*/ 2398711 h 2398711"/>
+              <a:gd name="connsiteX5" fmla="*/ 7085 w 4163705"/>
+              <a:gd name="connsiteY5" fmla="*/ 2352291 h 2398711"/>
+              <a:gd name="connsiteX6" fmla="*/ 2893248 w 4163705"/>
+              <a:gd name="connsiteY6" fmla="*/ 0 h 2398711"/>
+            </a:gdLst>
+            <a:rect l="l" t="t" r="r" b="b"/>
+            <a:pathLst>
+              <a:path w="4163705" h="2398711">
+                <a:moveTo>
+                  <a:pt x="2893248" y="0"/>
+                </a:moveTo>
+                <a:cubicBezTo>
+                  <a:pt x="3300008" y="0"/>
+                  <a:pt x="3687514" y="82436"/>
+                  <a:pt x="4039971" y="231513"/>
+                </a:cubicBezTo>
+                <a:lnTo>
+                  <a:pt x="4163705" y="291119"/>
+                </a:lnTo>
+                <a:lnTo>
+                  <a:pt x="4163705" y="2398711"/>
+                </a:lnTo>
+                <a:lnTo>
+                  <a:pt x="0" y="2398711"/>
+                </a:lnTo>
+                <a:lnTo>
+                  <a:pt x="7085" y="2352291"/>
+                </a:lnTo>
+                <a:cubicBezTo>
+                  <a:pt x="281790" y="1009841"/>
+                  <a:pt x="1469588" y="0"/>
+                  <a:pt x="2893248" y="0"/>
+                </a:cubicBezTo>
+                <a:close/>
+              </a:path>
+            </a:pathLst>
+          </a:custGeom>
+          <a:gradFill xmlns:a="http://schemas.openxmlformats.org/drawingml/2006/main">
+            <a:gsLst>
+              <a:gs pos="100000">
+                <a:srgbClr val="0268FE">
+                  <a:lumMod val="9000"/>
+                  <a:lumOff val="91000"/>
+                </a:srgbClr>
+              </a:gs>
+              <a:gs pos="0">
+                <a:srgbClr val="0268FE">
+                  <a:lumMod val="4000"/>
+                  <a:lumOff val="96000"/>
+                </a:srgbClr>
+              </a:gs>
+            </a:gsLst>
+            <a:lin ang="5400000" scaled="1"/>
+          </a:gradFill>
+          <a:ln xmlns:a="http://schemas.openxmlformats.org/drawingml/2006/main" w="12700" cmpd="sng">
+            <a:noFill/>
+            <a:prstDash val="solid"/>
+          </a:ln>
+        </p:spPr>
+        <p:txBody>
+          <a:bodyPr xmlns:a="http://schemas.openxmlformats.org/drawingml/2006/main" wrap="square" anchor="ctr">
+            <a:noAutofit/>
+          </a:bodyPr>
+          <a:lstStyle xmlns:a="http://schemas.openxmlformats.org/drawingml/2006/main"/>
+          <a:p xmlns:a="http://schemas.openxmlformats.org/drawingml/2006/main">
+            <a:pPr marL="0" marR="0" lvl="0" indent="0" algn="ctr" defTabSz="914400">
+              <a:lnSpc>
+                <a:spcPct val="100000"/>
+              </a:lnSpc>
+              <a:spcBef>
+                <a:spcPts val="0"/>
+              </a:spcBef>
+              <a:spcAft>
+                <a:spcPts val="0"/>
+              </a:spcAft>
+              <a:buClrTx/>
+              <a:buSzTx/>
+              <a:buFontTx/>
+              <a:buNone/>
+            </a:pPr>
+            <a:endParaRPr sz="1800" b="0" i="0" u="none" kern="0" cap="none" spc="0" baseline="0">
+              <a:ln>
+                <a:noFill/>
+              </a:ln>
+              <a:solidFill>
+                <a:srgbClr val="FFFFFF"/>
+              </a:solidFill>
+              <a:latin typeface="等线"/>
+              <a:ea typeface="等线"/>
+              <a:cs typeface="等线"/>
+            </a:endParaRPr>
+          </a:p>
+        </p:txBody>
+      </p:sp>
+      <p:sp>
+        <p:nvSpPr>
+          <p:cNvPr id="89" name="文本框 88">
+            <a:extLst xmlns:a="http://schemas.openxmlformats.org/drawingml/2006/main">
+              <a:ext uri="{FF2B5EF4-FFF2-40B4-BE49-F238E27FC236}">
+                <a16:creationId xmlns:a16="http://schemas.microsoft.com/office/drawing/2014/main" id="{CBF6074C-C97E-4C30-B3BC-4C4A47D1C8BA}"/>
+              </a:ext>
+            </a:extLst>
+          </p:cNvPr>
+          <p:cNvSpPr>
+            <a:spLocks xmlns:a="http://schemas.openxmlformats.org/drawingml/2006/main" noGrp="1"/>
+          </p:cNvSpPr>
+          <p:nvPr/>
+        </p:nvSpPr>
+        <p:spPr>
+          <a:xfrm xmlns:a="http://schemas.openxmlformats.org/drawingml/2006/main">
+            <a:off x="-79985" y="1085380"/>
+            <a:ext cx="3262303" cy="830997"/>
+          </a:xfrm>
+          <a:prstGeom xmlns:a="http://schemas.openxmlformats.org/drawingml/2006/main" prst="rect">
+            <a:avLst/>
+          </a:prstGeom>
+          <a:noFill xmlns:a="http://schemas.openxmlformats.org/drawingml/2006/main"/>
+        </p:spPr>
+        <p:txBody>
+          <a:bodyPr xmlns:a="http://schemas.openxmlformats.org/drawingml/2006/main" wrap="none">
+            <a:spAutoFit/>
+          </a:bodyPr>
+          <a:lstStyle xmlns:a="http://schemas.openxmlformats.org/drawingml/2006/main"/>
+          <a:p xmlns:a="http://schemas.openxmlformats.org/drawingml/2006/main">
+            <a:r>
+              <a:rPr sz="4800" b="1">
+                <a:solidFill>
+                  <a:srgbClr val="FFFFFF"/>
+                </a:solidFill>
+                <a:latin typeface="微软雅黑"/>
+                <a:ea typeface="微软雅黑"/>
+                <a:cs typeface="微软雅黑"/>
+              </a:rPr>
+              <a:t>CONTENT</a:t>
+            </a:r>
+            <a:endParaRPr sz="4800" b="1">
+              <a:solidFill>
+                <a:srgbClr val="FFFFFF"/>
+              </a:solidFill>
+              <a:latin typeface="微软雅黑"/>
+              <a:ea typeface="微软雅黑"/>
+              <a:cs typeface="微软雅黑"/>
+            </a:endParaRPr>
+          </a:p>
+        </p:txBody>
+      </p:sp>
+      <p:pic>
+        <p:nvPicPr>
+          <p:cNvPr id="135" name="图片 124"/>
+          <p:cNvPicPr>
+            <a:picLocks xmlns:a="http://schemas.openxmlformats.org/drawingml/2006/main" noChangeAspect="1"/>
+          </p:cNvPicPr>
+          <p:nvPr/>
+        </p:nvPicPr>
+        <p:blipFill>
+          <a:blip xmlns:r="http://schemas.openxmlformats.org/officeDocument/2006/relationships" xmlns:a="http://schemas.openxmlformats.org/drawingml/2006/main" r:embed="R94aa53236d2243ea">
+            <a:alphaModFix amt="70000"/>
+          </a:blip>
+          <a:srcRect xmlns:a="http://schemas.openxmlformats.org/drawingml/2006/main" l="0" t="0" r="0" b="58808"/>
+          <a:stretch xmlns:a="http://schemas.openxmlformats.org/drawingml/2006/main">
+            <a:fillRect l="0" t="0" r="0" b="0"/>
+          </a:stretch>
+        </p:blipFill>
+        <p:spPr>
+          <a:xfrm xmlns:a="http://schemas.openxmlformats.org/drawingml/2006/main">
+            <a:off x="662962" y="3707963"/>
+            <a:ext cx="3024288" cy="2020666"/>
+          </a:xfrm>
+          <a:prstGeom xmlns:a="http://schemas.openxmlformats.org/drawingml/2006/main" prst="rect">
+            <a:avLst/>
+          </a:prstGeom>
+        </p:spPr>
+      </p:pic>
+      <p:sp>
+        <p:nvSpPr>
+          <p:cNvPr id="88" name="文本框 87">
+            <a:extLst xmlns:a="http://schemas.openxmlformats.org/drawingml/2006/main">
+              <a:ext uri="{FF2B5EF4-FFF2-40B4-BE49-F238E27FC236}">
+                <a16:creationId xmlns:a16="http://schemas.microsoft.com/office/drawing/2014/main" id="{1519D6E5-D136-48C8-AB10-44F738311211}"/>
+              </a:ext>
+            </a:extLst>
+          </p:cNvPr>
+          <p:cNvSpPr>
+            <a:spLocks xmlns:a="http://schemas.openxmlformats.org/drawingml/2006/main" noGrp="1"/>
+          </p:cNvSpPr>
+          <p:nvPr/>
+        </p:nvSpPr>
+        <p:spPr>
+          <a:xfrm xmlns:a="http://schemas.openxmlformats.org/drawingml/2006/main">
+            <a:off x="851667" y="1479325"/>
+            <a:ext cx="2646878" cy="830997"/>
+          </a:xfrm>
+          <a:prstGeom xmlns:a="http://schemas.openxmlformats.org/drawingml/2006/main" prst="rect">
+            <a:avLst/>
+          </a:prstGeom>
+          <a:noFill xmlns:a="http://schemas.openxmlformats.org/drawingml/2006/main"/>
+        </p:spPr>
+        <p:txBody>
+          <a:bodyPr xmlns:a="http://schemas.openxmlformats.org/drawingml/2006/main" wrap="none">
+            <a:spAutoFit/>
+          </a:bodyPr>
+          <a:lstStyle xmlns:a="http://schemas.openxmlformats.org/drawingml/2006/main">
+            <a:lvl1pPr>
+              <a:buNone/>
+              <a:defRPr sz="7200">
+                <a:gradFill flip="none" rotWithShape="1">
+                  <a:gsLst>
+                    <a:gs pos="0">
+                      <a:schemeClr val="accent1">
+                        <a:lumMod val="80000"/>
+                        <a:lumOff val="20000"/>
+                      </a:schemeClr>
+                    </a:gs>
+                    <a:gs pos="100000">
+                      <a:schemeClr val="accent1"/>
+                    </a:gs>
+                  </a:gsLst>
+                  <a:lin ang="5400000" scaled="1"/>
+                  <a:tileRect/>
+                </a:gradFill>
+                <a:latin typeface="思源宋体 CN Heavy"/>
+                <a:ea typeface="思源宋体 CN Heavy"/>
+                <a:cs typeface="思源宋体 CN Heavy"/>
+              </a:defRPr>
+            </a:lvl1pPr>
+          </a:lstStyle>
+          <a:p xmlns:a="http://schemas.openxmlformats.org/drawingml/2006/main">
+            <a:pPr marL="0" marR="0" lvl="0" indent="0" defTabSz="914400">
+              <a:lnSpc>
+                <a:spcPct val="100000"/>
+              </a:lnSpc>
+              <a:spcBef>
+                <a:spcPts val="0"/>
+              </a:spcBef>
+              <a:spcAft>
+                <a:spcPts val="0"/>
+              </a:spcAft>
+              <a:buClrTx/>
+              <a:buSzTx/>
+              <a:buFontTx/>
+              <a:buNone/>
+            </a:pPr>
+            <a:r>
+              <a:rPr sz="4800" b="0" i="0" u="none" cap="none" spc="0">
+                <a:ln>
+                  <a:noFill/>
+                </a:ln>
+                <a:gradFill rotWithShape="1">
+                  <a:gsLst>
+                    <a:gs pos="0">
+                      <a:srgbClr val="0268FE">
+                        <a:lumMod val="80000"/>
+                        <a:lumOff val="20000"/>
+                      </a:srgbClr>
+                    </a:gs>
+                    <a:gs pos="100000">
+                      <a:srgbClr val="0268FE"/>
+                    </a:gs>
+                  </a:gsLst>
+                  <a:lin ang="5400000" scaled="1"/>
+                  <a:tileRect/>
+                </a:gradFill>
+                <a:latin typeface="汉仪粗宋简"/>
+                <a:ea typeface="汉仪粗宋简"/>
+                <a:cs typeface="汉仪粗宋简"/>
+              </a:rPr>
+              <a:t>汇报提纲</a:t>
+            </a:r>
+          </a:p>
+        </p:txBody>
+      </p:sp>
+      <p:sp>
+        <p:nvSpPr>
+          <p:cNvPr id="131" name="任意多边形: 形状 130">
+            <a:extLst xmlns:a="http://schemas.openxmlformats.org/drawingml/2006/main">
+              <a:ext uri="{FF2B5EF4-FFF2-40B4-BE49-F238E27FC236}">
+                <a16:creationId xmlns:a16="http://schemas.microsoft.com/office/drawing/2014/main" id="{D136D3EE-081A-49D1-9506-38E1B1A245F2}"/>
+              </a:ext>
+            </a:extLst>
+          </p:cNvPr>
+          <p:cNvSpPr>
+            <a:spLocks xmlns:a="http://schemas.openxmlformats.org/drawingml/2006/main" noGrp="1"/>
+          </p:cNvSpPr>
+          <p:nvPr/>
+        </p:nvSpPr>
+        <p:spPr>
+          <a:xfrm xmlns:a="http://schemas.openxmlformats.org/drawingml/2006/main">
+            <a:off x="8895335" y="4602588"/>
+            <a:ext cx="3296666" cy="2255412"/>
+          </a:xfrm>
+          <a:custGeom xmlns:a="http://schemas.openxmlformats.org/drawingml/2006/main">
+            <a:gdLst>
+              <a:gd name="connsiteX0" fmla="*/ 2893248 w 4163705"/>
+              <a:gd name="connsiteY0" fmla="*/ 0 h 2398711"/>
+              <a:gd name="connsiteX1" fmla="*/ 4039971 w 4163705"/>
+              <a:gd name="connsiteY1" fmla="*/ 231513 h 2398711"/>
+              <a:gd name="connsiteX2" fmla="*/ 4163705 w 4163705"/>
+              <a:gd name="connsiteY2" fmla="*/ 291119 h 2398711"/>
+              <a:gd name="connsiteX3" fmla="*/ 4163705 w 4163705"/>
+              <a:gd name="connsiteY3" fmla="*/ 2398711 h 2398711"/>
+              <a:gd name="connsiteX4" fmla="*/ 0 w 4163705"/>
+              <a:gd name="connsiteY4" fmla="*/ 2398711 h 2398711"/>
+              <a:gd name="connsiteX5" fmla="*/ 7085 w 4163705"/>
+              <a:gd name="connsiteY5" fmla="*/ 2352291 h 2398711"/>
+              <a:gd name="connsiteX6" fmla="*/ 2893248 w 4163705"/>
+              <a:gd name="connsiteY6" fmla="*/ 0 h 2398711"/>
+            </a:gdLst>
+            <a:rect l="l" t="t" r="r" b="b"/>
+            <a:pathLst>
+              <a:path w="4163705" h="2398711">
+                <a:moveTo>
+                  <a:pt x="2893248" y="0"/>
+                </a:moveTo>
+                <a:cubicBezTo>
+                  <a:pt x="3300008" y="0"/>
+                  <a:pt x="3687514" y="82436"/>
+                  <a:pt x="4039971" y="231513"/>
+                </a:cubicBezTo>
+                <a:lnTo>
+                  <a:pt x="4163705" y="291119"/>
+                </a:lnTo>
+                <a:lnTo>
+                  <a:pt x="4163705" y="2398711"/>
+                </a:lnTo>
+                <a:lnTo>
+                  <a:pt x="0" y="2398711"/>
+                </a:lnTo>
+                <a:lnTo>
+                  <a:pt x="7085" y="2352291"/>
+                </a:lnTo>
+                <a:cubicBezTo>
+                  <a:pt x="281790" y="1009841"/>
+                  <a:pt x="1469588" y="0"/>
+                  <a:pt x="2893248" y="0"/>
+                </a:cubicBezTo>
+                <a:close/>
+              </a:path>
+            </a:pathLst>
+          </a:custGeom>
+          <a:gradFill xmlns:a="http://schemas.openxmlformats.org/drawingml/2006/main">
+            <a:gsLst>
+              <a:gs pos="100000">
+                <a:srgbClr val="0268FE">
+                  <a:lumMod val="9000"/>
+                  <a:lumOff val="91000"/>
+                </a:srgbClr>
+              </a:gs>
+              <a:gs pos="0">
+                <a:srgbClr val="0268FE">
+                  <a:lumMod val="4000"/>
+                  <a:lumOff val="96000"/>
+                </a:srgbClr>
+              </a:gs>
+            </a:gsLst>
+            <a:lin ang="5400000" scaled="1"/>
+          </a:gradFill>
+          <a:ln xmlns:a="http://schemas.openxmlformats.org/drawingml/2006/main" w="12700" cmpd="sng">
+            <a:noFill/>
+            <a:prstDash val="solid"/>
+          </a:ln>
+        </p:spPr>
+        <p:txBody>
+          <a:bodyPr xmlns:a="http://schemas.openxmlformats.org/drawingml/2006/main" wrap="square" anchor="ctr">
+            <a:noAutofit/>
+          </a:bodyPr>
+          <a:lstStyle xmlns:a="http://schemas.openxmlformats.org/drawingml/2006/main"/>
+          <a:p xmlns:a="http://schemas.openxmlformats.org/drawingml/2006/main">
+            <a:pPr marL="0" marR="0" lvl="0" indent="0" algn="ctr" defTabSz="914400">
+              <a:lnSpc>
+                <a:spcPct val="100000"/>
+              </a:lnSpc>
+              <a:spcBef>
+                <a:spcPts val="0"/>
+              </a:spcBef>
+              <a:spcAft>
+                <a:spcPts val="0"/>
+              </a:spcAft>
+              <a:buClrTx/>
+              <a:buSzTx/>
+              <a:buFontTx/>
+              <a:buNone/>
+            </a:pPr>
+            <a:endParaRPr sz="1800" b="0" i="0" u="none" kern="0" cap="none" spc="0" baseline="0">
+              <a:ln>
+                <a:noFill/>
+              </a:ln>
+              <a:solidFill>
+                <a:srgbClr val="FFFFFF"/>
+              </a:solidFill>
+              <a:latin typeface="等线"/>
+              <a:ea typeface="等线"/>
+              <a:cs typeface="等线"/>
+            </a:endParaRPr>
+          </a:p>
+        </p:txBody>
+      </p:sp>
+    </p:spTree>
+  </p:cSld>
+</p:sldLayout>
+</file>
+
+<file path=ppt/slideLayouts/slideLayout5.xml><?xml version="1.0" encoding="utf-8"?>
+<p:sldLayout xmlns:p="http://schemas.openxmlformats.org/presentationml/2006/main" type="twoTxTwoObj" preserve="1">
+  <p:cSld name="比较">
+    <p:spTree>
+      <p:nvGrpSpPr>
+        <p:cNvPr id="1" name=""/>
+        <p:cNvGrpSpPr/>
+        <p:nvPr/>
+      </p:nvGrpSpPr>
+      <p:grpSpPr>
+        <a:xfrm xmlns:a="http://schemas.openxmlformats.org/drawingml/2006/main"/>
+      </p:grpSpPr>
+      <p:sp>
+        <p:nvSpPr>
+          <p:cNvPr id="2" name="标题 1">
+            <a:extLst xmlns:a="http://schemas.openxmlformats.org/drawingml/2006/main">
+              <a:ext uri="{FF2B5EF4-FFF2-40B4-BE49-F238E27FC236}">
+                <a16:creationId xmlns:a16="http://schemas.microsoft.com/office/drawing/2014/main" id="{BDD71B3E-E7BB-4A91-8723-3D4D03F2A084}"/>
+              </a:ext>
+            </a:extLst>
+          </p:cNvPr>
+          <p:cNvSpPr>
+            <a:spLocks xmlns:a="http://schemas.openxmlformats.org/drawingml/2006/main" noGrp="1"/>
+          </p:cNvSpPr>
+          <p:nvPr>
+            <p:ph type="title" idx="0"/>
+          </p:nvPr>
+        </p:nvSpPr>
+        <p:spPr>
+          <a:xfrm xmlns:a="http://schemas.openxmlformats.org/drawingml/2006/main">
+            <a:off x="839788" y="365125"/>
+            <a:ext cx="10515600" cy="1325563"/>
+          </a:xfrm>
+        </p:spPr>
+        <p:txBody>
+          <a:bodyPr xmlns:a="http://schemas.openxmlformats.org/drawingml/2006/main"/>
+          <a:lstStyle xmlns:a="http://schemas.openxmlformats.org/drawingml/2006/main"/>
+          <a:p xmlns:a="http://schemas.openxmlformats.org/drawingml/2006/main">
+            <a:r>
+              <a:t>单击此处编辑母版标题样式</a:t>
+            </a:r>
+          </a:p>
+        </p:txBody>
+      </p:sp>
+      <p:sp>
+        <p:nvSpPr>
+          <p:cNvPr id="3" name="文本占位符 2">
+            <a:extLst xmlns:a="http://schemas.openxmlformats.org/drawingml/2006/main">
+              <a:ext uri="{FF2B5EF4-FFF2-40B4-BE49-F238E27FC236}">
+                <a16:creationId xmlns:a16="http://schemas.microsoft.com/office/drawing/2014/main" id="{7A7B0279-5A8E-4BE4-BE43-542616D70A2D}"/>
+              </a:ext>
+            </a:extLst>
+          </p:cNvPr>
+          <p:cNvSpPr>
+            <a:spLocks xmlns:a="http://schemas.openxmlformats.org/drawingml/2006/main" noGrp="1"/>
+          </p:cNvSpPr>
+          <p:nvPr>
+            <p:ph type="body" idx="1"/>
+          </p:nvPr>
+        </p:nvSpPr>
+        <p:spPr>
+          <a:xfrm xmlns:a="http://schemas.openxmlformats.org/drawingml/2006/main">
+            <a:off x="839788" y="1681163"/>
+            <a:ext cx="5157787" cy="823912"/>
+          </a:xfrm>
+        </p:spPr>
+        <p:txBody>
+          <a:bodyPr xmlns:a="http://schemas.openxmlformats.org/drawingml/2006/main" anchor="b"/>
+          <a:lstStyle xmlns:a="http://schemas.openxmlformats.org/drawingml/2006/main">
+            <a:lvl1pPr marL="0" indent="0">
+              <a:buNone/>
+              <a:defRPr sz="2400" b="1"/>
+            </a:lvl1pPr>
+            <a:lvl2pPr marL="457200" indent="0">
+              <a:buNone/>
+              <a:defRPr sz="2000" b="1"/>
+            </a:lvl2pPr>
+            <a:lvl3pPr marL="914400" indent="0">
+              <a:buNone/>
+              <a:defRPr sz="1800" b="1"/>
+            </a:lvl3pPr>
+            <a:lvl4pPr marL="1371600" indent="0">
+              <a:buNone/>
+              <a:defRPr sz="1600" b="1"/>
+            </a:lvl4pPr>
+            <a:lvl5pPr marL="1828800" indent="0">
+              <a:buNone/>
+              <a:defRPr sz="1600" b="1"/>
+            </a:lvl5pPr>
+            <a:lvl6pPr marL="2286000" indent="0">
+              <a:buNone/>
+              <a:defRPr sz="1600" b="1"/>
+            </a:lvl6pPr>
+            <a:lvl7pPr marL="2743200" indent="0">
+              <a:buNone/>
+              <a:defRPr sz="1600" b="1"/>
+            </a:lvl7pPr>
+            <a:lvl8pPr marL="3200400" indent="0">
+              <a:buNone/>
+              <a:defRPr sz="1600" b="1"/>
+            </a:lvl8pPr>
+            <a:lvl9pPr marL="3657600" indent="0">
+              <a:buNone/>
+              <a:defRPr sz="1600" b="1"/>
+            </a:lvl9pPr>
+          </a:lstStyle>
+          <a:p xmlns:a="http://schemas.openxmlformats.org/drawingml/2006/main">
+            <a:pPr lvl="0">
+              <a:buNone/>
+            </a:pPr>
+            <a:r>
+              <a:t>单击此处编辑母版文本样式</a:t>
+            </a:r>
+          </a:p>
+        </p:txBody>
+      </p:sp>
+      <p:sp>
+        <p:nvSpPr>
+          <p:cNvPr id="4" name="内容占位符 3">
+            <a:extLst xmlns:a="http://schemas.openxmlformats.org/drawingml/2006/main">
+              <a:ext uri="{FF2B5EF4-FFF2-40B4-BE49-F238E27FC236}">
+                <a16:creationId xmlns:a16="http://schemas.microsoft.com/office/drawing/2014/main" id="{92E6B805-09F1-44B6-9A68-612479C56C86}"/>
+              </a:ext>
+            </a:extLst>
+          </p:cNvPr>
+          <p:cNvSpPr>
+            <a:spLocks xmlns:a="http://schemas.openxmlformats.org/drawingml/2006/main" noGrp="1"/>
+          </p:cNvSpPr>
+          <p:nvPr>
+            <p:ph idx="2"/>
+          </p:nvPr>
+        </p:nvSpPr>
+        <p:spPr>
+          <a:xfrm xmlns:a="http://schemas.openxmlformats.org/drawingml/2006/main">
+            <a:off x="839788" y="2505075"/>
+            <a:ext cx="5157787" cy="3684588"/>
+          </a:xfrm>
+        </p:spPr>
+        <p:txBody>
+          <a:bodyPr xmlns:a="http://schemas.openxmlformats.org/drawingml/2006/main"/>
+          <a:lstStyle xmlns:a="http://schemas.openxmlformats.org/drawingml/2006/main"/>
+          <a:p xmlns:a="http://schemas.openxmlformats.org/drawingml/2006/main">
+            <a:pPr lvl="0">
+              <a:buNone/>
+            </a:pPr>
+            <a:r>
+              <a:t>单击此处编辑母版文本样式</a:t>
+            </a:r>
+          </a:p>
+          <a:p xmlns:a="http://schemas.openxmlformats.org/drawingml/2006/main">
+            <a:pPr lvl="1">
+              <a:buNone/>
+            </a:pPr>
+            <a:r>
+              <a:t>二级</a:t>
+            </a:r>
+          </a:p>
+          <a:p xmlns:a="http://schemas.openxmlformats.org/drawingml/2006/main">
+            <a:pPr lvl="2">
+              <a:buNone/>
+            </a:pPr>
+            <a:r>
+              <a:t>三级</a:t>
+            </a:r>
+          </a:p>
+          <a:p xmlns:a="http://schemas.openxmlformats.org/drawingml/2006/main">
+            <a:pPr lvl="3">
+              <a:buNone/>
+            </a:pPr>
+            <a:r>
+              <a:t>四级</a:t>
+            </a:r>
+          </a:p>
+          <a:p xmlns:a="http://schemas.openxmlformats.org/drawingml/2006/main">
+            <a:pPr lvl="4">
+              <a:buNone/>
+            </a:pPr>
+            <a:r>
+              <a:t>五级</a:t>
+            </a:r>
+          </a:p>
+        </p:txBody>
+      </p:sp>
+      <p:sp>
+        <p:nvSpPr>
+          <p:cNvPr id="5" name="文本占位符 4">
+            <a:extLst xmlns:a="http://schemas.openxmlformats.org/drawingml/2006/main">
+              <a:ext uri="{FF2B5EF4-FFF2-40B4-BE49-F238E27FC236}">
+                <a16:creationId xmlns:a16="http://schemas.microsoft.com/office/drawing/2014/main" id="{099862F6-230B-4A3D-84E8-43253C1C2A05}"/>
+              </a:ext>
+            </a:extLst>
+          </p:cNvPr>
+          <p:cNvSpPr>
+            <a:spLocks xmlns:a="http://schemas.openxmlformats.org/drawingml/2006/main" noGrp="1"/>
+          </p:cNvSpPr>
+          <p:nvPr>
+            <p:ph type="body" idx="3"/>
+          </p:nvPr>
+        </p:nvSpPr>
+        <p:spPr>
+          <a:xfrm xmlns:a="http://schemas.openxmlformats.org/drawingml/2006/main">
+            <a:off x="6172200" y="1681163"/>
+            <a:ext cx="5183188" cy="823912"/>
+          </a:xfrm>
+        </p:spPr>
+        <p:txBody>
+          <a:bodyPr xmlns:a="http://schemas.openxmlformats.org/drawingml/2006/main" anchor="b"/>
+          <a:lstStyle xmlns:a="http://schemas.openxmlformats.org/drawingml/2006/main">
+            <a:lvl1pPr marL="0" indent="0">
+              <a:buNone/>
+              <a:defRPr sz="2400" b="1"/>
+            </a:lvl1pPr>
+            <a:lvl2pPr marL="457200" indent="0">
+              <a:buNone/>
+              <a:defRPr sz="2000" b="1"/>
+            </a:lvl2pPr>
+            <a:lvl3pPr marL="914400" indent="0">
+              <a:buNone/>
+              <a:defRPr sz="1800" b="1"/>
+            </a:lvl3pPr>
+            <a:lvl4pPr marL="1371600" indent="0">
+              <a:buNone/>
+              <a:defRPr sz="1600" b="1"/>
+            </a:lvl4pPr>
+            <a:lvl5pPr marL="1828800" indent="0">
+              <a:buNone/>
+              <a:defRPr sz="1600" b="1"/>
+            </a:lvl5pPr>
+            <a:lvl6pPr marL="2286000" indent="0">
+              <a:buNone/>
+              <a:defRPr sz="1600" b="1"/>
+            </a:lvl6pPr>
+            <a:lvl7pPr marL="2743200" indent="0">
+              <a:buNone/>
+              <a:defRPr sz="1600" b="1"/>
+            </a:lvl7pPr>
+            <a:lvl8pPr marL="3200400" indent="0">
+              <a:buNone/>
+              <a:defRPr sz="1600" b="1"/>
+            </a:lvl8pPr>
+            <a:lvl9pPr marL="3657600" indent="0">
+              <a:buNone/>
+              <a:defRPr sz="1600" b="1"/>
+            </a:lvl9pPr>
+          </a:lstStyle>
+          <a:p xmlns:a="http://schemas.openxmlformats.org/drawingml/2006/main">
+            <a:pPr lvl="0">
+              <a:buNone/>
+            </a:pPr>
+            <a:r>
+              <a:t>单击此处编辑母版文本样式</a:t>
+            </a:r>
+          </a:p>
+        </p:txBody>
+      </p:sp>
+      <p:sp>
+        <p:nvSpPr>
+          <p:cNvPr id="6" name="内容占位符 5">
+            <a:extLst xmlns:a="http://schemas.openxmlformats.org/drawingml/2006/main">
+              <a:ext uri="{FF2B5EF4-FFF2-40B4-BE49-F238E27FC236}">
+                <a16:creationId xmlns:a16="http://schemas.microsoft.com/office/drawing/2014/main" id="{67362CB8-4CED-4914-B3A7-DFD84D618246}"/>
+              </a:ext>
+            </a:extLst>
+          </p:cNvPr>
+          <p:cNvSpPr>
+            <a:spLocks xmlns:a="http://schemas.openxmlformats.org/drawingml/2006/main" noGrp="1"/>
+          </p:cNvSpPr>
+          <p:nvPr>
+            <p:ph idx="4"/>
+          </p:nvPr>
+        </p:nvSpPr>
+        <p:spPr>
+          <a:xfrm xmlns:a="http://schemas.openxmlformats.org/drawingml/2006/main">
+            <a:off x="6172200" y="2505075"/>
+            <a:ext cx="5183188" cy="3684588"/>
+          </a:xfrm>
+        </p:spPr>
+        <p:txBody>
+          <a:bodyPr xmlns:a="http://schemas.openxmlformats.org/drawingml/2006/main"/>
+          <a:lstStyle xmlns:a="http://schemas.openxmlformats.org/drawingml/2006/main"/>
+          <a:p xmlns:a="http://schemas.openxmlformats.org/drawingml/2006/main">
+            <a:pPr lvl="0">
+              <a:buNone/>
+            </a:pPr>
+            <a:r>
+              <a:t>单击此处编辑母版文本样式</a:t>
+            </a:r>
+          </a:p>
+          <a:p xmlns:a="http://schemas.openxmlformats.org/drawingml/2006/main">
+            <a:pPr lvl="1">
+              <a:buNone/>
+            </a:pPr>
+            <a:r>
+              <a:t>二级</a:t>
+            </a:r>
+          </a:p>
+          <a:p xmlns:a="http://schemas.openxmlformats.org/drawingml/2006/main">
+            <a:pPr lvl="2">
+              <a:buNone/>
+            </a:pPr>
+            <a:r>
+              <a:t>三级</a:t>
+            </a:r>
+          </a:p>
+          <a:p xmlns:a="http://schemas.openxmlformats.org/drawingml/2006/main">
+            <a:pPr lvl="3">
+              <a:buNone/>
+            </a:pPr>
+            <a:r>
+              <a:t>四级</a:t>
+            </a:r>
+          </a:p>
+          <a:p xmlns:a="http://schemas.openxmlformats.org/drawingml/2006/main">
+            <a:pPr lvl="4">
+              <a:buNone/>
+            </a:pPr>
+            <a:r>
+              <a:t>五级</a:t>
+            </a:r>
+          </a:p>
+        </p:txBody>
+      </p:sp>
+      <p:sp>
+        <p:nvSpPr>
+          <p:cNvPr id="7" name="日期占位符 6">
+            <a:extLst xmlns:a="http://schemas.openxmlformats.org/drawingml/2006/main">
+              <a:ext uri="{FF2B5EF4-FFF2-40B4-BE49-F238E27FC236}">
+                <a16:creationId xmlns:a16="http://schemas.microsoft.com/office/drawing/2014/main" id="{03961E07-10CD-44C3-8416-A967B0108733}"/>
+              </a:ext>
+            </a:extLst>
+          </p:cNvPr>
+          <p:cNvSpPr>
+            <a:spLocks xmlns:a="http://schemas.openxmlformats.org/drawingml/2006/main" noGrp="1"/>
+          </p:cNvSpPr>
+          <p:nvPr>
+            <p:ph type="dt" idx="10"/>
+          </p:nvPr>
+        </p:nvSpPr>
+        <p:spPr/>
+        <p:txBody>
+          <a:bodyPr xmlns:a="http://schemas.openxmlformats.org/drawingml/2006/main"/>
+          <a:lstStyle xmlns:a="http://schemas.openxmlformats.org/drawingml/2006/main"/>
+          <a:p xmlns:a="http://schemas.openxmlformats.org/drawingml/2006/main">
+            <a:fld id="{9F4852F6-D0EE-43FF-9758-4449F4064C7C}" type="datetimeFigureOut">
+              <a:t>2026/8/8</a:t>
+            </a:fld>
+            <a:endParaRPr/>
+          </a:p>
+        </p:txBody>
+      </p:sp>
+      <p:sp>
+        <p:nvSpPr>
+          <p:cNvPr id="8" name="页脚占位符 7">
+            <a:extLst xmlns:a="http://schemas.openxmlformats.org/drawingml/2006/main">
+              <a:ext uri="{FF2B5EF4-FFF2-40B4-BE49-F238E27FC236}">
+                <a16:creationId xmlns:a16="http://schemas.microsoft.com/office/drawing/2014/main" id="{E17A85E4-456D-4DAE-AAC8-5F388929B084}"/>
+              </a:ext>
+            </a:extLst>
+          </p:cNvPr>
+          <p:cNvSpPr>
+            <a:spLocks xmlns:a="http://schemas.openxmlformats.org/drawingml/2006/main" noGrp="1"/>
+          </p:cNvSpPr>
+          <p:nvPr>
+            <p:ph type="ftr" idx="11"/>
+          </p:nvPr>
+        </p:nvSpPr>
+        <p:spPr/>
+        <p:txBody>
+          <a:bodyPr xmlns:a="http://schemas.openxmlformats.org/drawingml/2006/main"/>
+          <a:lstStyle xmlns:a="http://schemas.openxmlformats.org/drawingml/2006/main"/>
+          <a:p xmlns:a="http://schemas.openxmlformats.org/drawingml/2006/main">
+            <a:endParaRPr/>
+          </a:p>
+        </p:txBody>
+      </p:sp>
+      <p:sp>
+        <p:nvSpPr>
+          <p:cNvPr id="9" name="灯片编号占位符 8">
+            <a:extLst xmlns:a="http://schemas.openxmlformats.org/drawingml/2006/main">
+              <a:ext uri="{FF2B5EF4-FFF2-40B4-BE49-F238E27FC236}">
+                <a16:creationId xmlns:a16="http://schemas.microsoft.com/office/drawing/2014/main" id="{1081B8E5-10E5-43F8-84D2-282E76D88B68}"/>
+              </a:ext>
+            </a:extLst>
+          </p:cNvPr>
+          <p:cNvSpPr>
+            <a:spLocks xmlns:a="http://schemas.openxmlformats.org/drawingml/2006/main" noGrp="1"/>
+          </p:cNvSpPr>
+          <p:nvPr>
+            <p:ph type="sldNum" idx="12"/>
+          </p:nvPr>
+        </p:nvSpPr>
+        <p:spPr/>
+        <p:txBody>
+          <a:bodyPr xmlns:a="http://schemas.openxmlformats.org/drawingml/2006/main"/>
+          <a:lstStyle xmlns:a="http://schemas.openxmlformats.org/drawingml/2006/main"/>
+          <a:p xmlns:a="http://schemas.openxmlformats.org/drawingml/2006/main">
+            <a:fld id="{F60DD7EF-E908-4723-98EB-3DEAFF871F36}" type="slidenum">
+              <a:t>‹#›</a:t>
+            </a:fld>
+            <a:endParaRPr/>
+          </a:p>
+        </p:txBody>
+      </p:sp>
+    </p:spTree>
+  </p:cSld>
+</p:sldLayout>
+</file>
+
+<file path=ppt/slideLayouts/slideLayout6.xml><?xml version="1.0" encoding="utf-8"?>
+<p:sldLayout xmlns:p="http://schemas.openxmlformats.org/presentationml/2006/main" type="titleOnly" preserve="1">
+  <p:cSld name="仅标题">
+    <p:spTree>
+      <p:nvGrpSpPr>
+        <p:cNvPr id="1" name=""/>
+        <p:cNvGrpSpPr/>
+        <p:nvPr/>
+      </p:nvGrpSpPr>
+      <p:grpSpPr>
+        <a:xfrm xmlns:a="http://schemas.openxmlformats.org/drawingml/2006/main"/>
+      </p:grpSpPr>
+      <p:sp>
+        <p:nvSpPr>
+          <p:cNvPr id="2" name="标题 1">
+            <a:extLst xmlns:a="http://schemas.openxmlformats.org/drawingml/2006/main">
+              <a:ext uri="{FF2B5EF4-FFF2-40B4-BE49-F238E27FC236}">
+                <a16:creationId xmlns:a16="http://schemas.microsoft.com/office/drawing/2014/main" id="{32C5406A-F660-44DD-96CD-E0F49B25FB28}"/>
+              </a:ext>
+            </a:extLst>
+          </p:cNvPr>
+          <p:cNvSpPr>
+            <a:spLocks xmlns:a="http://schemas.openxmlformats.org/drawingml/2006/main" noGrp="1"/>
+          </p:cNvSpPr>
+          <p:nvPr>
+            <p:ph type="title" idx="0"/>
+          </p:nvPr>
+        </p:nvSpPr>
+        <p:spPr/>
+        <p:txBody>
+          <a:bodyPr xmlns:a="http://schemas.openxmlformats.org/drawingml/2006/main"/>
+          <a:lstStyle xmlns:a="http://schemas.openxmlformats.org/drawingml/2006/main"/>
+          <a:p xmlns:a="http://schemas.openxmlformats.org/drawingml/2006/main">
+            <a:r>
+              <a:t>单击此处编辑母版标题样式</a:t>
+            </a:r>
+          </a:p>
+        </p:txBody>
+      </p:sp>
+      <p:sp>
+        <p:nvSpPr>
+          <p:cNvPr id="3" name="日期占位符 2">
+            <a:extLst xmlns:a="http://schemas.openxmlformats.org/drawingml/2006/main">
+              <a:ext uri="{FF2B5EF4-FFF2-40B4-BE49-F238E27FC236}">
+                <a16:creationId xmlns:a16="http://schemas.microsoft.com/office/drawing/2014/main" id="{25077712-3436-48CD-B69B-591F3046EB72}"/>
+              </a:ext>
+            </a:extLst>
+          </p:cNvPr>
+          <p:cNvSpPr>
+            <a:spLocks xmlns:a="http://schemas.openxmlformats.org/drawingml/2006/main" noGrp="1"/>
+          </p:cNvSpPr>
+          <p:nvPr>
+            <p:ph type="dt" idx="10"/>
+          </p:nvPr>
+        </p:nvSpPr>
+        <p:spPr/>
+        <p:txBody>
+          <a:bodyPr xmlns:a="http://schemas.openxmlformats.org/drawingml/2006/main"/>
+          <a:lstStyle xmlns:a="http://schemas.openxmlformats.org/drawingml/2006/main"/>
+          <a:p xmlns:a="http://schemas.openxmlformats.org/drawingml/2006/main">
+            <a:fld id="{9F4852F6-D0EE-43FF-9758-4449F4064C7C}" type="datetimeFigureOut">
+              <a:t>2026/8/8</a:t>
+            </a:fld>
+            <a:endParaRPr/>
+          </a:p>
+        </p:txBody>
+      </p:sp>
+      <p:sp>
+        <p:nvSpPr>
+          <p:cNvPr id="4" name="页脚占位符 3">
+            <a:extLst xmlns:a="http://schemas.openxmlformats.org/drawingml/2006/main">
+              <a:ext uri="{FF2B5EF4-FFF2-40B4-BE49-F238E27FC236}">
+                <a16:creationId xmlns:a16="http://schemas.microsoft.com/office/drawing/2014/main" id="{374904B4-02D6-45E1-BC08-689A64BD66F6}"/>
+              </a:ext>
+            </a:extLst>
+          </p:cNvPr>
+          <p:cNvSpPr>
+            <a:spLocks xmlns:a="http://schemas.openxmlformats.org/drawingml/2006/main" noGrp="1"/>
+          </p:cNvSpPr>
+          <p:nvPr>
+            <p:ph type="ftr" idx="11"/>
+          </p:nvPr>
+        </p:nvSpPr>
+        <p:spPr/>
+        <p:txBody>
+          <a:bodyPr xmlns:a="http://schemas.openxmlformats.org/drawingml/2006/main"/>
+          <a:lstStyle xmlns:a="http://schemas.openxmlformats.org/drawingml/2006/main"/>
+          <a:p xmlns:a="http://schemas.openxmlformats.org/drawingml/2006/main">
+            <a:endParaRPr/>
+          </a:p>
+        </p:txBody>
+      </p:sp>
+      <p:sp>
+        <p:nvSpPr>
+          <p:cNvPr id="5" name="灯片编号占位符 4">
+            <a:extLst xmlns:a="http://schemas.openxmlformats.org/drawingml/2006/main">
+              <a:ext uri="{FF2B5EF4-FFF2-40B4-BE49-F238E27FC236}">
+                <a16:creationId xmlns:a16="http://schemas.microsoft.com/office/drawing/2014/main" id="{10DEF11F-7F1E-4217-8CC7-DF404533C3F8}"/>
+              </a:ext>
+            </a:extLst>
+          </p:cNvPr>
+          <p:cNvSpPr>
+            <a:spLocks xmlns:a="http://schemas.openxmlformats.org/drawingml/2006/main" noGrp="1"/>
+          </p:cNvSpPr>
+          <p:nvPr>
+            <p:ph type="sldNum" idx="12"/>
+          </p:nvPr>
+        </p:nvSpPr>
+        <p:spPr/>
+        <p:txBody>
+          <a:bodyPr xmlns:a="http://schemas.openxmlformats.org/drawingml/2006/main"/>
+          <a:lstStyle xmlns:a="http://schemas.openxmlformats.org/drawingml/2006/main"/>
+          <a:p xmlns:a="http://schemas.openxmlformats.org/drawingml/2006/main">
+            <a:fld id="{F60DD7EF-E908-4723-98EB-3DEAFF871F36}" type="slidenum">
+              <a:t>‹#›</a:t>
+            </a:fld>
+            <a:endParaRPr/>
+          </a:p>
+        </p:txBody>
+      </p:sp>
+    </p:spTree>
+  </p:cSld>
+</p:sldLayout>
+</file>
+
+<file path=ppt/slideLayouts/slideLayout7.xml><?xml version="1.0" encoding="utf-8"?>
+<p:sldLayout xmlns:p="http://schemas.openxmlformats.org/presentationml/2006/main" type="blank" preserve="1">
+  <p:cSld name="空白">
+    <p:spTree>
+      <p:nvGrpSpPr>
+        <p:cNvPr id="1" name=""/>
+        <p:cNvGrpSpPr/>
+        <p:nvPr/>
+      </p:nvGrpSpPr>
+      <p:grpSpPr>
+        <a:xfrm xmlns:a="http://schemas.openxmlformats.org/drawingml/2006/main"/>
+      </p:grpSpPr>
+      <p:sp>
+        <p:nvSpPr>
+          <p:cNvPr id="2" name="日期占位符 1">
+            <a:extLst xmlns:a="http://schemas.openxmlformats.org/drawingml/2006/main">
+              <a:ext uri="{FF2B5EF4-FFF2-40B4-BE49-F238E27FC236}">
+                <a16:creationId xmlns:a16="http://schemas.microsoft.com/office/drawing/2014/main" id="{77C40515-429F-4416-B503-699E02A64E36}"/>
+              </a:ext>
+            </a:extLst>
+          </p:cNvPr>
+          <p:cNvSpPr>
+            <a:spLocks xmlns:a="http://schemas.openxmlformats.org/drawingml/2006/main" noGrp="1"/>
+          </p:cNvSpPr>
+          <p:nvPr>
+            <p:ph type="dt" idx="10"/>
+          </p:nvPr>
+        </p:nvSpPr>
+        <p:spPr/>
+        <p:txBody>
+          <a:bodyPr xmlns:a="http://schemas.openxmlformats.org/drawingml/2006/main"/>
+          <a:lstStyle xmlns:a="http://schemas.openxmlformats.org/drawingml/2006/main"/>
+          <a:p xmlns:a="http://schemas.openxmlformats.org/drawingml/2006/main">
+            <a:fld id="{9F4852F6-D0EE-43FF-9758-4449F4064C7C}" type="datetimeFigureOut">
+              <a:t>2026/8/8</a:t>
+            </a:fld>
+            <a:endParaRPr/>
+          </a:p>
+        </p:txBody>
+      </p:sp>
+      <p:sp>
+        <p:nvSpPr>
+          <p:cNvPr id="3" name="页脚占位符 2">
+            <a:extLst xmlns:a="http://schemas.openxmlformats.org/drawingml/2006/main">
+              <a:ext uri="{FF2B5EF4-FFF2-40B4-BE49-F238E27FC236}">
+                <a16:creationId xmlns:a16="http://schemas.microsoft.com/office/drawing/2014/main" id="{73758940-0518-4887-8D17-E98BA24C866E}"/>
+              </a:ext>
+            </a:extLst>
+          </p:cNvPr>
+          <p:cNvSpPr>
+            <a:spLocks xmlns:a="http://schemas.openxmlformats.org/drawingml/2006/main" noGrp="1"/>
+          </p:cNvSpPr>
+          <p:nvPr>
+            <p:ph type="ftr" idx="11"/>
+          </p:nvPr>
+        </p:nvSpPr>
+        <p:spPr/>
+        <p:txBody>
+          <a:bodyPr xmlns:a="http://schemas.openxmlformats.org/drawingml/2006/main"/>
+          <a:lstStyle xmlns:a="http://schemas.openxmlformats.org/drawingml/2006/main"/>
+          <a:p xmlns:a="http://schemas.openxmlformats.org/drawingml/2006/main">
+            <a:endParaRPr/>
+          </a:p>
+        </p:txBody>
+      </p:sp>
+      <p:sp>
+        <p:nvSpPr>
+          <p:cNvPr id="4" name="灯片编号占位符 3">
+            <a:extLst xmlns:a="http://schemas.openxmlformats.org/drawingml/2006/main">
+              <a:ext uri="{FF2B5EF4-FFF2-40B4-BE49-F238E27FC236}">
+                <a16:creationId xmlns:a16="http://schemas.microsoft.com/office/drawing/2014/main" id="{5401F09F-57E1-46F7-80CC-6624F652BFEB}"/>
+              </a:ext>
+            </a:extLst>
+          </p:cNvPr>
+          <p:cNvSpPr>
+            <a:spLocks xmlns:a="http://schemas.openxmlformats.org/drawingml/2006/main" noGrp="1"/>
+          </p:cNvSpPr>
+          <p:nvPr>
+            <p:ph type="sldNum" idx="12"/>
+          </p:nvPr>
+        </p:nvSpPr>
+        <p:spPr/>
+        <p:txBody>
+          <a:bodyPr xmlns:a="http://schemas.openxmlformats.org/drawingml/2006/main"/>
+          <a:lstStyle xmlns:a="http://schemas.openxmlformats.org/drawingml/2006/main"/>
+          <a:p xmlns:a="http://schemas.openxmlformats.org/drawingml/2006/main">
+            <a:fld id="{F60DD7EF-E908-4723-98EB-3DEAFF871F36}" type="slidenum">
+              <a:t>‹#›</a:t>
+            </a:fld>
+            <a:endParaRPr/>
+          </a:p>
+        </p:txBody>
+      </p:sp>
+    </p:spTree>
+  </p:cSld>
+</p:sldLayout>
+</file>
+
+<file path=ppt/slideLayouts/slideLayout8.xml><?xml version="1.0" encoding="utf-8"?>
+<p:sldLayout xmlns:p="http://schemas.openxmlformats.org/presentationml/2006/main" type="objTx" preserve="1">
+  <p:cSld name="内容与标题">
+    <p:spTree>
+      <p:nvGrpSpPr>
+        <p:cNvPr id="1" name=""/>
+        <p:cNvGrpSpPr/>
+        <p:nvPr/>
+      </p:nvGrpSpPr>
+      <p:grpSpPr>
+        <a:xfrm xmlns:a="http://schemas.openxmlformats.org/drawingml/2006/main"/>
+      </p:grpSpPr>
+      <p:sp>
+        <p:nvSpPr>
+          <p:cNvPr id="2" name="标题 1">
+            <a:extLst xmlns:a="http://schemas.openxmlformats.org/drawingml/2006/main">
+              <a:ext uri="{FF2B5EF4-FFF2-40B4-BE49-F238E27FC236}">
+                <a16:creationId xmlns:a16="http://schemas.microsoft.com/office/drawing/2014/main" id="{E2CBB853-1DA9-459D-BC79-FD0C6DE41F79}"/>
+              </a:ext>
+            </a:extLst>
+          </p:cNvPr>
+          <p:cNvSpPr>
+            <a:spLocks xmlns:a="http://schemas.openxmlformats.org/drawingml/2006/main" noGrp="1"/>
+          </p:cNvSpPr>
+          <p:nvPr>
+            <p:ph type="title" idx="0"/>
+          </p:nvPr>
+        </p:nvSpPr>
+        <p:spPr>
+          <a:xfrm xmlns:a="http://schemas.openxmlformats.org/drawingml/2006/main">
+            <a:off x="839788" y="457200"/>
+            <a:ext cx="3932237" cy="1600200"/>
+          </a:xfrm>
+        </p:spPr>
+        <p:txBody>
+          <a:bodyPr xmlns:a="http://schemas.openxmlformats.org/drawingml/2006/main" anchor="b"/>
+          <a:lstStyle xmlns:a="http://schemas.openxmlformats.org/drawingml/2006/main">
+            <a:lvl1pPr>
+              <a:buNone/>
+              <a:defRPr sz="3200"/>
+            </a:lvl1pPr>
+          </a:lstStyle>
+          <a:p xmlns:a="http://schemas.openxmlformats.org/drawingml/2006/main">
+            <a:r>
+              <a:t>单击此处编辑母版标题样式</a:t>
+            </a:r>
+          </a:p>
+        </p:txBody>
+      </p:sp>
+      <p:sp>
+        <p:nvSpPr>
+          <p:cNvPr id="3" name="内容占位符 2">
+            <a:extLst xmlns:a="http://schemas.openxmlformats.org/drawingml/2006/main">
+              <a:ext uri="{FF2B5EF4-FFF2-40B4-BE49-F238E27FC236}">
+                <a16:creationId xmlns:a16="http://schemas.microsoft.com/office/drawing/2014/main" id="{B040FC84-B276-4DD0-99A8-B5CCC964A19B}"/>
+              </a:ext>
+            </a:extLst>
+          </p:cNvPr>
+          <p:cNvSpPr>
+            <a:spLocks xmlns:a="http://schemas.openxmlformats.org/drawingml/2006/main" noGrp="1"/>
+          </p:cNvSpPr>
+          <p:nvPr>
+            <p:ph idx="1"/>
+          </p:nvPr>
+        </p:nvSpPr>
+        <p:spPr>
+          <a:xfrm xmlns:a="http://schemas.openxmlformats.org/drawingml/2006/main">
+            <a:off x="5183188" y="987425"/>
+            <a:ext cx="6172200" cy="4873625"/>
+          </a:xfrm>
+        </p:spPr>
+        <p:txBody>
+          <a:bodyPr xmlns:a="http://schemas.openxmlformats.org/drawingml/2006/main"/>
+          <a:lstStyle xmlns:a="http://schemas.openxmlformats.org/drawingml/2006/main">
+            <a:lvl1pPr>
+              <a:buNone/>
+              <a:defRPr sz="3200"/>
+            </a:lvl1pPr>
+            <a:lvl2pPr>
+              <a:buNone/>
+              <a:defRPr sz="2800"/>
+            </a:lvl2pPr>
+            <a:lvl3pPr>
+              <a:buNone/>
+              <a:defRPr sz="2400"/>
+            </a:lvl3pPr>
+            <a:lvl4pPr>
+              <a:buNone/>
+              <a:defRPr sz="2000"/>
+            </a:lvl4pPr>
+            <a:lvl5pPr>
+              <a:buNone/>
+              <a:defRPr sz="2000"/>
+            </a:lvl5pPr>
+            <a:lvl6pPr>
+              <a:buNone/>
+              <a:defRPr sz="2000"/>
+            </a:lvl6pPr>
+            <a:lvl7pPr>
+              <a:buNone/>
+              <a:defRPr sz="2000"/>
+            </a:lvl7pPr>
+            <a:lvl8pPr>
+              <a:buNone/>
+              <a:defRPr sz="2000"/>
+            </a:lvl8pPr>
+            <a:lvl9pPr>
+              <a:buNone/>
+              <a:defRPr sz="2000"/>
+            </a:lvl9pPr>
+          </a:lstStyle>
+          <a:p xmlns:a="http://schemas.openxmlformats.org/drawingml/2006/main">
+            <a:pPr lvl="0">
+              <a:buNone/>
+            </a:pPr>
+            <a:r>
+              <a:t>单击此处编辑母版文本样式</a:t>
+            </a:r>
+          </a:p>
+          <a:p xmlns:a="http://schemas.openxmlformats.org/drawingml/2006/main">
+            <a:pPr lvl="1">
+              <a:buNone/>
+            </a:pPr>
+            <a:r>
+              <a:t>二级</a:t>
+            </a:r>
+          </a:p>
+          <a:p xmlns:a="http://schemas.openxmlformats.org/drawingml/2006/main">
+            <a:pPr lvl="2">
+              <a:buNone/>
+            </a:pPr>
+            <a:r>
+              <a:t>三级</a:t>
+            </a:r>
+          </a:p>
+          <a:p xmlns:a="http://schemas.openxmlformats.org/drawingml/2006/main">
+            <a:pPr lvl="3">
+              <a:buNone/>
+            </a:pPr>
+            <a:r>
+              <a:t>四级</a:t>
+            </a:r>
+          </a:p>
+          <a:p xmlns:a="http://schemas.openxmlformats.org/drawingml/2006/main">
+            <a:pPr lvl="4">
+              <a:buNone/>
+            </a:pPr>
+            <a:r>
+              <a:t>五级</a:t>
+            </a:r>
+          </a:p>
+        </p:txBody>
+      </p:sp>
+      <p:sp>
+        <p:nvSpPr>
+          <p:cNvPr id="4" name="文本占位符 3">
+            <a:extLst xmlns:a="http://schemas.openxmlformats.org/drawingml/2006/main">
+              <a:ext uri="{FF2B5EF4-FFF2-40B4-BE49-F238E27FC236}">
+                <a16:creationId xmlns:a16="http://schemas.microsoft.com/office/drawing/2014/main" id="{CCCC4875-3F26-47EB-8DE1-DC1A78F39E52}"/>
+              </a:ext>
+            </a:extLst>
+          </p:cNvPr>
+          <p:cNvSpPr>
+            <a:spLocks xmlns:a="http://schemas.openxmlformats.org/drawingml/2006/main" noGrp="1"/>
+          </p:cNvSpPr>
+          <p:nvPr>
+            <p:ph type="body" idx="2"/>
+          </p:nvPr>
+        </p:nvSpPr>
+        <p:spPr>
+          <a:xfrm xmlns:a="http://schemas.openxmlformats.org/drawingml/2006/main">
+            <a:off x="839788" y="2057400"/>
+            <a:ext cx="3932237" cy="3811588"/>
+          </a:xfrm>
+        </p:spPr>
+        <p:txBody>
+          <a:bodyPr xmlns:a="http://schemas.openxmlformats.org/drawingml/2006/main"/>
+          <a:lstStyle xmlns:a="http://schemas.openxmlformats.org/drawingml/2006/main">
+            <a:lvl1pPr marL="0" indent="0">
+              <a:buNone/>
+              <a:defRPr sz="1600"/>
+            </a:lvl1pPr>
+            <a:lvl2pPr marL="457200" indent="0">
+              <a:buNone/>
+              <a:defRPr sz="1400"/>
+            </a:lvl2pPr>
+            <a:lvl3pPr marL="914400" indent="0">
+              <a:buNone/>
+              <a:defRPr sz="1200"/>
+            </a:lvl3pPr>
+            <a:lvl4pPr marL="1371600" indent="0">
+              <a:buNone/>
+              <a:defRPr sz="1000"/>
+            </a:lvl4pPr>
+            <a:lvl5pPr marL="1828800" indent="0">
+              <a:buNone/>
+              <a:defRPr sz="1000"/>
+            </a:lvl5pPr>
+            <a:lvl6pPr marL="2286000" indent="0">
+              <a:buNone/>
+              <a:defRPr sz="1000"/>
+            </a:lvl6pPr>
+            <a:lvl7pPr marL="2743200" indent="0">
+              <a:buNone/>
+              <a:defRPr sz="1000"/>
+            </a:lvl7pPr>
+            <a:lvl8pPr marL="3200400" indent="0">
+              <a:buNone/>
+              <a:defRPr sz="1000"/>
+            </a:lvl8pPr>
+            <a:lvl9pPr marL="3657600" indent="0">
+              <a:buNone/>
+              <a:defRPr sz="1000"/>
+            </a:lvl9pPr>
+          </a:lstStyle>
+          <a:p xmlns:a="http://schemas.openxmlformats.org/drawingml/2006/main">
+            <a:pPr lvl="0">
+              <a:buNone/>
+            </a:pPr>
+            <a:r>
+              <a:t>单击此处编辑母版文本样式</a:t>
+            </a:r>
+          </a:p>
+        </p:txBody>
+      </p:sp>
+      <p:sp>
+        <p:nvSpPr>
+          <p:cNvPr id="5" name="日期占位符 4">
+            <a:extLst xmlns:a="http://schemas.openxmlformats.org/drawingml/2006/main">
+              <a:ext uri="{FF2B5EF4-FFF2-40B4-BE49-F238E27FC236}">
+                <a16:creationId xmlns:a16="http://schemas.microsoft.com/office/drawing/2014/main" id="{62ADC1BD-49BC-4617-94DD-E17E461723E2}"/>
+              </a:ext>
+            </a:extLst>
+          </p:cNvPr>
+          <p:cNvSpPr>
+            <a:spLocks xmlns:a="http://schemas.openxmlformats.org/drawingml/2006/main" noGrp="1"/>
+          </p:cNvSpPr>
+          <p:nvPr>
+            <p:ph type="dt" idx="10"/>
+          </p:nvPr>
+        </p:nvSpPr>
+        <p:spPr/>
+        <p:txBody>
+          <a:bodyPr xmlns:a="http://schemas.openxmlformats.org/drawingml/2006/main"/>
+          <a:lstStyle xmlns:a="http://schemas.openxmlformats.org/drawingml/2006/main"/>
+          <a:p xmlns:a="http://schemas.openxmlformats.org/drawingml/2006/main">
+            <a:fld id="{9F4852F6-D0EE-43FF-9758-4449F4064C7C}" type="datetimeFigureOut">
+              <a:t>2026/8/8</a:t>
+            </a:fld>
+            <a:endParaRPr/>
+          </a:p>
+        </p:txBody>
+      </p:sp>
+      <p:sp>
+        <p:nvSpPr>
+          <p:cNvPr id="6" name="页脚占位符 5">
+            <a:extLst xmlns:a="http://schemas.openxmlformats.org/drawingml/2006/main">
+              <a:ext uri="{FF2B5EF4-FFF2-40B4-BE49-F238E27FC236}">
+                <a16:creationId xmlns:a16="http://schemas.microsoft.com/office/drawing/2014/main" id="{0AFF0A32-0376-4849-8C4D-3AFD16569F15}"/>
+              </a:ext>
+            </a:extLst>
+          </p:cNvPr>
+          <p:cNvSpPr>
+            <a:spLocks xmlns:a="http://schemas.openxmlformats.org/drawingml/2006/main" noGrp="1"/>
+          </p:cNvSpPr>
+          <p:nvPr>
+            <p:ph type="ftr" idx="11"/>
+          </p:nvPr>
+        </p:nvSpPr>
+        <p:spPr/>
+        <p:txBody>
+          <a:bodyPr xmlns:a="http://schemas.openxmlformats.org/drawingml/2006/main"/>
+          <a:lstStyle xmlns:a="http://schemas.openxmlformats.org/drawingml/2006/main"/>
+          <a:p xmlns:a="http://schemas.openxmlformats.org/drawingml/2006/main">
+            <a:endParaRPr/>
+          </a:p>
+        </p:txBody>
+      </p:sp>
+      <p:sp>
+        <p:nvSpPr>
+          <p:cNvPr id="7" name="灯片编号占位符 6">
+            <a:extLst xmlns:a="http://schemas.openxmlformats.org/drawingml/2006/main">
+              <a:ext uri="{FF2B5EF4-FFF2-40B4-BE49-F238E27FC236}">
+                <a16:creationId xmlns:a16="http://schemas.microsoft.com/office/drawing/2014/main" id="{8EAB2A01-AFDE-462D-8F86-C6B22C3F4718}"/>
+              </a:ext>
+            </a:extLst>
+          </p:cNvPr>
+          <p:cNvSpPr>
+            <a:spLocks xmlns:a="http://schemas.openxmlformats.org/drawingml/2006/main" noGrp="1"/>
+          </p:cNvSpPr>
+          <p:nvPr>
+            <p:ph type="sldNum" idx="12"/>
+          </p:nvPr>
+        </p:nvSpPr>
+        <p:spPr/>
+        <p:txBody>
+          <a:bodyPr xmlns:a="http://schemas.openxmlformats.org/drawingml/2006/main"/>
+          <a:lstStyle xmlns:a="http://schemas.openxmlformats.org/drawingml/2006/main"/>
+          <a:p xmlns:a="http://schemas.openxmlformats.org/drawingml/2006/main">
+            <a:fld id="{F60DD7EF-E908-4723-98EB-3DEAFF871F36}" type="slidenum">
+              <a:t>‹#›</a:t>
+            </a:fld>
+            <a:endParaRPr/>
+          </a:p>
+        </p:txBody>
+      </p:sp>
+    </p:spTree>
+  </p:cSld>
+</p:sldLayout>
+</file>
+
+<file path=ppt/slideLayouts/slideLayout9.xml><?xml version="1.0" encoding="utf-8"?>
+<p:sldLayout xmlns:p="http://schemas.openxmlformats.org/presentationml/2006/main" type="picTx" preserve="1">
+  <p:cSld name="图片与标题">
+    <p:spTree>
+      <p:nvGrpSpPr>
+        <p:cNvPr id="1" name=""/>
+        <p:cNvGrpSpPr/>
+        <p:nvPr/>
+      </p:nvGrpSpPr>
+      <p:grpSpPr>
+        <a:xfrm xmlns:a="http://schemas.openxmlformats.org/drawingml/2006/main"/>
+      </p:grpSpPr>
+      <p:sp>
+        <p:nvSpPr>
+          <p:cNvPr id="2" name="标题 1">
+            <a:extLst xmlns:a="http://schemas.openxmlformats.org/drawingml/2006/main">
+              <a:ext uri="{FF2B5EF4-FFF2-40B4-BE49-F238E27FC236}">
+                <a16:creationId xmlns:a16="http://schemas.microsoft.com/office/drawing/2014/main" id="{F47B14B8-5BFA-457A-BF3A-B54DABFF23FD}"/>
+              </a:ext>
+            </a:extLst>
+          </p:cNvPr>
+          <p:cNvSpPr>
+            <a:spLocks xmlns:a="http://schemas.openxmlformats.org/drawingml/2006/main" noGrp="1"/>
+          </p:cNvSpPr>
+          <p:nvPr>
+            <p:ph type="title" idx="0"/>
+          </p:nvPr>
+        </p:nvSpPr>
+        <p:spPr>
+          <a:xfrm xmlns:a="http://schemas.openxmlformats.org/drawingml/2006/main">
+            <a:off x="839788" y="457200"/>
+            <a:ext cx="3932237" cy="1600200"/>
+          </a:xfrm>
+        </p:spPr>
+        <p:txBody>
+          <a:bodyPr xmlns:a="http://schemas.openxmlformats.org/drawingml/2006/main" anchor="b"/>
+          <a:lstStyle xmlns:a="http://schemas.openxmlformats.org/drawingml/2006/main">
+            <a:lvl1pPr>
+              <a:buNone/>
+              <a:defRPr sz="3200"/>
+            </a:lvl1pPr>
+          </a:lstStyle>
+          <a:p xmlns:a="http://schemas.openxmlformats.org/drawingml/2006/main">
+            <a:r>
+              <a:t>单击此处编辑母版标题样式</a:t>
+            </a:r>
+          </a:p>
+        </p:txBody>
+      </p:sp>
+      <p:sp>
+        <p:nvSpPr>
+          <p:cNvPr id="3" name="图片占位符 2">
+            <a:extLst xmlns:a="http://schemas.openxmlformats.org/drawingml/2006/main">
+              <a:ext uri="{FF2B5EF4-FFF2-40B4-BE49-F238E27FC236}">
+                <a16:creationId xmlns:a16="http://schemas.microsoft.com/office/drawing/2014/main" id="{163062AA-DA77-45F0-B8DB-7A38D82590AB}"/>
+              </a:ext>
+            </a:extLst>
+          </p:cNvPr>
+          <p:cNvSpPr>
+            <a:spLocks xmlns:a="http://schemas.openxmlformats.org/drawingml/2006/main" noGrp="1"/>
+          </p:cNvSpPr>
+          <p:nvPr>
+            <p:ph type="pic" idx="1"/>
+          </p:nvPr>
+        </p:nvSpPr>
+        <p:spPr>
+          <a:xfrm xmlns:a="http://schemas.openxmlformats.org/drawingml/2006/main">
+            <a:off x="5183188" y="987425"/>
+            <a:ext cx="6172200" cy="4873625"/>
+          </a:xfrm>
+        </p:spPr>
+        <p:txBody>
+          <a:bodyPr xmlns:a="http://schemas.openxmlformats.org/drawingml/2006/main"/>
+          <a:lstStyle xmlns:a="http://schemas.openxmlformats.org/drawingml/2006/main">
+            <a:lvl1pPr marL="0" indent="0">
+              <a:buNone/>
+              <a:defRPr sz="3200"/>
+            </a:lvl1pPr>
+            <a:lvl2pPr marL="457200" indent="0">
+              <a:buNone/>
+              <a:defRPr sz="2800"/>
+            </a:lvl2pPr>
+            <a:lvl3pPr marL="914400" indent="0">
+              <a:buNone/>
+              <a:defRPr sz="2400"/>
+            </a:lvl3pPr>
+            <a:lvl4pPr marL="1371600" indent="0">
+              <a:buNone/>
+              <a:defRPr sz="2000"/>
+            </a:lvl4pPr>
+            <a:lvl5pPr marL="1828800" indent="0">
+              <a:buNone/>
+              <a:defRPr sz="2000"/>
+            </a:lvl5pPr>
+            <a:lvl6pPr marL="2286000" indent="0">
+              <a:buNone/>
+              <a:defRPr sz="2000"/>
+            </a:lvl6pPr>
+            <a:lvl7pPr marL="2743200" indent="0">
+              <a:buNone/>
+              <a:defRPr sz="2000"/>
+            </a:lvl7pPr>
+            <a:lvl8pPr marL="3200400" indent="0">
+              <a:buNone/>
+              <a:defRPr sz="2000"/>
+            </a:lvl8pPr>
+            <a:lvl9pPr marL="3657600" indent="0">
+              <a:buNone/>
+              <a:defRPr sz="2000"/>
+            </a:lvl9pPr>
+          </a:lstStyle>
+          <a:p xmlns:a="http://schemas.openxmlformats.org/drawingml/2006/main">
+            <a:endParaRPr/>
+          </a:p>
+        </p:txBody>
+      </p:sp>
+      <p:sp>
+        <p:nvSpPr>
+          <p:cNvPr id="4" name="文本占位符 3">
+            <a:extLst xmlns:a="http://schemas.openxmlformats.org/drawingml/2006/main">
+              <a:ext uri="{FF2B5EF4-FFF2-40B4-BE49-F238E27FC236}">
+                <a16:creationId xmlns:a16="http://schemas.microsoft.com/office/drawing/2014/main" id="{CC1B3C59-37B5-430B-A29A-9241204EF3E3}"/>
+              </a:ext>
+            </a:extLst>
+          </p:cNvPr>
+          <p:cNvSpPr>
+            <a:spLocks xmlns:a="http://schemas.openxmlformats.org/drawingml/2006/main" noGrp="1"/>
+          </p:cNvSpPr>
+          <p:nvPr>
+            <p:ph type="body" idx="2"/>
+          </p:nvPr>
+        </p:nvSpPr>
+        <p:spPr>
+          <a:xfrm xmlns:a="http://schemas.openxmlformats.org/drawingml/2006/main">
+            <a:off x="839788" y="2057400"/>
+            <a:ext cx="3932237" cy="3811588"/>
+          </a:xfrm>
+        </p:spPr>
+        <p:txBody>
+          <a:bodyPr xmlns:a="http://schemas.openxmlformats.org/drawingml/2006/main"/>
+          <a:lstStyle xmlns:a="http://schemas.openxmlformats.org/drawingml/2006/main">
+            <a:lvl1pPr marL="0" indent="0">
+              <a:buNone/>
+              <a:defRPr sz="1600"/>
+            </a:lvl1pPr>
+            <a:lvl2pPr marL="457200" indent="0">
+              <a:buNone/>
+              <a:defRPr sz="1400"/>
+            </a:lvl2pPr>
+            <a:lvl3pPr marL="914400" indent="0">
+              <a:buNone/>
+              <a:defRPr sz="1200"/>
+            </a:lvl3pPr>
+            <a:lvl4pPr marL="1371600" indent="0">
+              <a:buNone/>
+              <a:defRPr sz="1000"/>
+            </a:lvl4pPr>
+            <a:lvl5pPr marL="1828800" indent="0">
+              <a:buNone/>
+              <a:defRPr sz="1000"/>
+            </a:lvl5pPr>
+            <a:lvl6pPr marL="2286000" indent="0">
+              <a:buNone/>
+              <a:defRPr sz="1000"/>
+            </a:lvl6pPr>
+            <a:lvl7pPr marL="2743200" indent="0">
+              <a:buNone/>
+              <a:defRPr sz="1000"/>
+            </a:lvl7pPr>
+            <a:lvl8pPr marL="3200400" indent="0">
+              <a:buNone/>
+              <a:defRPr sz="1000"/>
+            </a:lvl8pPr>
+            <a:lvl9pPr marL="3657600" indent="0">
+              <a:buNone/>
+              <a:defRPr sz="1000"/>
+            </a:lvl9pPr>
+          </a:lstStyle>
+          <a:p xmlns:a="http://schemas.openxmlformats.org/drawingml/2006/main">
+            <a:pPr lvl="0">
+              <a:buNone/>
+            </a:pPr>
+            <a:r>
+              <a:t>单击此处编辑母版文本样式</a:t>
+            </a:r>
+          </a:p>
+        </p:txBody>
+      </p:sp>
+      <p:sp>
+        <p:nvSpPr>
+          <p:cNvPr id="5" name="日期占位符 4">
+            <a:extLst xmlns:a="http://schemas.openxmlformats.org/drawingml/2006/main">
+              <a:ext uri="{FF2B5EF4-FFF2-40B4-BE49-F238E27FC236}">
+                <a16:creationId xmlns:a16="http://schemas.microsoft.com/office/drawing/2014/main" id="{B89C033C-01FC-44B5-8672-3C621F5E2B33}"/>
+              </a:ext>
+            </a:extLst>
+          </p:cNvPr>
+          <p:cNvSpPr>
+            <a:spLocks xmlns:a="http://schemas.openxmlformats.org/drawingml/2006/main" noGrp="1"/>
+          </p:cNvSpPr>
+          <p:nvPr>
+            <p:ph type="dt" idx="10"/>
+          </p:nvPr>
+        </p:nvSpPr>
+        <p:spPr/>
+        <p:txBody>
+          <a:bodyPr xmlns:a="http://schemas.openxmlformats.org/drawingml/2006/main"/>
+          <a:lstStyle xmlns:a="http://schemas.openxmlformats.org/drawingml/2006/main"/>
+          <a:p xmlns:a="http://schemas.openxmlformats.org/drawingml/2006/main">
+            <a:fld id="{9F4852F6-D0EE-43FF-9758-4449F4064C7C}" type="datetimeFigureOut">
+              <a:t>2026/8/8</a:t>
+            </a:fld>
+            <a:endParaRPr/>
+          </a:p>
+        </p:txBody>
+      </p:sp>
+      <p:sp>
+        <p:nvSpPr>
+          <p:cNvPr id="6" name="页脚占位符 5">
+            <a:extLst xmlns:a="http://schemas.openxmlformats.org/drawingml/2006/main">
+              <a:ext uri="{FF2B5EF4-FFF2-40B4-BE49-F238E27FC236}">
+                <a16:creationId xmlns:a16="http://schemas.microsoft.com/office/drawing/2014/main" id="{39D56847-625C-4964-AB64-246C5CD92D17}"/>
+              </a:ext>
+            </a:extLst>
+          </p:cNvPr>
+          <p:cNvSpPr>
+            <a:spLocks xmlns:a="http://schemas.openxmlformats.org/drawingml/2006/main" noGrp="1"/>
+          </p:cNvSpPr>
+          <p:nvPr>
+            <p:ph type="ftr" idx="11"/>
+          </p:nvPr>
+        </p:nvSpPr>
+        <p:spPr/>
+        <p:txBody>
+          <a:bodyPr xmlns:a="http://schemas.openxmlformats.org/drawingml/2006/main"/>
+          <a:lstStyle xmlns:a="http://schemas.openxmlformats.org/drawingml/2006/main"/>
+          <a:p xmlns:a="http://schemas.openxmlformats.org/drawingml/2006/main">
+            <a:endParaRPr/>
+          </a:p>
+        </p:txBody>
+      </p:sp>
+      <p:sp>
+        <p:nvSpPr>
+          <p:cNvPr id="7" name="灯片编号占位符 6">
+            <a:extLst xmlns:a="http://schemas.openxmlformats.org/drawingml/2006/main">
+              <a:ext uri="{FF2B5EF4-FFF2-40B4-BE49-F238E27FC236}">
+                <a16:creationId xmlns:a16="http://schemas.microsoft.com/office/drawing/2014/main" id="{AD9C350E-B4AF-464E-A86A-B69CE7AFDE34}"/>
+              </a:ext>
+            </a:extLst>
+          </p:cNvPr>
+          <p:cNvSpPr>
+            <a:spLocks xmlns:a="http://schemas.openxmlformats.org/drawingml/2006/main" noGrp="1"/>
+          </p:cNvSpPr>
+          <p:nvPr>
+            <p:ph type="sldNum" idx="12"/>
+          </p:nvPr>
+        </p:nvSpPr>
+        <p:spPr/>
+        <p:txBody>
+          <a:bodyPr xmlns:a="http://schemas.openxmlformats.org/drawingml/2006/main"/>
+          <a:lstStyle xmlns:a="http://schemas.openxmlformats.org/drawingml/2006/main"/>
+          <a:p xmlns:a="http://schemas.openxmlformats.org/drawingml/2006/main">
+            <a:fld id="{F60DD7EF-E908-4723-98EB-3DEAFF871F36}" type="slidenum">
+              <a:t>‹#›</a:t>
+            </a:fld>
+            <a:endParaRPr/>
+          </a:p>
+        </p:txBody>
+      </p:sp>
+    </p:spTree>
+  </p:cSld>
+</p:sldLayout>
+</file>
+
 <file path=ppt/slideMasters/slideMaster1.xml><?xml version="1.0" encoding="utf-8"?>
 <p:sldMaster xmlns:p="http://schemas.openxmlformats.org/presentationml/2006/main">
-  <p:cSld name="Master">
+  <p:cSld>
     <p:bg>
       <p:bgRef idx="1001">
         <a:schemeClr xmlns:a="http://schemas.openxmlformats.org/drawingml/2006/main" val="bg1"/>
@@ -502,23 +3616,280 @@
       <p:grpSpPr>
         <a:xfrm xmlns:a="http://schemas.openxmlformats.org/drawingml/2006/main"/>
       </p:grpSpPr>
+      <p:sp>
+        <p:nvSpPr>
+          <p:cNvPr id="2" name="标题占位符 1">
+            <a:extLst xmlns:a="http://schemas.openxmlformats.org/drawingml/2006/main">
+              <a:ext uri="{FF2B5EF4-FFF2-40B4-BE49-F238E27FC236}">
+                <a16:creationId xmlns:a16="http://schemas.microsoft.com/office/drawing/2014/main" id="{443A70AB-23B6-4E3A-BE9A-1ADEE639298E}"/>
+              </a:ext>
+            </a:extLst>
+          </p:cNvPr>
+          <p:cNvSpPr>
+            <a:spLocks xmlns:a="http://schemas.openxmlformats.org/drawingml/2006/main" noGrp="1"/>
+          </p:cNvSpPr>
+          <p:nvPr>
+            <p:ph type="title" idx="0"/>
+          </p:nvPr>
+        </p:nvSpPr>
+        <p:spPr>
+          <a:xfrm xmlns:a="http://schemas.openxmlformats.org/drawingml/2006/main">
+            <a:off x="838200" y="365125"/>
+            <a:ext cx="10515600" cy="1325563"/>
+          </a:xfrm>
+          <a:prstGeom xmlns:a="http://schemas.openxmlformats.org/drawingml/2006/main" prst="rect">
+            <a:avLst/>
+          </a:prstGeom>
+        </p:spPr>
+        <p:txBody>
+          <a:bodyPr xmlns:a="http://schemas.openxmlformats.org/drawingml/2006/main" vert="horz" lIns="91440" tIns="45720" rIns="91440" bIns="45720" anchor="ctr">
+            <a:normAutofit/>
+          </a:bodyPr>
+          <a:lstStyle xmlns:a="http://schemas.openxmlformats.org/drawingml/2006/main"/>
+          <a:p xmlns:a="http://schemas.openxmlformats.org/drawingml/2006/main">
+            <a:r>
+              <a:t>单击此处编辑母版标题样式</a:t>
+            </a:r>
+          </a:p>
+        </p:txBody>
+      </p:sp>
+      <p:sp>
+        <p:nvSpPr>
+          <p:cNvPr id="3" name="文本占位符 2">
+            <a:extLst xmlns:a="http://schemas.openxmlformats.org/drawingml/2006/main">
+              <a:ext uri="{FF2B5EF4-FFF2-40B4-BE49-F238E27FC236}">
+                <a16:creationId xmlns:a16="http://schemas.microsoft.com/office/drawing/2014/main" id="{20201AFD-D46B-40EE-A238-2613F7775975}"/>
+              </a:ext>
+            </a:extLst>
+          </p:cNvPr>
+          <p:cNvSpPr>
+            <a:spLocks xmlns:a="http://schemas.openxmlformats.org/drawingml/2006/main" noGrp="1"/>
+          </p:cNvSpPr>
+          <p:nvPr>
+            <p:ph type="body" idx="1"/>
+          </p:nvPr>
+        </p:nvSpPr>
+        <p:spPr>
+          <a:xfrm xmlns:a="http://schemas.openxmlformats.org/drawingml/2006/main">
+            <a:off x="838200" y="1825625"/>
+            <a:ext cx="10515600" cy="4351338"/>
+          </a:xfrm>
+          <a:prstGeom xmlns:a="http://schemas.openxmlformats.org/drawingml/2006/main" prst="rect">
+            <a:avLst/>
+          </a:prstGeom>
+        </p:spPr>
+        <p:txBody>
+          <a:bodyPr xmlns:a="http://schemas.openxmlformats.org/drawingml/2006/main" vert="horz" lIns="91440" tIns="45720" rIns="91440" bIns="45720">
+            <a:normAutofit/>
+          </a:bodyPr>
+          <a:lstStyle xmlns:a="http://schemas.openxmlformats.org/drawingml/2006/main"/>
+          <a:p xmlns:a="http://schemas.openxmlformats.org/drawingml/2006/main">
+            <a:pPr lvl="0">
+              <a:buNone/>
+            </a:pPr>
+            <a:r>
+              <a:t>单击此处编辑母版文本样式</a:t>
+            </a:r>
+          </a:p>
+          <a:p xmlns:a="http://schemas.openxmlformats.org/drawingml/2006/main">
+            <a:pPr lvl="1">
+              <a:buNone/>
+            </a:pPr>
+            <a:r>
+              <a:t>二级</a:t>
+            </a:r>
+          </a:p>
+          <a:p xmlns:a="http://schemas.openxmlformats.org/drawingml/2006/main">
+            <a:pPr lvl="2">
+              <a:buNone/>
+            </a:pPr>
+            <a:r>
+              <a:t>三级</a:t>
+            </a:r>
+          </a:p>
+          <a:p xmlns:a="http://schemas.openxmlformats.org/drawingml/2006/main">
+            <a:pPr lvl="3">
+              <a:buNone/>
+            </a:pPr>
+            <a:r>
+              <a:t>四级</a:t>
+            </a:r>
+          </a:p>
+          <a:p xmlns:a="http://schemas.openxmlformats.org/drawingml/2006/main">
+            <a:pPr lvl="4">
+              <a:buNone/>
+            </a:pPr>
+            <a:r>
+              <a:t>五级</a:t>
+            </a:r>
+          </a:p>
+        </p:txBody>
+      </p:sp>
+      <p:sp>
+        <p:nvSpPr>
+          <p:cNvPr id="4" name="日期占位符 3">
+            <a:extLst xmlns:a="http://schemas.openxmlformats.org/drawingml/2006/main">
+              <a:ext uri="{FF2B5EF4-FFF2-40B4-BE49-F238E27FC236}">
+                <a16:creationId xmlns:a16="http://schemas.microsoft.com/office/drawing/2014/main" id="{51E10013-E327-4DB6-8C73-9204F518D54E}"/>
+              </a:ext>
+            </a:extLst>
+          </p:cNvPr>
+          <p:cNvSpPr>
+            <a:spLocks xmlns:a="http://schemas.openxmlformats.org/drawingml/2006/main" noGrp="1"/>
+          </p:cNvSpPr>
+          <p:nvPr>
+            <p:ph type="dt" idx="2"/>
+          </p:nvPr>
+        </p:nvSpPr>
+        <p:spPr>
+          <a:xfrm xmlns:a="http://schemas.openxmlformats.org/drawingml/2006/main">
+            <a:off x="838200" y="6356350"/>
+            <a:ext cx="2743200" cy="365125"/>
+          </a:xfrm>
+          <a:prstGeom xmlns:a="http://schemas.openxmlformats.org/drawingml/2006/main" prst="rect">
+            <a:avLst/>
+          </a:prstGeom>
+        </p:spPr>
+        <p:txBody>
+          <a:bodyPr xmlns:a="http://schemas.openxmlformats.org/drawingml/2006/main" vert="horz" lIns="91440" tIns="45720" rIns="91440" bIns="45720" anchor="ctr"/>
+          <a:lstStyle xmlns:a="http://schemas.openxmlformats.org/drawingml/2006/main">
+            <a:lvl1pPr algn="l">
+              <a:buNone/>
+              <a:defRPr sz="1200">
+                <a:solidFill>
+                  <a:schemeClr val="tx1">
+                    <a:tint val="75000"/>
+                  </a:schemeClr>
+                </a:solidFill>
+              </a:defRPr>
+            </a:lvl1pPr>
+          </a:lstStyle>
+          <a:p xmlns:a="http://schemas.openxmlformats.org/drawingml/2006/main">
+            <a:fld id="{9F4852F6-D0EE-43FF-9758-4449F4064C7C}" type="datetimeFigureOut">
+              <a:t>2026/8/8</a:t>
+            </a:fld>
+            <a:endParaRPr/>
+          </a:p>
+        </p:txBody>
+      </p:sp>
+      <p:sp>
+        <p:nvSpPr>
+          <p:cNvPr id="5" name="页脚占位符 4">
+            <a:extLst xmlns:a="http://schemas.openxmlformats.org/drawingml/2006/main">
+              <a:ext uri="{FF2B5EF4-FFF2-40B4-BE49-F238E27FC236}">
+                <a16:creationId xmlns:a16="http://schemas.microsoft.com/office/drawing/2014/main" id="{C499D8FD-215C-403B-A9CF-8EA73647FFDA}"/>
+              </a:ext>
+            </a:extLst>
+          </p:cNvPr>
+          <p:cNvSpPr>
+            <a:spLocks xmlns:a="http://schemas.openxmlformats.org/drawingml/2006/main" noGrp="1"/>
+          </p:cNvSpPr>
+          <p:nvPr>
+            <p:ph type="ftr" idx="3"/>
+          </p:nvPr>
+        </p:nvSpPr>
+        <p:spPr>
+          <a:xfrm xmlns:a="http://schemas.openxmlformats.org/drawingml/2006/main">
+            <a:off x="4038600" y="6356350"/>
+            <a:ext cx="4114800" cy="365125"/>
+          </a:xfrm>
+          <a:prstGeom xmlns:a="http://schemas.openxmlformats.org/drawingml/2006/main" prst="rect">
+            <a:avLst/>
+          </a:prstGeom>
+        </p:spPr>
+        <p:txBody>
+          <a:bodyPr xmlns:a="http://schemas.openxmlformats.org/drawingml/2006/main" vert="horz" lIns="91440" tIns="45720" rIns="91440" bIns="45720" anchor="ctr"/>
+          <a:lstStyle xmlns:a="http://schemas.openxmlformats.org/drawingml/2006/main">
+            <a:lvl1pPr algn="ctr">
+              <a:buNone/>
+              <a:defRPr sz="1200">
+                <a:solidFill>
+                  <a:schemeClr val="tx1">
+                    <a:tint val="75000"/>
+                  </a:schemeClr>
+                </a:solidFill>
+              </a:defRPr>
+            </a:lvl1pPr>
+          </a:lstStyle>
+          <a:p xmlns:a="http://schemas.openxmlformats.org/drawingml/2006/main">
+            <a:endParaRPr/>
+          </a:p>
+        </p:txBody>
+      </p:sp>
+      <p:sp>
+        <p:nvSpPr>
+          <p:cNvPr id="6" name="灯片编号占位符 5">
+            <a:extLst xmlns:a="http://schemas.openxmlformats.org/drawingml/2006/main">
+              <a:ext uri="{FF2B5EF4-FFF2-40B4-BE49-F238E27FC236}">
+                <a16:creationId xmlns:a16="http://schemas.microsoft.com/office/drawing/2014/main" id="{94D809B7-4D90-4FBF-8205-0D2EE229E60E}"/>
+              </a:ext>
+            </a:extLst>
+          </p:cNvPr>
+          <p:cNvSpPr>
+            <a:spLocks xmlns:a="http://schemas.openxmlformats.org/drawingml/2006/main" noGrp="1"/>
+          </p:cNvSpPr>
+          <p:nvPr>
+            <p:ph type="sldNum" idx="4"/>
+          </p:nvPr>
+        </p:nvSpPr>
+        <p:spPr>
+          <a:xfrm xmlns:a="http://schemas.openxmlformats.org/drawingml/2006/main">
+            <a:off x="8610600" y="6356350"/>
+            <a:ext cx="2743200" cy="365125"/>
+          </a:xfrm>
+          <a:prstGeom xmlns:a="http://schemas.openxmlformats.org/drawingml/2006/main" prst="rect">
+            <a:avLst/>
+          </a:prstGeom>
+        </p:spPr>
+        <p:txBody>
+          <a:bodyPr xmlns:a="http://schemas.openxmlformats.org/drawingml/2006/main" vert="horz" lIns="91440" tIns="45720" rIns="91440" bIns="45720" anchor="ctr"/>
+          <a:lstStyle xmlns:a="http://schemas.openxmlformats.org/drawingml/2006/main">
+            <a:lvl1pPr algn="r">
+              <a:buNone/>
+              <a:defRPr sz="1200">
+                <a:solidFill>
+                  <a:schemeClr val="tx1">
+                    <a:tint val="75000"/>
+                  </a:schemeClr>
+                </a:solidFill>
+              </a:defRPr>
+            </a:lvl1pPr>
+          </a:lstStyle>
+          <a:p xmlns:a="http://schemas.openxmlformats.org/drawingml/2006/main">
+            <a:fld id="{F60DD7EF-E908-4723-98EB-3DEAFF871F36}" type="slidenum">
+              <a:t>‹#›</a:t>
+            </a:fld>
+            <a:endParaRPr/>
+          </a:p>
+        </p:txBody>
+      </p:sp>
     </p:spTree>
   </p:cSld>
   <p:clrMap bg1="lt1" tx1="dk1" bg2="lt2" tx2="dk2" accent1="accent1" accent2="accent2" accent3="accent3" accent4="accent4" accent5="accent5" accent6="accent6" hlink="hlink" folHlink="folHlink"/>
   <p:sldLayoutIdLst>
-    <p:sldLayoutId xmlns:r="http://schemas.openxmlformats.org/officeDocument/2006/relationships" id="2147483649" r:id="R303b1f6ae8da4da2"/>
+    <p:sldLayoutId xmlns:r="http://schemas.openxmlformats.org/officeDocument/2006/relationships" id="2147483649" r:id="R611bf8f489e54930"/>
+    <p:sldLayoutId xmlns:r="http://schemas.openxmlformats.org/officeDocument/2006/relationships" id="2147483650" r:id="Rd07abc59b24e4f40"/>
+    <p:sldLayoutId xmlns:r="http://schemas.openxmlformats.org/officeDocument/2006/relationships" id="2147483651" r:id="Rfd4714690c964984"/>
+    <p:sldLayoutId xmlns:r="http://schemas.openxmlformats.org/officeDocument/2006/relationships" id="2147483652" r:id="R796cd265148b4d2c"/>
+    <p:sldLayoutId xmlns:r="http://schemas.openxmlformats.org/officeDocument/2006/relationships" id="2147483653" r:id="R4e84eaa493374f21"/>
+    <p:sldLayoutId xmlns:r="http://schemas.openxmlformats.org/officeDocument/2006/relationships" id="2147483654" r:id="R5e6e37c27de24492"/>
+    <p:sldLayoutId xmlns:r="http://schemas.openxmlformats.org/officeDocument/2006/relationships" id="2147483655" r:id="Rd3e81b2c64094f31"/>
+    <p:sldLayoutId xmlns:r="http://schemas.openxmlformats.org/officeDocument/2006/relationships" id="2147483656" r:id="R86b1bf082dbe459d"/>
+    <p:sldLayoutId xmlns:r="http://schemas.openxmlformats.org/officeDocument/2006/relationships" id="2147483657" r:id="Rc667b1eecfd348db"/>
+    <p:sldLayoutId xmlns:r="http://schemas.openxmlformats.org/officeDocument/2006/relationships" id="2147483658" r:id="R3471a0fbbad94fc3"/>
+    <p:sldLayoutId xmlns:r="http://schemas.openxmlformats.org/officeDocument/2006/relationships" id="2147483659" r:id="Rb5b096b35e28450c"/>
   </p:sldLayoutIdLst>
   <p:txStyles>
     <p:titleStyle>
-      <a:lvl1pPr xmlns:a="http://schemas.openxmlformats.org/drawingml/2006/main" algn="l">
+      <a:lvl1pPr xmlns:a="http://schemas.openxmlformats.org/drawingml/2006/main" algn="l" defTabSz="914400">
         <a:lnSpc>
           <a:spcPct val="90000"/>
         </a:lnSpc>
         <a:spcBef>
-          <a:spcPts val="0"/>
+          <a:spcPct val="0"/>
         </a:spcBef>
         <a:buNone/>
-        <a:defRPr sz="4400">
+        <a:defRPr sz="4400" kern="1200">
           <a:solidFill>
             <a:schemeClr val="tx1"/>
           </a:solidFill>
@@ -529,15 +3900,16 @@
       </a:lvl1pPr>
     </p:titleStyle>
     <p:bodyStyle>
-      <a:lvl1pPr xmlns:a="http://schemas.openxmlformats.org/drawingml/2006/main" marL="228600" indent="-228600" algn="l">
+      <a:lvl1pPr xmlns:a="http://schemas.openxmlformats.org/drawingml/2006/main" marL="228600" indent="-228600" algn="l" defTabSz="914400">
         <a:lnSpc>
           <a:spcPct val="90000"/>
         </a:lnSpc>
         <a:spcBef>
           <a:spcPts val="1000"/>
         </a:spcBef>
+        <a:buFont typeface="Arial"/>
         <a:buChar char="•"/>
-        <a:defRPr sz="2800">
+        <a:defRPr sz="2800" kern="1200">
           <a:solidFill>
             <a:schemeClr val="tx1"/>
           </a:solidFill>
@@ -546,15 +3918,16 @@
           <a:cs typeface="+mn-lt"/>
         </a:defRPr>
       </a:lvl1pPr>
-      <a:lvl2pPr xmlns:a="http://schemas.openxmlformats.org/drawingml/2006/main" marL="685800" indent="-228600" algn="l">
+      <a:lvl2pPr xmlns:a="http://schemas.openxmlformats.org/drawingml/2006/main" marL="685800" indent="-228600" algn="l" defTabSz="914400">
         <a:lnSpc>
           <a:spcPct val="90000"/>
         </a:lnSpc>
         <a:spcBef>
           <a:spcPts val="500"/>
         </a:spcBef>
+        <a:buFont typeface="Arial"/>
         <a:buChar char="•"/>
-        <a:defRPr sz="2400">
+        <a:defRPr sz="2400" kern="1200">
           <a:solidFill>
             <a:schemeClr val="tx1"/>
           </a:solidFill>
@@ -563,15 +3936,16 @@
           <a:cs typeface="+mn-lt"/>
         </a:defRPr>
       </a:lvl2pPr>
-      <a:lvl3pPr xmlns:a="http://schemas.openxmlformats.org/drawingml/2006/main" marL="1143000" indent="-228600" algn="l">
+      <a:lvl3pPr xmlns:a="http://schemas.openxmlformats.org/drawingml/2006/main" marL="1143000" indent="-228600" algn="l" defTabSz="914400">
         <a:lnSpc>
           <a:spcPct val="90000"/>
         </a:lnSpc>
         <a:spcBef>
           <a:spcPts val="500"/>
         </a:spcBef>
+        <a:buFont typeface="Arial"/>
         <a:buChar char="•"/>
-        <a:defRPr sz="2000">
+        <a:defRPr sz="2000" kern="1200">
           <a:solidFill>
             <a:schemeClr val="tx1"/>
           </a:solidFill>
@@ -580,15 +3954,16 @@
           <a:cs typeface="+mn-lt"/>
         </a:defRPr>
       </a:lvl3pPr>
-      <a:lvl4pPr xmlns:a="http://schemas.openxmlformats.org/drawingml/2006/main" marL="1600200" indent="-228600" algn="l">
+      <a:lvl4pPr xmlns:a="http://schemas.openxmlformats.org/drawingml/2006/main" marL="1600200" indent="-228600" algn="l" defTabSz="914400">
         <a:lnSpc>
           <a:spcPct val="90000"/>
         </a:lnSpc>
         <a:spcBef>
           <a:spcPts val="500"/>
         </a:spcBef>
+        <a:buFont typeface="Arial"/>
         <a:buChar char="•"/>
-        <a:defRPr sz="1800">
+        <a:defRPr sz="1800" kern="1200">
           <a:solidFill>
             <a:schemeClr val="tx1"/>
           </a:solidFill>
@@ -597,15 +3972,16 @@
           <a:cs typeface="+mn-lt"/>
         </a:defRPr>
       </a:lvl4pPr>
-      <a:lvl5pPr xmlns:a="http://schemas.openxmlformats.org/drawingml/2006/main" marL="2057400" indent="-228600" algn="l">
+      <a:lvl5pPr xmlns:a="http://schemas.openxmlformats.org/drawingml/2006/main" marL="2057400" indent="-228600" algn="l" defTabSz="914400">
         <a:lnSpc>
           <a:spcPct val="90000"/>
         </a:lnSpc>
         <a:spcBef>
           <a:spcPts val="500"/>
         </a:spcBef>
+        <a:buFont typeface="Arial"/>
         <a:buChar char="•"/>
-        <a:defRPr sz="1800">
+        <a:defRPr sz="1800" kern="1200">
           <a:solidFill>
             <a:schemeClr val="tx1"/>
           </a:solidFill>
@@ -614,15 +3990,16 @@
           <a:cs typeface="+mn-lt"/>
         </a:defRPr>
       </a:lvl5pPr>
-      <a:lvl6pPr xmlns:a="http://schemas.openxmlformats.org/drawingml/2006/main" marL="2514600" indent="-228600" algn="l">
+      <a:lvl6pPr xmlns:a="http://schemas.openxmlformats.org/drawingml/2006/main" marL="2514600" indent="-228600" algn="l" defTabSz="914400">
         <a:lnSpc>
           <a:spcPct val="90000"/>
         </a:lnSpc>
         <a:spcBef>
           <a:spcPts val="500"/>
         </a:spcBef>
+        <a:buFont typeface="Arial"/>
         <a:buChar char="•"/>
-        <a:defRPr sz="1800">
+        <a:defRPr sz="1800" kern="1200">
           <a:solidFill>
             <a:schemeClr val="tx1"/>
           </a:solidFill>
@@ -631,15 +4008,16 @@
           <a:cs typeface="+mn-lt"/>
         </a:defRPr>
       </a:lvl6pPr>
-      <a:lvl7pPr xmlns:a="http://schemas.openxmlformats.org/drawingml/2006/main" marL="2971800" indent="-228600" algn="l">
+      <a:lvl7pPr xmlns:a="http://schemas.openxmlformats.org/drawingml/2006/main" marL="2971800" indent="-228600" algn="l" defTabSz="914400">
         <a:lnSpc>
           <a:spcPct val="90000"/>
         </a:lnSpc>
         <a:spcBef>
           <a:spcPts val="500"/>
         </a:spcBef>
+        <a:buFont typeface="Arial"/>
         <a:buChar char="•"/>
-        <a:defRPr sz="1800">
+        <a:defRPr sz="1800" kern="1200">
           <a:solidFill>
             <a:schemeClr val="tx1"/>
           </a:solidFill>
@@ -648,15 +4026,16 @@
           <a:cs typeface="+mn-lt"/>
         </a:defRPr>
       </a:lvl7pPr>
-      <a:lvl8pPr xmlns:a="http://schemas.openxmlformats.org/drawingml/2006/main" marL="3429000" indent="-228600" algn="l">
+      <a:lvl8pPr xmlns:a="http://schemas.openxmlformats.org/drawingml/2006/main" marL="3429000" indent="-228600" algn="l" defTabSz="914400">
         <a:lnSpc>
           <a:spcPct val="90000"/>
         </a:lnSpc>
         <a:spcBef>
           <a:spcPts val="500"/>
         </a:spcBef>
+        <a:buFont typeface="Arial"/>
         <a:buChar char="•"/>
-        <a:defRPr sz="1800">
+        <a:defRPr sz="1800" kern="1200">
           <a:solidFill>
             <a:schemeClr val="tx1"/>
           </a:solidFill>
@@ -665,15 +4044,16 @@
           <a:cs typeface="+mn-lt"/>
         </a:defRPr>
       </a:lvl8pPr>
-      <a:lvl9pPr xmlns:a="http://schemas.openxmlformats.org/drawingml/2006/main" marL="3886200" indent="-228600" algn="l">
+      <a:lvl9pPr xmlns:a="http://schemas.openxmlformats.org/drawingml/2006/main" marL="3886200" indent="-228600" algn="l" defTabSz="914400">
         <a:lnSpc>
           <a:spcPct val="90000"/>
         </a:lnSpc>
         <a:spcBef>
           <a:spcPts val="500"/>
         </a:spcBef>
+        <a:buFont typeface="Arial"/>
         <a:buChar char="•"/>
-        <a:defRPr sz="1800">
+        <a:defRPr sz="1800" kern="1200">
           <a:solidFill>
             <a:schemeClr val="tx1"/>
           </a:solidFill>
@@ -684,9 +4064,9 @@
       </a:lvl9pPr>
     </p:bodyStyle>
     <p:otherStyle>
-      <a:lvl1pPr xmlns:a="http://schemas.openxmlformats.org/drawingml/2006/main" marL="0" algn="l">
+      <a:lvl1pPr xmlns:a="http://schemas.openxmlformats.org/drawingml/2006/main" marL="0" algn="l" defTabSz="914400">
         <a:buNone/>
-        <a:defRPr sz="1800">
+        <a:defRPr sz="1800" kern="1200">
           <a:solidFill>
             <a:schemeClr val="tx1"/>
           </a:solidFill>
@@ -695,9 +4075,9 @@
           <a:cs typeface="+mn-lt"/>
         </a:defRPr>
       </a:lvl1pPr>
-      <a:lvl2pPr xmlns:a="http://schemas.openxmlformats.org/drawingml/2006/main" marL="457200" algn="l">
+      <a:lvl2pPr xmlns:a="http://schemas.openxmlformats.org/drawingml/2006/main" marL="457200" algn="l" defTabSz="914400">
         <a:buNone/>
-        <a:defRPr sz="1800">
+        <a:defRPr sz="1800" kern="1200">
           <a:solidFill>
             <a:schemeClr val="tx1"/>
           </a:solidFill>
@@ -706,9 +4086,9 @@
           <a:cs typeface="+mn-lt"/>
         </a:defRPr>
       </a:lvl2pPr>
-      <a:lvl3pPr xmlns:a="http://schemas.openxmlformats.org/drawingml/2006/main" marL="914400" algn="l">
+      <a:lvl3pPr xmlns:a="http://schemas.openxmlformats.org/drawingml/2006/main" marL="914400" algn="l" defTabSz="914400">
         <a:buNone/>
-        <a:defRPr sz="1800">
+        <a:defRPr sz="1800" kern="1200">
           <a:solidFill>
             <a:schemeClr val="tx1"/>
           </a:solidFill>
@@ -717,9 +4097,9 @@
           <a:cs typeface="+mn-lt"/>
         </a:defRPr>
       </a:lvl3pPr>
-      <a:lvl4pPr xmlns:a="http://schemas.openxmlformats.org/drawingml/2006/main" marL="1371600" algn="l">
+      <a:lvl4pPr xmlns:a="http://schemas.openxmlformats.org/drawingml/2006/main" marL="1371600" algn="l" defTabSz="914400">
         <a:buNone/>
-        <a:defRPr sz="1800">
+        <a:defRPr sz="1800" kern="1200">
           <a:solidFill>
             <a:schemeClr val="tx1"/>
           </a:solidFill>
@@ -728,9 +4108,9 @@
           <a:cs typeface="+mn-lt"/>
         </a:defRPr>
       </a:lvl4pPr>
-      <a:lvl5pPr xmlns:a="http://schemas.openxmlformats.org/drawingml/2006/main" marL="1828800" algn="l">
+      <a:lvl5pPr xmlns:a="http://schemas.openxmlformats.org/drawingml/2006/main" marL="1828800" algn="l" defTabSz="914400">
         <a:buNone/>
-        <a:defRPr sz="1800">
+        <a:defRPr sz="1800" kern="1200">
           <a:solidFill>
             <a:schemeClr val="tx1"/>
           </a:solidFill>
@@ -739,9 +4119,9 @@
           <a:cs typeface="+mn-lt"/>
         </a:defRPr>
       </a:lvl5pPr>
-      <a:lvl6pPr xmlns:a="http://schemas.openxmlformats.org/drawingml/2006/main" marL="2286000" algn="l">
+      <a:lvl6pPr xmlns:a="http://schemas.openxmlformats.org/drawingml/2006/main" marL="2286000" algn="l" defTabSz="914400">
         <a:buNone/>
-        <a:defRPr sz="1800">
+        <a:defRPr sz="1800" kern="1200">
           <a:solidFill>
             <a:schemeClr val="tx1"/>
           </a:solidFill>
@@ -750,9 +4130,9 @@
           <a:cs typeface="+mn-lt"/>
         </a:defRPr>
       </a:lvl6pPr>
-      <a:lvl7pPr xmlns:a="http://schemas.openxmlformats.org/drawingml/2006/main" marL="2743200" algn="l">
+      <a:lvl7pPr xmlns:a="http://schemas.openxmlformats.org/drawingml/2006/main" marL="2743200" algn="l" defTabSz="914400">
         <a:buNone/>
-        <a:defRPr sz="1800">
+        <a:defRPr sz="1800" kern="1200">
           <a:solidFill>
             <a:schemeClr val="tx1"/>
           </a:solidFill>
@@ -761,9 +4141,9 @@
           <a:cs typeface="+mn-lt"/>
         </a:defRPr>
       </a:lvl7pPr>
-      <a:lvl8pPr xmlns:a="http://schemas.openxmlformats.org/drawingml/2006/main" marL="3200400" algn="l">
+      <a:lvl8pPr xmlns:a="http://schemas.openxmlformats.org/drawingml/2006/main" marL="3200400" algn="l" defTabSz="914400">
         <a:buNone/>
-        <a:defRPr sz="1800">
+        <a:defRPr sz="1800" kern="1200">
           <a:solidFill>
             <a:schemeClr val="tx1"/>
           </a:solidFill>
@@ -772,9 +4152,1529 @@
           <a:cs typeface="+mn-lt"/>
         </a:defRPr>
       </a:lvl8pPr>
-      <a:lvl9pPr xmlns:a="http://schemas.openxmlformats.org/drawingml/2006/main" marL="3657600" algn="l">
+      <a:lvl9pPr xmlns:a="http://schemas.openxmlformats.org/drawingml/2006/main" marL="3657600" algn="l" defTabSz="914400">
         <a:buNone/>
-        <a:defRPr sz="1800">
+        <a:defRPr sz="1800" kern="1200">
+          <a:solidFill>
+            <a:schemeClr val="tx1"/>
+          </a:solidFill>
+          <a:latin typeface="+mn-lt"/>
+          <a:ea typeface="+mn-lt"/>
+          <a:cs typeface="+mn-lt"/>
+        </a:defRPr>
+      </a:lvl9pPr>
+    </p:otherStyle>
+  </p:txStyles>
+</p:sldMaster>
+</file>
+
+<file path=ppt/slideMasters/slideMaster2.xml><?xml version="1.0" encoding="utf-8"?>
+<p:sldMaster xmlns:p="http://schemas.openxmlformats.org/presentationml/2006/main">
+  <p:cSld>
+    <p:bg>
+      <p:bgPr>
+        <a:solidFill xmlns:a="http://schemas.openxmlformats.org/drawingml/2006/main">
+          <a:schemeClr val="bg1"/>
+        </a:solidFill>
+      </p:bgPr>
+    </p:bg>
+    <p:spTree>
+      <p:nvGrpSpPr>
+        <p:cNvPr id="1" name=""/>
+        <p:cNvGrpSpPr/>
+        <p:nvPr/>
+      </p:nvGrpSpPr>
+      <p:grpSpPr>
+        <a:xfrm xmlns:a="http://schemas.openxmlformats.org/drawingml/2006/main"/>
+      </p:grpSpPr>
+      <p:sp>
+        <p:nvSpPr>
+          <p:cNvPr id="4098" name="标题占位符 1">
+            <a:extLst xmlns:a="http://schemas.openxmlformats.org/drawingml/2006/main">
+              <a:ext uri="{FF2B5EF4-FFF2-40B4-BE49-F238E27FC236}">
+                <a16:creationId xmlns:a16="http://schemas.microsoft.com/office/drawing/2014/main" id="{694631D6-B35F-42F5-B1AB-5A4B8546F7CD}"/>
+              </a:ext>
+            </a:extLst>
+          </p:cNvPr>
+          <p:cNvSpPr>
+            <a:spLocks xmlns:a="http://schemas.openxmlformats.org/drawingml/2006/main" noGrp="1"/>
+          </p:cNvSpPr>
+          <p:nvPr>
+            <p:ph type="title" idx="0"/>
+          </p:nvPr>
+        </p:nvSpPr>
+        <p:spPr>
+          <a:xfrm xmlns:a="http://schemas.openxmlformats.org/drawingml/2006/main">
+            <a:off x="838200" y="366186"/>
+            <a:ext cx="10515600" cy="1325033"/>
+          </a:xfrm>
+          <a:prstGeom xmlns:a="http://schemas.openxmlformats.org/drawingml/2006/main" prst="rect">
+            <a:avLst/>
+          </a:prstGeom>
+          <a:noFill xmlns:a="http://schemas.openxmlformats.org/drawingml/2006/main"/>
+          <a:ln xmlns:a="http://schemas.openxmlformats.org/drawingml/2006/main">
+            <a:noFill/>
+          </a:ln>
+        </p:spPr>
+        <p:txBody>
+          <a:bodyPr xmlns:a="http://schemas.openxmlformats.org/drawingml/2006/main" vert="horz" wrap="square" lIns="65019" tIns="32509" rIns="65019" bIns="32509" anchor="ctr"/>
+          <a:lstStyle xmlns:a="http://schemas.openxmlformats.org/drawingml/2006/main"/>
+          <a:p xmlns:a="http://schemas.openxmlformats.org/drawingml/2006/main">
+            <a:pPr lvl="0">
+              <a:buNone/>
+            </a:pPr>
+            <a:r>
+              <a:t>单击此处编辑母版标题样式</a:t>
+            </a:r>
+          </a:p>
+        </p:txBody>
+      </p:sp>
+      <p:sp>
+        <p:nvSpPr>
+          <p:cNvPr id="4099" name="文本占位符 2">
+            <a:extLst xmlns:a="http://schemas.openxmlformats.org/drawingml/2006/main">
+              <a:ext uri="{FF2B5EF4-FFF2-40B4-BE49-F238E27FC236}">
+                <a16:creationId xmlns:a16="http://schemas.microsoft.com/office/drawing/2014/main" id="{2CB73376-BAEC-4CD7-BFDE-EDD8ADBDAF1E}"/>
+              </a:ext>
+            </a:extLst>
+          </p:cNvPr>
+          <p:cNvSpPr>
+            <a:spLocks xmlns:a="http://schemas.openxmlformats.org/drawingml/2006/main" noGrp="1"/>
+          </p:cNvSpPr>
+          <p:nvPr>
+            <p:ph type="body" idx="1"/>
+          </p:nvPr>
+        </p:nvSpPr>
+        <p:spPr>
+          <a:xfrm xmlns:a="http://schemas.openxmlformats.org/drawingml/2006/main">
+            <a:off x="838200" y="1826685"/>
+            <a:ext cx="10515600" cy="4351867"/>
+          </a:xfrm>
+          <a:prstGeom xmlns:a="http://schemas.openxmlformats.org/drawingml/2006/main" prst="rect">
+            <a:avLst/>
+          </a:prstGeom>
+          <a:noFill xmlns:a="http://schemas.openxmlformats.org/drawingml/2006/main"/>
+          <a:ln xmlns:a="http://schemas.openxmlformats.org/drawingml/2006/main">
+            <a:noFill/>
+          </a:ln>
+        </p:spPr>
+        <p:txBody>
+          <a:bodyPr xmlns:a="http://schemas.openxmlformats.org/drawingml/2006/main" vert="horz" wrap="square" lIns="65019" tIns="32509" rIns="65019" bIns="32509" anchor="t"/>
+          <a:lstStyle xmlns:a="http://schemas.openxmlformats.org/drawingml/2006/main"/>
+          <a:p xmlns:a="http://schemas.openxmlformats.org/drawingml/2006/main">
+            <a:pPr lvl="0">
+              <a:buNone/>
+            </a:pPr>
+            <a:r>
+              <a:t>单击此处编辑母版文本样式</a:t>
+            </a:r>
+          </a:p>
+          <a:p xmlns:a="http://schemas.openxmlformats.org/drawingml/2006/main">
+            <a:pPr lvl="1">
+              <a:buNone/>
+            </a:pPr>
+            <a:r>
+              <a:t>第二级</a:t>
+            </a:r>
+          </a:p>
+          <a:p xmlns:a="http://schemas.openxmlformats.org/drawingml/2006/main">
+            <a:pPr lvl="2">
+              <a:buNone/>
+            </a:pPr>
+            <a:r>
+              <a:t>第三级</a:t>
+            </a:r>
+          </a:p>
+          <a:p xmlns:a="http://schemas.openxmlformats.org/drawingml/2006/main">
+            <a:pPr lvl="3">
+              <a:buNone/>
+            </a:pPr>
+            <a:r>
+              <a:t>第四级</a:t>
+            </a:r>
+          </a:p>
+          <a:p xmlns:a="http://schemas.openxmlformats.org/drawingml/2006/main">
+            <a:pPr lvl="4">
+              <a:buNone/>
+            </a:pPr>
+            <a:r>
+              <a:t>第五级</a:t>
+            </a:r>
+          </a:p>
+        </p:txBody>
+      </p:sp>
+      <p:sp>
+        <p:nvSpPr>
+          <p:cNvPr id="4" name="日期占位符 3">
+            <a:extLst xmlns:a="http://schemas.openxmlformats.org/drawingml/2006/main">
+              <a:ext uri="{FF2B5EF4-FFF2-40B4-BE49-F238E27FC236}">
+                <a16:creationId xmlns:a16="http://schemas.microsoft.com/office/drawing/2014/main" id="{57D6EC4F-207A-418C-ABB6-5F154266304D}"/>
+              </a:ext>
+            </a:extLst>
+          </p:cNvPr>
+          <p:cNvSpPr>
+            <a:spLocks xmlns:a="http://schemas.openxmlformats.org/drawingml/2006/main" noGrp="1"/>
+          </p:cNvSpPr>
+          <p:nvPr>
+            <p:ph type="dt" idx="2"/>
+          </p:nvPr>
+        </p:nvSpPr>
+        <p:spPr>
+          <a:xfrm xmlns:a="http://schemas.openxmlformats.org/drawingml/2006/main">
+            <a:off x="838200" y="6356353"/>
+            <a:ext cx="2743200" cy="364067"/>
+          </a:xfrm>
+          <a:prstGeom xmlns:a="http://schemas.openxmlformats.org/drawingml/2006/main" prst="rect">
+            <a:avLst/>
+          </a:prstGeom>
+        </p:spPr>
+        <p:txBody>
+          <a:bodyPr xmlns:a="http://schemas.openxmlformats.org/drawingml/2006/main" vert="horz" lIns="65019" tIns="32509" rIns="65019" bIns="32509" anchor="ctr"/>
+          <a:lstStyle xmlns:a="http://schemas.openxmlformats.org/drawingml/2006/main">
+            <a:lvl1pPr algn="l" defTabSz="1218565">
+              <a:buNone/>
+              <a:defRPr sz="1200">
+                <a:solidFill>
+                  <a:prstClr val="black">
+                    <a:tint val="75000"/>
+                  </a:prstClr>
+                </a:solidFill>
+                <a:latin typeface="+mn-lt"/>
+                <a:ea typeface="+mn-lt"/>
+                <a:cs typeface="+mn-lt"/>
+              </a:defRPr>
+            </a:lvl1pPr>
+          </a:lstStyle>
+          <a:p xmlns:a="http://schemas.openxmlformats.org/drawingml/2006/main">
+            <a:pPr>
+              <a:buNone/>
+            </a:pPr>
+            <a:fld id="{292F71EF-02F8-4FDD-93F8-D030AB7FC83F}" type="datetimeFigureOut">
+              <a:t>2026/8/8</a:t>
+            </a:fld>
+            <a:endParaRPr/>
+          </a:p>
+        </p:txBody>
+      </p:sp>
+      <p:sp>
+        <p:nvSpPr>
+          <p:cNvPr id="5" name="页脚占位符 4">
+            <a:extLst xmlns:a="http://schemas.openxmlformats.org/drawingml/2006/main">
+              <a:ext uri="{FF2B5EF4-FFF2-40B4-BE49-F238E27FC236}">
+                <a16:creationId xmlns:a16="http://schemas.microsoft.com/office/drawing/2014/main" id="{076FF324-1DA8-4061-AA98-14471244CE82}"/>
+              </a:ext>
+            </a:extLst>
+          </p:cNvPr>
+          <p:cNvSpPr>
+            <a:spLocks xmlns:a="http://schemas.openxmlformats.org/drawingml/2006/main" noGrp="1"/>
+          </p:cNvSpPr>
+          <p:nvPr>
+            <p:ph type="ftr" idx="3"/>
+          </p:nvPr>
+        </p:nvSpPr>
+        <p:spPr>
+          <a:xfrm xmlns:a="http://schemas.openxmlformats.org/drawingml/2006/main">
+            <a:off x="4038600" y="6356353"/>
+            <a:ext cx="4114800" cy="364067"/>
+          </a:xfrm>
+          <a:prstGeom xmlns:a="http://schemas.openxmlformats.org/drawingml/2006/main" prst="rect">
+            <a:avLst/>
+          </a:prstGeom>
+        </p:spPr>
+        <p:txBody>
+          <a:bodyPr xmlns:a="http://schemas.openxmlformats.org/drawingml/2006/main" vert="horz" lIns="65019" tIns="32509" rIns="65019" bIns="32509" anchor="ctr"/>
+          <a:lstStyle xmlns:a="http://schemas.openxmlformats.org/drawingml/2006/main">
+            <a:lvl1pPr algn="ctr" defTabSz="1218565">
+              <a:buNone/>
+              <a:defRPr sz="1200">
+                <a:solidFill>
+                  <a:prstClr val="black">
+                    <a:tint val="75000"/>
+                  </a:prstClr>
+                </a:solidFill>
+                <a:latin typeface="+mn-lt"/>
+                <a:ea typeface="+mn-lt"/>
+                <a:cs typeface="+mn-lt"/>
+              </a:defRPr>
+            </a:lvl1pPr>
+          </a:lstStyle>
+          <a:p xmlns:a="http://schemas.openxmlformats.org/drawingml/2006/main">
+            <a:pPr>
+              <a:buNone/>
+            </a:pPr>
+            <a:endParaRPr/>
+          </a:p>
+        </p:txBody>
+      </p:sp>
+      <p:sp>
+        <p:nvSpPr>
+          <p:cNvPr id="6" name="灯片编号占位符 5">
+            <a:extLst xmlns:a="http://schemas.openxmlformats.org/drawingml/2006/main">
+              <a:ext uri="{FF2B5EF4-FFF2-40B4-BE49-F238E27FC236}">
+                <a16:creationId xmlns:a16="http://schemas.microsoft.com/office/drawing/2014/main" id="{E38D201D-F7EC-4336-8ACC-C1213BED6456}"/>
+              </a:ext>
+            </a:extLst>
+          </p:cNvPr>
+          <p:cNvSpPr>
+            <a:spLocks xmlns:a="http://schemas.openxmlformats.org/drawingml/2006/main" noGrp="1"/>
+          </p:cNvSpPr>
+          <p:nvPr>
+            <p:ph type="sldNum" idx="4"/>
+          </p:nvPr>
+        </p:nvSpPr>
+        <p:spPr>
+          <a:xfrm xmlns:a="http://schemas.openxmlformats.org/drawingml/2006/main">
+            <a:off x="8610600" y="6356353"/>
+            <a:ext cx="2743200" cy="364067"/>
+          </a:xfrm>
+          <a:prstGeom xmlns:a="http://schemas.openxmlformats.org/drawingml/2006/main" prst="rect">
+            <a:avLst/>
+          </a:prstGeom>
+        </p:spPr>
+        <p:txBody>
+          <a:bodyPr xmlns:a="http://schemas.openxmlformats.org/drawingml/2006/main" vert="horz" wrap="square" lIns="65019" tIns="32509" rIns="65019" bIns="32509" anchor="ctr"/>
+          <a:lstStyle xmlns:a="http://schemas.openxmlformats.org/drawingml/2006/main">
+            <a:lvl1pPr algn="r" defTabSz="1216660">
+              <a:buNone/>
+              <a:defRPr sz="1200">
+                <a:solidFill>
+                  <a:srgbClr val="898989"/>
+                </a:solidFill>
+              </a:defRPr>
+            </a:lvl1pPr>
+          </a:lstStyle>
+          <a:p xmlns:a="http://schemas.openxmlformats.org/drawingml/2006/main">
+            <a:pPr>
+              <a:buNone/>
+            </a:pPr>
+            <a:fld id="{D728AC88-674E-4151-AFDC-B7C47BAC839D}" type="slidenum">
+              <a:t>‹#›</a:t>
+            </a:fld>
+            <a:endParaRPr/>
+          </a:p>
+        </p:txBody>
+      </p:sp>
+    </p:spTree>
+  </p:cSld>
+  <p:clrMap bg1="lt1" tx1="dk1" bg2="lt2" tx2="dk2" accent1="accent1" accent2="accent2" accent3="accent3" accent4="accent4" accent5="accent5" accent6="accent6" hlink="hlink" folHlink="folHlink"/>
+  <p:sldLayoutIdLst>
+    <p:sldLayoutId xmlns:r="http://schemas.openxmlformats.org/officeDocument/2006/relationships" id="2147483661" r:id="R08d7351ca49c4625"/>
+    <p:sldLayoutId xmlns:r="http://schemas.openxmlformats.org/officeDocument/2006/relationships" id="2147483662" r:id="Rfb97ca25af024723"/>
+  </p:sldLayoutIdLst>
+  <p:txStyles>
+    <p:titleStyle>
+      <a:lvl1pPr xmlns:a="http://schemas.openxmlformats.org/drawingml/2006/main" algn="l" defTabSz="865505">
+        <a:lnSpc>
+          <a:spcPct val="90000"/>
+        </a:lnSpc>
+        <a:spcBef>
+          <a:spcPct val="0"/>
+        </a:spcBef>
+        <a:spcAft>
+          <a:spcPct val="0"/>
+        </a:spcAft>
+        <a:buNone/>
+        <a:defRPr sz="4135" kern="1200">
+          <a:solidFill>
+            <a:schemeClr val="tx1"/>
+          </a:solidFill>
+          <a:latin typeface="Calibri"/>
+          <a:ea typeface="Calibri"/>
+          <a:cs typeface="Calibri"/>
+        </a:defRPr>
+      </a:lvl1pPr>
+      <a:lvl2pPr xmlns:a="http://schemas.openxmlformats.org/drawingml/2006/main" algn="l" defTabSz="865505">
+        <a:lnSpc>
+          <a:spcPct val="90000"/>
+        </a:lnSpc>
+        <a:spcBef>
+          <a:spcPct val="0"/>
+        </a:spcBef>
+        <a:spcAft>
+          <a:spcPct val="0"/>
+        </a:spcAft>
+        <a:buNone/>
+        <a:defRPr sz="4135">
+          <a:solidFill>
+            <a:schemeClr val="tx1"/>
+          </a:solidFill>
+          <a:latin typeface="Calibri Light"/>
+          <a:ea typeface="Calibri Light"/>
+          <a:cs typeface="Calibri Light"/>
+        </a:defRPr>
+      </a:lvl2pPr>
+      <a:lvl3pPr xmlns:a="http://schemas.openxmlformats.org/drawingml/2006/main" algn="l" defTabSz="865505">
+        <a:lnSpc>
+          <a:spcPct val="90000"/>
+        </a:lnSpc>
+        <a:spcBef>
+          <a:spcPct val="0"/>
+        </a:spcBef>
+        <a:spcAft>
+          <a:spcPct val="0"/>
+        </a:spcAft>
+        <a:buNone/>
+        <a:defRPr sz="4135">
+          <a:solidFill>
+            <a:schemeClr val="tx1"/>
+          </a:solidFill>
+          <a:latin typeface="Calibri Light"/>
+          <a:ea typeface="Calibri Light"/>
+          <a:cs typeface="Calibri Light"/>
+        </a:defRPr>
+      </a:lvl3pPr>
+      <a:lvl4pPr xmlns:a="http://schemas.openxmlformats.org/drawingml/2006/main" algn="l" defTabSz="865505">
+        <a:lnSpc>
+          <a:spcPct val="90000"/>
+        </a:lnSpc>
+        <a:spcBef>
+          <a:spcPct val="0"/>
+        </a:spcBef>
+        <a:spcAft>
+          <a:spcPct val="0"/>
+        </a:spcAft>
+        <a:buNone/>
+        <a:defRPr sz="4135">
+          <a:solidFill>
+            <a:schemeClr val="tx1"/>
+          </a:solidFill>
+          <a:latin typeface="Calibri Light"/>
+          <a:ea typeface="Calibri Light"/>
+          <a:cs typeface="Calibri Light"/>
+        </a:defRPr>
+      </a:lvl4pPr>
+      <a:lvl5pPr xmlns:a="http://schemas.openxmlformats.org/drawingml/2006/main" algn="l" defTabSz="865505">
+        <a:lnSpc>
+          <a:spcPct val="90000"/>
+        </a:lnSpc>
+        <a:spcBef>
+          <a:spcPct val="0"/>
+        </a:spcBef>
+        <a:spcAft>
+          <a:spcPct val="0"/>
+        </a:spcAft>
+        <a:buNone/>
+        <a:defRPr sz="4135">
+          <a:solidFill>
+            <a:schemeClr val="tx1"/>
+          </a:solidFill>
+          <a:latin typeface="Calibri Light"/>
+          <a:ea typeface="Calibri Light"/>
+          <a:cs typeface="Calibri Light"/>
+        </a:defRPr>
+      </a:lvl5pPr>
+      <a:lvl6pPr xmlns:a="http://schemas.openxmlformats.org/drawingml/2006/main" marL="609600" algn="l" defTabSz="865505">
+        <a:lnSpc>
+          <a:spcPct val="90000"/>
+        </a:lnSpc>
+        <a:spcBef>
+          <a:spcPct val="0"/>
+        </a:spcBef>
+        <a:spcAft>
+          <a:spcPct val="0"/>
+        </a:spcAft>
+        <a:buNone/>
+        <a:defRPr sz="4135">
+          <a:solidFill>
+            <a:schemeClr val="tx1"/>
+          </a:solidFill>
+          <a:latin typeface="Calibri Light"/>
+          <a:ea typeface="Calibri Light"/>
+          <a:cs typeface="Calibri Light"/>
+        </a:defRPr>
+      </a:lvl6pPr>
+      <a:lvl7pPr xmlns:a="http://schemas.openxmlformats.org/drawingml/2006/main" marL="1219200" algn="l" defTabSz="865505">
+        <a:lnSpc>
+          <a:spcPct val="90000"/>
+        </a:lnSpc>
+        <a:spcBef>
+          <a:spcPct val="0"/>
+        </a:spcBef>
+        <a:spcAft>
+          <a:spcPct val="0"/>
+        </a:spcAft>
+        <a:buNone/>
+        <a:defRPr sz="4135">
+          <a:solidFill>
+            <a:schemeClr val="tx1"/>
+          </a:solidFill>
+          <a:latin typeface="Calibri Light"/>
+          <a:ea typeface="Calibri Light"/>
+          <a:cs typeface="Calibri Light"/>
+        </a:defRPr>
+      </a:lvl7pPr>
+      <a:lvl8pPr xmlns:a="http://schemas.openxmlformats.org/drawingml/2006/main" marL="1828800" algn="l" defTabSz="865505">
+        <a:lnSpc>
+          <a:spcPct val="90000"/>
+        </a:lnSpc>
+        <a:spcBef>
+          <a:spcPct val="0"/>
+        </a:spcBef>
+        <a:spcAft>
+          <a:spcPct val="0"/>
+        </a:spcAft>
+        <a:buNone/>
+        <a:defRPr sz="4135">
+          <a:solidFill>
+            <a:schemeClr val="tx1"/>
+          </a:solidFill>
+          <a:latin typeface="Calibri Light"/>
+          <a:ea typeface="Calibri Light"/>
+          <a:cs typeface="Calibri Light"/>
+        </a:defRPr>
+      </a:lvl8pPr>
+      <a:lvl9pPr xmlns:a="http://schemas.openxmlformats.org/drawingml/2006/main" marL="2438400" algn="l" defTabSz="865505">
+        <a:lnSpc>
+          <a:spcPct val="90000"/>
+        </a:lnSpc>
+        <a:spcBef>
+          <a:spcPct val="0"/>
+        </a:spcBef>
+        <a:spcAft>
+          <a:spcPct val="0"/>
+        </a:spcAft>
+        <a:buNone/>
+        <a:defRPr sz="4135">
+          <a:solidFill>
+            <a:schemeClr val="tx1"/>
+          </a:solidFill>
+          <a:latin typeface="Calibri Light"/>
+          <a:ea typeface="Calibri Light"/>
+          <a:cs typeface="Calibri Light"/>
+        </a:defRPr>
+      </a:lvl9pPr>
+    </p:titleStyle>
+    <p:bodyStyle>
+      <a:lvl1pPr xmlns:a="http://schemas.openxmlformats.org/drawingml/2006/main" marL="215900" indent="-215900" algn="l" defTabSz="865505">
+        <a:lnSpc>
+          <a:spcPct val="90000"/>
+        </a:lnSpc>
+        <a:spcBef>
+          <a:spcPts val="955"/>
+        </a:spcBef>
+        <a:spcAft>
+          <a:spcPct val="0"/>
+        </a:spcAft>
+        <a:buFont typeface="Arial"/>
+        <a:buChar char="•"/>
+        <a:defRPr sz="2665" kern="1200">
+          <a:solidFill>
+            <a:schemeClr val="tx1"/>
+          </a:solidFill>
+          <a:latin typeface="+mn-lt"/>
+          <a:ea typeface="+mn-lt"/>
+          <a:cs typeface="+mn-lt"/>
+        </a:defRPr>
+      </a:lvl1pPr>
+      <a:lvl2pPr xmlns:a="http://schemas.openxmlformats.org/drawingml/2006/main" marL="650240" indent="-215900" algn="l" defTabSz="865505">
+        <a:lnSpc>
+          <a:spcPct val="90000"/>
+        </a:lnSpc>
+        <a:spcBef>
+          <a:spcPts val="465"/>
+        </a:spcBef>
+        <a:spcAft>
+          <a:spcPct val="0"/>
+        </a:spcAft>
+        <a:buFont typeface="Arial"/>
+        <a:buChar char="•"/>
+        <a:defRPr sz="2265" kern="1200">
+          <a:solidFill>
+            <a:schemeClr val="tx1"/>
+          </a:solidFill>
+          <a:latin typeface="+mn-lt"/>
+          <a:ea typeface="+mn-lt"/>
+          <a:cs typeface="+mn-lt"/>
+        </a:defRPr>
+      </a:lvl2pPr>
+      <a:lvl3pPr xmlns:a="http://schemas.openxmlformats.org/drawingml/2006/main" marL="1082040" indent="-215900" algn="l" defTabSz="865505">
+        <a:lnSpc>
+          <a:spcPct val="90000"/>
+        </a:lnSpc>
+        <a:spcBef>
+          <a:spcPts val="465"/>
+        </a:spcBef>
+        <a:spcAft>
+          <a:spcPct val="0"/>
+        </a:spcAft>
+        <a:buFont typeface="Arial"/>
+        <a:buChar char="•"/>
+        <a:defRPr sz="1865" kern="1200">
+          <a:solidFill>
+            <a:schemeClr val="tx1"/>
+          </a:solidFill>
+          <a:latin typeface="+mn-lt"/>
+          <a:ea typeface="+mn-lt"/>
+          <a:cs typeface="+mn-lt"/>
+        </a:defRPr>
+      </a:lvl3pPr>
+      <a:lvl4pPr xmlns:a="http://schemas.openxmlformats.org/drawingml/2006/main" marL="1515745" indent="-215900" algn="l" defTabSz="865505">
+        <a:lnSpc>
+          <a:spcPct val="90000"/>
+        </a:lnSpc>
+        <a:spcBef>
+          <a:spcPts val="465"/>
+        </a:spcBef>
+        <a:spcAft>
+          <a:spcPct val="0"/>
+        </a:spcAft>
+        <a:buFont typeface="Arial"/>
+        <a:buChar char="•"/>
+        <a:defRPr sz="1735" kern="1200">
+          <a:solidFill>
+            <a:schemeClr val="tx1"/>
+          </a:solidFill>
+          <a:latin typeface="+mn-lt"/>
+          <a:ea typeface="+mn-lt"/>
+          <a:cs typeface="+mn-lt"/>
+        </a:defRPr>
+      </a:lvl4pPr>
+      <a:lvl5pPr xmlns:a="http://schemas.openxmlformats.org/drawingml/2006/main" marL="1950085" indent="-215900" algn="l" defTabSz="865505">
+        <a:lnSpc>
+          <a:spcPct val="90000"/>
+        </a:lnSpc>
+        <a:spcBef>
+          <a:spcPts val="465"/>
+        </a:spcBef>
+        <a:spcAft>
+          <a:spcPct val="0"/>
+        </a:spcAft>
+        <a:buFont typeface="Arial"/>
+        <a:buChar char="•"/>
+        <a:defRPr sz="1735" kern="1200">
+          <a:solidFill>
+            <a:schemeClr val="tx1"/>
+          </a:solidFill>
+          <a:latin typeface="+mn-lt"/>
+          <a:ea typeface="+mn-lt"/>
+          <a:cs typeface="+mn-lt"/>
+        </a:defRPr>
+      </a:lvl5pPr>
+      <a:lvl6pPr xmlns:a="http://schemas.openxmlformats.org/drawingml/2006/main" marL="2384425" indent="-216535" algn="l" defTabSz="866140">
+        <a:lnSpc>
+          <a:spcPct val="90000"/>
+        </a:lnSpc>
+        <a:spcBef>
+          <a:spcPts val="475"/>
+        </a:spcBef>
+        <a:buFont typeface="Arial"/>
+        <a:buChar char="•"/>
+        <a:defRPr sz="1735" kern="1200">
+          <a:solidFill>
+            <a:schemeClr val="tx1"/>
+          </a:solidFill>
+          <a:latin typeface="+mn-lt"/>
+          <a:ea typeface="+mn-lt"/>
+          <a:cs typeface="+mn-lt"/>
+        </a:defRPr>
+      </a:lvl6pPr>
+      <a:lvl7pPr xmlns:a="http://schemas.openxmlformats.org/drawingml/2006/main" marL="2817495" indent="-216535" algn="l" defTabSz="866140">
+        <a:lnSpc>
+          <a:spcPct val="90000"/>
+        </a:lnSpc>
+        <a:spcBef>
+          <a:spcPts val="475"/>
+        </a:spcBef>
+        <a:buFont typeface="Arial"/>
+        <a:buChar char="•"/>
+        <a:defRPr sz="1735" kern="1200">
+          <a:solidFill>
+            <a:schemeClr val="tx1"/>
+          </a:solidFill>
+          <a:latin typeface="+mn-lt"/>
+          <a:ea typeface="+mn-lt"/>
+          <a:cs typeface="+mn-lt"/>
+        </a:defRPr>
+      </a:lvl7pPr>
+      <a:lvl8pPr xmlns:a="http://schemas.openxmlformats.org/drawingml/2006/main" marL="3251200" indent="-216535" algn="l" defTabSz="866140">
+        <a:lnSpc>
+          <a:spcPct val="90000"/>
+        </a:lnSpc>
+        <a:spcBef>
+          <a:spcPts val="475"/>
+        </a:spcBef>
+        <a:buFont typeface="Arial"/>
+        <a:buChar char="•"/>
+        <a:defRPr sz="1735" kern="1200">
+          <a:solidFill>
+            <a:schemeClr val="tx1"/>
+          </a:solidFill>
+          <a:latin typeface="+mn-lt"/>
+          <a:ea typeface="+mn-lt"/>
+          <a:cs typeface="+mn-lt"/>
+        </a:defRPr>
+      </a:lvl8pPr>
+      <a:lvl9pPr xmlns:a="http://schemas.openxmlformats.org/drawingml/2006/main" marL="3684905" indent="-216535" algn="l" defTabSz="866140">
+        <a:lnSpc>
+          <a:spcPct val="90000"/>
+        </a:lnSpc>
+        <a:spcBef>
+          <a:spcPts val="475"/>
+        </a:spcBef>
+        <a:buFont typeface="Arial"/>
+        <a:buChar char="•"/>
+        <a:defRPr sz="1735" kern="1200">
+          <a:solidFill>
+            <a:schemeClr val="tx1"/>
+          </a:solidFill>
+          <a:latin typeface="+mn-lt"/>
+          <a:ea typeface="+mn-lt"/>
+          <a:cs typeface="+mn-lt"/>
+        </a:defRPr>
+      </a:lvl9pPr>
+    </p:bodyStyle>
+    <p:otherStyle>
+      <a:lvl1pPr xmlns:a="http://schemas.openxmlformats.org/drawingml/2006/main" marL="0" algn="l" defTabSz="866140">
+        <a:buNone/>
+        <a:defRPr sz="1735" kern="1200">
+          <a:solidFill>
+            <a:schemeClr val="tx1"/>
+          </a:solidFill>
+          <a:latin typeface="+mn-lt"/>
+          <a:ea typeface="+mn-lt"/>
+          <a:cs typeface="+mn-lt"/>
+        </a:defRPr>
+      </a:lvl1pPr>
+      <a:lvl2pPr xmlns:a="http://schemas.openxmlformats.org/drawingml/2006/main" marL="433705" algn="l" defTabSz="866140">
+        <a:buNone/>
+        <a:defRPr sz="1735" kern="1200">
+          <a:solidFill>
+            <a:schemeClr val="tx1"/>
+          </a:solidFill>
+          <a:latin typeface="+mn-lt"/>
+          <a:ea typeface="+mn-lt"/>
+          <a:cs typeface="+mn-lt"/>
+        </a:defRPr>
+      </a:lvl2pPr>
+      <a:lvl3pPr xmlns:a="http://schemas.openxmlformats.org/drawingml/2006/main" marL="866775" algn="l" defTabSz="866140">
+        <a:buNone/>
+        <a:defRPr sz="1735" kern="1200">
+          <a:solidFill>
+            <a:schemeClr val="tx1"/>
+          </a:solidFill>
+          <a:latin typeface="+mn-lt"/>
+          <a:ea typeface="+mn-lt"/>
+          <a:cs typeface="+mn-lt"/>
+        </a:defRPr>
+      </a:lvl3pPr>
+      <a:lvl4pPr xmlns:a="http://schemas.openxmlformats.org/drawingml/2006/main" marL="1300480" algn="l" defTabSz="866140">
+        <a:buNone/>
+        <a:defRPr sz="1735" kern="1200">
+          <a:solidFill>
+            <a:schemeClr val="tx1"/>
+          </a:solidFill>
+          <a:latin typeface="+mn-lt"/>
+          <a:ea typeface="+mn-lt"/>
+          <a:cs typeface="+mn-lt"/>
+        </a:defRPr>
+      </a:lvl4pPr>
+      <a:lvl5pPr xmlns:a="http://schemas.openxmlformats.org/drawingml/2006/main" marL="1734185" algn="l" defTabSz="866140">
+        <a:buNone/>
+        <a:defRPr sz="1735" kern="1200">
+          <a:solidFill>
+            <a:schemeClr val="tx1"/>
+          </a:solidFill>
+          <a:latin typeface="+mn-lt"/>
+          <a:ea typeface="+mn-lt"/>
+          <a:cs typeface="+mn-lt"/>
+        </a:defRPr>
+      </a:lvl5pPr>
+      <a:lvl6pPr xmlns:a="http://schemas.openxmlformats.org/drawingml/2006/main" marL="2167255" algn="l" defTabSz="866140">
+        <a:buNone/>
+        <a:defRPr sz="1735" kern="1200">
+          <a:solidFill>
+            <a:schemeClr val="tx1"/>
+          </a:solidFill>
+          <a:latin typeface="+mn-lt"/>
+          <a:ea typeface="+mn-lt"/>
+          <a:cs typeface="+mn-lt"/>
+        </a:defRPr>
+      </a:lvl6pPr>
+      <a:lvl7pPr xmlns:a="http://schemas.openxmlformats.org/drawingml/2006/main" marL="2600960" algn="l" defTabSz="866140">
+        <a:buNone/>
+        <a:defRPr sz="1735" kern="1200">
+          <a:solidFill>
+            <a:schemeClr val="tx1"/>
+          </a:solidFill>
+          <a:latin typeface="+mn-lt"/>
+          <a:ea typeface="+mn-lt"/>
+          <a:cs typeface="+mn-lt"/>
+        </a:defRPr>
+      </a:lvl7pPr>
+      <a:lvl8pPr xmlns:a="http://schemas.openxmlformats.org/drawingml/2006/main" marL="3034665" algn="l" defTabSz="866140">
+        <a:buNone/>
+        <a:defRPr sz="1735" kern="1200">
+          <a:solidFill>
+            <a:schemeClr val="tx1"/>
+          </a:solidFill>
+          <a:latin typeface="+mn-lt"/>
+          <a:ea typeface="+mn-lt"/>
+          <a:cs typeface="+mn-lt"/>
+        </a:defRPr>
+      </a:lvl8pPr>
+      <a:lvl9pPr xmlns:a="http://schemas.openxmlformats.org/drawingml/2006/main" marL="3467735" algn="l" defTabSz="866140">
+        <a:buNone/>
+        <a:defRPr sz="1735" kern="1200">
+          <a:solidFill>
+            <a:schemeClr val="tx1"/>
+          </a:solidFill>
+          <a:latin typeface="+mn-lt"/>
+          <a:ea typeface="+mn-lt"/>
+          <a:cs typeface="+mn-lt"/>
+        </a:defRPr>
+      </a:lvl9pPr>
+    </p:otherStyle>
+  </p:txStyles>
+</p:sldMaster>
+</file>
+
+<file path=ppt/slideMasters/slideMaster3.xml><?xml version="1.0" encoding="utf-8"?>
+<p:sldMaster xmlns:p="http://schemas.openxmlformats.org/presentationml/2006/main">
+  <p:cSld>
+    <p:bg>
+      <p:bgPr>
+        <a:solidFill xmlns:a="http://schemas.openxmlformats.org/drawingml/2006/main">
+          <a:schemeClr val="bg1"/>
+        </a:solidFill>
+      </p:bgPr>
+    </p:bg>
+    <p:spTree>
+      <p:nvGrpSpPr>
+        <p:cNvPr id="1" name=""/>
+        <p:cNvGrpSpPr/>
+        <p:nvPr/>
+      </p:nvGrpSpPr>
+      <p:grpSpPr>
+        <a:xfrm xmlns:a="http://schemas.openxmlformats.org/drawingml/2006/main"/>
+      </p:grpSpPr>
+      <p:sp>
+        <p:nvSpPr>
+          <p:cNvPr id="4098" name="标题占位符 1">
+            <a:extLst xmlns:a="http://schemas.openxmlformats.org/drawingml/2006/main">
+              <a:ext uri="{FF2B5EF4-FFF2-40B4-BE49-F238E27FC236}">
+                <a16:creationId xmlns:a16="http://schemas.microsoft.com/office/drawing/2014/main" id="{C741A79C-7AC7-4302-A7F2-FF6027DA4775}"/>
+              </a:ext>
+            </a:extLst>
+          </p:cNvPr>
+          <p:cNvSpPr>
+            <a:spLocks xmlns:a="http://schemas.openxmlformats.org/drawingml/2006/main" noGrp="1"/>
+          </p:cNvSpPr>
+          <p:nvPr>
+            <p:ph type="title" idx="0"/>
+          </p:nvPr>
+        </p:nvSpPr>
+        <p:spPr>
+          <a:xfrm xmlns:a="http://schemas.openxmlformats.org/drawingml/2006/main">
+            <a:off x="838200" y="366186"/>
+            <a:ext cx="10515600" cy="1325033"/>
+          </a:xfrm>
+          <a:prstGeom xmlns:a="http://schemas.openxmlformats.org/drawingml/2006/main" prst="rect">
+            <a:avLst/>
+          </a:prstGeom>
+          <a:noFill xmlns:a="http://schemas.openxmlformats.org/drawingml/2006/main"/>
+          <a:ln xmlns:a="http://schemas.openxmlformats.org/drawingml/2006/main">
+            <a:noFill/>
+          </a:ln>
+        </p:spPr>
+        <p:txBody>
+          <a:bodyPr xmlns:a="http://schemas.openxmlformats.org/drawingml/2006/main" vert="horz" wrap="square" lIns="65019" tIns="32509" rIns="65019" bIns="32509" anchor="ctr"/>
+          <a:lstStyle xmlns:a="http://schemas.openxmlformats.org/drawingml/2006/main"/>
+          <a:p xmlns:a="http://schemas.openxmlformats.org/drawingml/2006/main">
+            <a:pPr lvl="0">
+              <a:buNone/>
+            </a:pPr>
+            <a:r>
+              <a:t>单击此处编辑母版标题样式</a:t>
+            </a:r>
+          </a:p>
+        </p:txBody>
+      </p:sp>
+      <p:sp>
+        <p:nvSpPr>
+          <p:cNvPr id="4099" name="文本占位符 2">
+            <a:extLst xmlns:a="http://schemas.openxmlformats.org/drawingml/2006/main">
+              <a:ext uri="{FF2B5EF4-FFF2-40B4-BE49-F238E27FC236}">
+                <a16:creationId xmlns:a16="http://schemas.microsoft.com/office/drawing/2014/main" id="{EE298E8F-9AEF-49A1-A5BB-C466E6C6AF4B}"/>
+              </a:ext>
+            </a:extLst>
+          </p:cNvPr>
+          <p:cNvSpPr>
+            <a:spLocks xmlns:a="http://schemas.openxmlformats.org/drawingml/2006/main" noGrp="1"/>
+          </p:cNvSpPr>
+          <p:nvPr>
+            <p:ph type="body" idx="1"/>
+          </p:nvPr>
+        </p:nvSpPr>
+        <p:spPr>
+          <a:xfrm xmlns:a="http://schemas.openxmlformats.org/drawingml/2006/main">
+            <a:off x="838200" y="1826685"/>
+            <a:ext cx="10515600" cy="4351867"/>
+          </a:xfrm>
+          <a:prstGeom xmlns:a="http://schemas.openxmlformats.org/drawingml/2006/main" prst="rect">
+            <a:avLst/>
+          </a:prstGeom>
+          <a:noFill xmlns:a="http://schemas.openxmlformats.org/drawingml/2006/main"/>
+          <a:ln xmlns:a="http://schemas.openxmlformats.org/drawingml/2006/main">
+            <a:noFill/>
+          </a:ln>
+        </p:spPr>
+        <p:txBody>
+          <a:bodyPr xmlns:a="http://schemas.openxmlformats.org/drawingml/2006/main" vert="horz" wrap="square" lIns="65019" tIns="32509" rIns="65019" bIns="32509" anchor="t"/>
+          <a:lstStyle xmlns:a="http://schemas.openxmlformats.org/drawingml/2006/main"/>
+          <a:p xmlns:a="http://schemas.openxmlformats.org/drawingml/2006/main">
+            <a:pPr lvl="0">
+              <a:buNone/>
+            </a:pPr>
+            <a:r>
+              <a:t>单击此处编辑母版文本样式</a:t>
+            </a:r>
+          </a:p>
+          <a:p xmlns:a="http://schemas.openxmlformats.org/drawingml/2006/main">
+            <a:pPr lvl="1">
+              <a:buNone/>
+            </a:pPr>
+            <a:r>
+              <a:t>第二级</a:t>
+            </a:r>
+          </a:p>
+          <a:p xmlns:a="http://schemas.openxmlformats.org/drawingml/2006/main">
+            <a:pPr lvl="2">
+              <a:buNone/>
+            </a:pPr>
+            <a:r>
+              <a:t>第三级</a:t>
+            </a:r>
+          </a:p>
+          <a:p xmlns:a="http://schemas.openxmlformats.org/drawingml/2006/main">
+            <a:pPr lvl="3">
+              <a:buNone/>
+            </a:pPr>
+            <a:r>
+              <a:t>第四级</a:t>
+            </a:r>
+          </a:p>
+          <a:p xmlns:a="http://schemas.openxmlformats.org/drawingml/2006/main">
+            <a:pPr lvl="4">
+              <a:buNone/>
+            </a:pPr>
+            <a:r>
+              <a:t>第五级</a:t>
+            </a:r>
+          </a:p>
+        </p:txBody>
+      </p:sp>
+      <p:sp>
+        <p:nvSpPr>
+          <p:cNvPr id="4" name="日期占位符 3">
+            <a:extLst xmlns:a="http://schemas.openxmlformats.org/drawingml/2006/main">
+              <a:ext uri="{FF2B5EF4-FFF2-40B4-BE49-F238E27FC236}">
+                <a16:creationId xmlns:a16="http://schemas.microsoft.com/office/drawing/2014/main" id="{B5AE51F2-BF13-44FB-B6EE-C805CE8192E8}"/>
+              </a:ext>
+            </a:extLst>
+          </p:cNvPr>
+          <p:cNvSpPr>
+            <a:spLocks xmlns:a="http://schemas.openxmlformats.org/drawingml/2006/main" noGrp="1"/>
+          </p:cNvSpPr>
+          <p:nvPr>
+            <p:ph type="dt" idx="2"/>
+          </p:nvPr>
+        </p:nvSpPr>
+        <p:spPr>
+          <a:xfrm xmlns:a="http://schemas.openxmlformats.org/drawingml/2006/main">
+            <a:off x="838200" y="6356353"/>
+            <a:ext cx="2743200" cy="364067"/>
+          </a:xfrm>
+          <a:prstGeom xmlns:a="http://schemas.openxmlformats.org/drawingml/2006/main" prst="rect">
+            <a:avLst/>
+          </a:prstGeom>
+        </p:spPr>
+        <p:txBody>
+          <a:bodyPr xmlns:a="http://schemas.openxmlformats.org/drawingml/2006/main" vert="horz" lIns="65019" tIns="32509" rIns="65019" bIns="32509" anchor="ctr"/>
+          <a:lstStyle xmlns:a="http://schemas.openxmlformats.org/drawingml/2006/main">
+            <a:lvl1pPr algn="l" defTabSz="1218323">
+              <a:buNone/>
+              <a:defRPr sz="1200">
+                <a:solidFill>
+                  <a:prstClr val="black">
+                    <a:tint val="75000"/>
+                  </a:prstClr>
+                </a:solidFill>
+                <a:latin typeface="+mn-lt"/>
+                <a:ea typeface="+mn-lt"/>
+                <a:cs typeface="+mn-lt"/>
+              </a:defRPr>
+            </a:lvl1pPr>
+          </a:lstStyle>
+          <a:p xmlns:a="http://schemas.openxmlformats.org/drawingml/2006/main">
+            <a:pPr>
+              <a:buNone/>
+            </a:pPr>
+            <a:fld id="{292F71EF-02F8-4FDD-93F8-D030AB7FC83F}" type="datetimeFigureOut">
+              <a:t>2026/8/8</a:t>
+            </a:fld>
+            <a:endParaRPr/>
+          </a:p>
+        </p:txBody>
+      </p:sp>
+      <p:sp>
+        <p:nvSpPr>
+          <p:cNvPr id="5" name="页脚占位符 4">
+            <a:extLst xmlns:a="http://schemas.openxmlformats.org/drawingml/2006/main">
+              <a:ext uri="{FF2B5EF4-FFF2-40B4-BE49-F238E27FC236}">
+                <a16:creationId xmlns:a16="http://schemas.microsoft.com/office/drawing/2014/main" id="{1C3C0833-64E6-4AAE-80AE-D8AC86446527}"/>
+              </a:ext>
+            </a:extLst>
+          </p:cNvPr>
+          <p:cNvSpPr>
+            <a:spLocks xmlns:a="http://schemas.openxmlformats.org/drawingml/2006/main" noGrp="1"/>
+          </p:cNvSpPr>
+          <p:nvPr>
+            <p:ph type="ftr" idx="3"/>
+          </p:nvPr>
+        </p:nvSpPr>
+        <p:spPr>
+          <a:xfrm xmlns:a="http://schemas.openxmlformats.org/drawingml/2006/main">
+            <a:off x="4038600" y="6356353"/>
+            <a:ext cx="4114800" cy="364067"/>
+          </a:xfrm>
+          <a:prstGeom xmlns:a="http://schemas.openxmlformats.org/drawingml/2006/main" prst="rect">
+            <a:avLst/>
+          </a:prstGeom>
+        </p:spPr>
+        <p:txBody>
+          <a:bodyPr xmlns:a="http://schemas.openxmlformats.org/drawingml/2006/main" vert="horz" lIns="65019" tIns="32509" rIns="65019" bIns="32509" anchor="ctr"/>
+          <a:lstStyle xmlns:a="http://schemas.openxmlformats.org/drawingml/2006/main">
+            <a:lvl1pPr algn="ctr" defTabSz="1218323">
+              <a:buNone/>
+              <a:defRPr sz="1200">
+                <a:solidFill>
+                  <a:prstClr val="black">
+                    <a:tint val="75000"/>
+                  </a:prstClr>
+                </a:solidFill>
+                <a:latin typeface="+mn-lt"/>
+                <a:ea typeface="+mn-lt"/>
+                <a:cs typeface="+mn-lt"/>
+              </a:defRPr>
+            </a:lvl1pPr>
+          </a:lstStyle>
+          <a:p xmlns:a="http://schemas.openxmlformats.org/drawingml/2006/main">
+            <a:pPr>
+              <a:buNone/>
+            </a:pPr>
+            <a:endParaRPr/>
+          </a:p>
+        </p:txBody>
+      </p:sp>
+      <p:sp>
+        <p:nvSpPr>
+          <p:cNvPr id="6" name="灯片编号占位符 5">
+            <a:extLst xmlns:a="http://schemas.openxmlformats.org/drawingml/2006/main">
+              <a:ext uri="{FF2B5EF4-FFF2-40B4-BE49-F238E27FC236}">
+                <a16:creationId xmlns:a16="http://schemas.microsoft.com/office/drawing/2014/main" id="{4A99096A-1382-4351-9721-A174A78990FB}"/>
+              </a:ext>
+            </a:extLst>
+          </p:cNvPr>
+          <p:cNvSpPr>
+            <a:spLocks xmlns:a="http://schemas.openxmlformats.org/drawingml/2006/main" noGrp="1"/>
+          </p:cNvSpPr>
+          <p:nvPr>
+            <p:ph type="sldNum" idx="4"/>
+          </p:nvPr>
+        </p:nvSpPr>
+        <p:spPr>
+          <a:xfrm xmlns:a="http://schemas.openxmlformats.org/drawingml/2006/main">
+            <a:off x="8610600" y="6356353"/>
+            <a:ext cx="2743200" cy="364067"/>
+          </a:xfrm>
+          <a:prstGeom xmlns:a="http://schemas.openxmlformats.org/drawingml/2006/main" prst="rect">
+            <a:avLst/>
+          </a:prstGeom>
+        </p:spPr>
+        <p:txBody>
+          <a:bodyPr xmlns:a="http://schemas.openxmlformats.org/drawingml/2006/main" vert="horz" wrap="square" lIns="65019" tIns="32509" rIns="65019" bIns="32509" anchor="ctr"/>
+          <a:lstStyle xmlns:a="http://schemas.openxmlformats.org/drawingml/2006/main">
+            <a:lvl1pPr algn="r" defTabSz="1216630">
+              <a:buNone/>
+              <a:defRPr sz="1200">
+                <a:solidFill>
+                  <a:srgbClr val="898989"/>
+                </a:solidFill>
+              </a:defRPr>
+            </a:lvl1pPr>
+          </a:lstStyle>
+          <a:p xmlns:a="http://schemas.openxmlformats.org/drawingml/2006/main">
+            <a:pPr>
+              <a:buNone/>
+            </a:pPr>
+            <a:fld id="{D728AC88-674E-4151-AFDC-B7C47BAC839D}" type="slidenum">
+              <a:t>‹#›</a:t>
+            </a:fld>
+            <a:endParaRPr/>
+          </a:p>
+        </p:txBody>
+      </p:sp>
+    </p:spTree>
+  </p:cSld>
+  <p:clrMap bg1="lt1" tx1="dk1" bg2="lt2" tx2="dk2" accent1="accent1" accent2="accent2" accent3="accent3" accent4="accent4" accent5="accent5" accent6="accent6" hlink="hlink" folHlink="folHlink"/>
+  <p:sldLayoutIdLst>
+    <p:sldLayoutId xmlns:r="http://schemas.openxmlformats.org/officeDocument/2006/relationships" id="2147483664" r:id="Raa6484766c674950"/>
+    <p:sldLayoutId xmlns:r="http://schemas.openxmlformats.org/officeDocument/2006/relationships" id="2147483665" r:id="Rf2940f4da2894530"/>
+  </p:sldLayoutIdLst>
+  <p:txStyles>
+    <p:titleStyle>
+      <a:lvl1pPr xmlns:a="http://schemas.openxmlformats.org/drawingml/2006/main" algn="l" defTabSz="865272">
+        <a:lnSpc>
+          <a:spcPct val="90000"/>
+        </a:lnSpc>
+        <a:spcBef>
+          <a:spcPct val="0"/>
+        </a:spcBef>
+        <a:spcAft>
+          <a:spcPct val="0"/>
+        </a:spcAft>
+        <a:buNone/>
+        <a:defRPr sz="4133" kern="1200">
+          <a:solidFill>
+            <a:schemeClr val="tx1"/>
+          </a:solidFill>
+          <a:latin typeface="Calibri"/>
+          <a:ea typeface="Calibri"/>
+          <a:cs typeface="Calibri"/>
+        </a:defRPr>
+      </a:lvl1pPr>
+      <a:lvl2pPr xmlns:a="http://schemas.openxmlformats.org/drawingml/2006/main" algn="l" defTabSz="865272">
+        <a:lnSpc>
+          <a:spcPct val="90000"/>
+        </a:lnSpc>
+        <a:spcBef>
+          <a:spcPct val="0"/>
+        </a:spcBef>
+        <a:spcAft>
+          <a:spcPct val="0"/>
+        </a:spcAft>
+        <a:buNone/>
+        <a:defRPr sz="4133">
+          <a:solidFill>
+            <a:schemeClr val="tx1"/>
+          </a:solidFill>
+          <a:latin typeface="Calibri Light"/>
+          <a:ea typeface="Calibri Light"/>
+          <a:cs typeface="Calibri Light"/>
+        </a:defRPr>
+      </a:lvl2pPr>
+      <a:lvl3pPr xmlns:a="http://schemas.openxmlformats.org/drawingml/2006/main" algn="l" defTabSz="865272">
+        <a:lnSpc>
+          <a:spcPct val="90000"/>
+        </a:lnSpc>
+        <a:spcBef>
+          <a:spcPct val="0"/>
+        </a:spcBef>
+        <a:spcAft>
+          <a:spcPct val="0"/>
+        </a:spcAft>
+        <a:buNone/>
+        <a:defRPr sz="4133">
+          <a:solidFill>
+            <a:schemeClr val="tx1"/>
+          </a:solidFill>
+          <a:latin typeface="Calibri Light"/>
+          <a:ea typeface="Calibri Light"/>
+          <a:cs typeface="Calibri Light"/>
+        </a:defRPr>
+      </a:lvl3pPr>
+      <a:lvl4pPr xmlns:a="http://schemas.openxmlformats.org/drawingml/2006/main" algn="l" defTabSz="865272">
+        <a:lnSpc>
+          <a:spcPct val="90000"/>
+        </a:lnSpc>
+        <a:spcBef>
+          <a:spcPct val="0"/>
+        </a:spcBef>
+        <a:spcAft>
+          <a:spcPct val="0"/>
+        </a:spcAft>
+        <a:buNone/>
+        <a:defRPr sz="4133">
+          <a:solidFill>
+            <a:schemeClr val="tx1"/>
+          </a:solidFill>
+          <a:latin typeface="Calibri Light"/>
+          <a:ea typeface="Calibri Light"/>
+          <a:cs typeface="Calibri Light"/>
+        </a:defRPr>
+      </a:lvl4pPr>
+      <a:lvl5pPr xmlns:a="http://schemas.openxmlformats.org/drawingml/2006/main" algn="l" defTabSz="865272">
+        <a:lnSpc>
+          <a:spcPct val="90000"/>
+        </a:lnSpc>
+        <a:spcBef>
+          <a:spcPct val="0"/>
+        </a:spcBef>
+        <a:spcAft>
+          <a:spcPct val="0"/>
+        </a:spcAft>
+        <a:buNone/>
+        <a:defRPr sz="4133">
+          <a:solidFill>
+            <a:schemeClr val="tx1"/>
+          </a:solidFill>
+          <a:latin typeface="Calibri Light"/>
+          <a:ea typeface="Calibri Light"/>
+          <a:cs typeface="Calibri Light"/>
+        </a:defRPr>
+      </a:lvl5pPr>
+      <a:lvl6pPr xmlns:a="http://schemas.openxmlformats.org/drawingml/2006/main" marL="609585" algn="l" defTabSz="865272">
+        <a:lnSpc>
+          <a:spcPct val="90000"/>
+        </a:lnSpc>
+        <a:spcBef>
+          <a:spcPct val="0"/>
+        </a:spcBef>
+        <a:spcAft>
+          <a:spcPct val="0"/>
+        </a:spcAft>
+        <a:buNone/>
+        <a:defRPr sz="4133">
+          <a:solidFill>
+            <a:schemeClr val="tx1"/>
+          </a:solidFill>
+          <a:latin typeface="Calibri Light"/>
+          <a:ea typeface="Calibri Light"/>
+          <a:cs typeface="Calibri Light"/>
+        </a:defRPr>
+      </a:lvl6pPr>
+      <a:lvl7pPr xmlns:a="http://schemas.openxmlformats.org/drawingml/2006/main" marL="1219170" algn="l" defTabSz="865272">
+        <a:lnSpc>
+          <a:spcPct val="90000"/>
+        </a:lnSpc>
+        <a:spcBef>
+          <a:spcPct val="0"/>
+        </a:spcBef>
+        <a:spcAft>
+          <a:spcPct val="0"/>
+        </a:spcAft>
+        <a:buNone/>
+        <a:defRPr sz="4133">
+          <a:solidFill>
+            <a:schemeClr val="tx1"/>
+          </a:solidFill>
+          <a:latin typeface="Calibri Light"/>
+          <a:ea typeface="Calibri Light"/>
+          <a:cs typeface="Calibri Light"/>
+        </a:defRPr>
+      </a:lvl7pPr>
+      <a:lvl8pPr xmlns:a="http://schemas.openxmlformats.org/drawingml/2006/main" marL="1828754" algn="l" defTabSz="865272">
+        <a:lnSpc>
+          <a:spcPct val="90000"/>
+        </a:lnSpc>
+        <a:spcBef>
+          <a:spcPct val="0"/>
+        </a:spcBef>
+        <a:spcAft>
+          <a:spcPct val="0"/>
+        </a:spcAft>
+        <a:buNone/>
+        <a:defRPr sz="4133">
+          <a:solidFill>
+            <a:schemeClr val="tx1"/>
+          </a:solidFill>
+          <a:latin typeface="Calibri Light"/>
+          <a:ea typeface="Calibri Light"/>
+          <a:cs typeface="Calibri Light"/>
+        </a:defRPr>
+      </a:lvl8pPr>
+      <a:lvl9pPr xmlns:a="http://schemas.openxmlformats.org/drawingml/2006/main" marL="2438339" algn="l" defTabSz="865272">
+        <a:lnSpc>
+          <a:spcPct val="90000"/>
+        </a:lnSpc>
+        <a:spcBef>
+          <a:spcPct val="0"/>
+        </a:spcBef>
+        <a:spcAft>
+          <a:spcPct val="0"/>
+        </a:spcAft>
+        <a:buNone/>
+        <a:defRPr sz="4133">
+          <a:solidFill>
+            <a:schemeClr val="tx1"/>
+          </a:solidFill>
+          <a:latin typeface="Calibri Light"/>
+          <a:ea typeface="Calibri Light"/>
+          <a:cs typeface="Calibri Light"/>
+        </a:defRPr>
+      </a:lvl9pPr>
+    </p:titleStyle>
+    <p:bodyStyle>
+      <a:lvl1pPr xmlns:a="http://schemas.openxmlformats.org/drawingml/2006/main" marL="215895" indent="-215895" algn="l" defTabSz="865272">
+        <a:lnSpc>
+          <a:spcPct val="90000"/>
+        </a:lnSpc>
+        <a:spcBef>
+          <a:spcPts val="953"/>
+        </a:spcBef>
+        <a:spcAft>
+          <a:spcPct val="0"/>
+        </a:spcAft>
+        <a:buFont typeface="Arial"/>
+        <a:buChar char="•"/>
+        <a:defRPr sz="2667" kern="1200">
+          <a:solidFill>
+            <a:schemeClr val="tx1"/>
+          </a:solidFill>
+          <a:latin typeface="+mn-lt"/>
+          <a:ea typeface="+mn-lt"/>
+          <a:cs typeface="+mn-lt"/>
+        </a:defRPr>
+      </a:lvl1pPr>
+      <a:lvl2pPr xmlns:a="http://schemas.openxmlformats.org/drawingml/2006/main" marL="650224" indent="-215895" algn="l" defTabSz="865272">
+        <a:lnSpc>
+          <a:spcPct val="90000"/>
+        </a:lnSpc>
+        <a:spcBef>
+          <a:spcPts val="467"/>
+        </a:spcBef>
+        <a:spcAft>
+          <a:spcPct val="0"/>
+        </a:spcAft>
+        <a:buFont typeface="Arial"/>
+        <a:buChar char="•"/>
+        <a:defRPr sz="2267" kern="1200">
+          <a:solidFill>
+            <a:schemeClr val="tx1"/>
+          </a:solidFill>
+          <a:latin typeface="+mn-lt"/>
+          <a:ea typeface="+mn-lt"/>
+          <a:cs typeface="+mn-lt"/>
+        </a:defRPr>
+      </a:lvl2pPr>
+      <a:lvl3pPr xmlns:a="http://schemas.openxmlformats.org/drawingml/2006/main" marL="1082013" indent="-215895" algn="l" defTabSz="865272">
+        <a:lnSpc>
+          <a:spcPct val="90000"/>
+        </a:lnSpc>
+        <a:spcBef>
+          <a:spcPts val="467"/>
+        </a:spcBef>
+        <a:spcAft>
+          <a:spcPct val="0"/>
+        </a:spcAft>
+        <a:buFont typeface="Arial"/>
+        <a:buChar char="•"/>
+        <a:defRPr sz="1867" kern="1200">
+          <a:solidFill>
+            <a:schemeClr val="tx1"/>
+          </a:solidFill>
+          <a:latin typeface="+mn-lt"/>
+          <a:ea typeface="+mn-lt"/>
+          <a:cs typeface="+mn-lt"/>
+        </a:defRPr>
+      </a:lvl3pPr>
+      <a:lvl4pPr xmlns:a="http://schemas.openxmlformats.org/drawingml/2006/main" marL="1515495" indent="-215895" algn="l" defTabSz="865272">
+        <a:lnSpc>
+          <a:spcPct val="90000"/>
+        </a:lnSpc>
+        <a:spcBef>
+          <a:spcPts val="467"/>
+        </a:spcBef>
+        <a:spcAft>
+          <a:spcPct val="0"/>
+        </a:spcAft>
+        <a:buFont typeface="Arial"/>
+        <a:buChar char="•"/>
+        <a:defRPr sz="1733" kern="1200">
+          <a:solidFill>
+            <a:schemeClr val="tx1"/>
+          </a:solidFill>
+          <a:latin typeface="+mn-lt"/>
+          <a:ea typeface="+mn-lt"/>
+          <a:cs typeface="+mn-lt"/>
+        </a:defRPr>
+      </a:lvl4pPr>
+      <a:lvl5pPr xmlns:a="http://schemas.openxmlformats.org/drawingml/2006/main" marL="1949825" indent="-215895" algn="l" defTabSz="865272">
+        <a:lnSpc>
+          <a:spcPct val="90000"/>
+        </a:lnSpc>
+        <a:spcBef>
+          <a:spcPts val="467"/>
+        </a:spcBef>
+        <a:spcAft>
+          <a:spcPct val="0"/>
+        </a:spcAft>
+        <a:buFont typeface="Arial"/>
+        <a:buChar char="•"/>
+        <a:defRPr sz="1733" kern="1200">
+          <a:solidFill>
+            <a:schemeClr val="tx1"/>
+          </a:solidFill>
+          <a:latin typeface="+mn-lt"/>
+          <a:ea typeface="+mn-lt"/>
+          <a:cs typeface="+mn-lt"/>
+        </a:defRPr>
+      </a:lvl5pPr>
+      <a:lvl6pPr xmlns:a="http://schemas.openxmlformats.org/drawingml/2006/main" marL="2384154" indent="-216741" algn="l" defTabSz="866118">
+        <a:lnSpc>
+          <a:spcPct val="90000"/>
+        </a:lnSpc>
+        <a:spcBef>
+          <a:spcPts val="473"/>
+        </a:spcBef>
+        <a:buFont typeface="Arial"/>
+        <a:buChar char="•"/>
+        <a:defRPr sz="1733" kern="1200">
+          <a:solidFill>
+            <a:schemeClr val="tx1"/>
+          </a:solidFill>
+          <a:latin typeface="+mn-lt"/>
+          <a:ea typeface="+mn-lt"/>
+          <a:cs typeface="+mn-lt"/>
+        </a:defRPr>
+      </a:lvl6pPr>
+      <a:lvl7pPr xmlns:a="http://schemas.openxmlformats.org/drawingml/2006/main" marL="2817636" indent="-216741" algn="l" defTabSz="866118">
+        <a:lnSpc>
+          <a:spcPct val="90000"/>
+        </a:lnSpc>
+        <a:spcBef>
+          <a:spcPts val="473"/>
+        </a:spcBef>
+        <a:buFont typeface="Arial"/>
+        <a:buChar char="•"/>
+        <a:defRPr sz="1733" kern="1200">
+          <a:solidFill>
+            <a:schemeClr val="tx1"/>
+          </a:solidFill>
+          <a:latin typeface="+mn-lt"/>
+          <a:ea typeface="+mn-lt"/>
+          <a:cs typeface="+mn-lt"/>
+        </a:defRPr>
+      </a:lvl7pPr>
+      <a:lvl8pPr xmlns:a="http://schemas.openxmlformats.org/drawingml/2006/main" marL="3251119" indent="-216741" algn="l" defTabSz="866118">
+        <a:lnSpc>
+          <a:spcPct val="90000"/>
+        </a:lnSpc>
+        <a:spcBef>
+          <a:spcPts val="473"/>
+        </a:spcBef>
+        <a:buFont typeface="Arial"/>
+        <a:buChar char="•"/>
+        <a:defRPr sz="1733" kern="1200">
+          <a:solidFill>
+            <a:schemeClr val="tx1"/>
+          </a:solidFill>
+          <a:latin typeface="+mn-lt"/>
+          <a:ea typeface="+mn-lt"/>
+          <a:cs typeface="+mn-lt"/>
+        </a:defRPr>
+      </a:lvl8pPr>
+      <a:lvl9pPr xmlns:a="http://schemas.openxmlformats.org/drawingml/2006/main" marL="3684601" indent="-216741" algn="l" defTabSz="866118">
+        <a:lnSpc>
+          <a:spcPct val="90000"/>
+        </a:lnSpc>
+        <a:spcBef>
+          <a:spcPts val="473"/>
+        </a:spcBef>
+        <a:buFont typeface="Arial"/>
+        <a:buChar char="•"/>
+        <a:defRPr sz="1733" kern="1200">
+          <a:solidFill>
+            <a:schemeClr val="tx1"/>
+          </a:solidFill>
+          <a:latin typeface="+mn-lt"/>
+          <a:ea typeface="+mn-lt"/>
+          <a:cs typeface="+mn-lt"/>
+        </a:defRPr>
+      </a:lvl9pPr>
+    </p:bodyStyle>
+    <p:otherStyle>
+      <a:lvl1pPr xmlns:a="http://schemas.openxmlformats.org/drawingml/2006/main" marL="0" algn="l" defTabSz="866118">
+        <a:buNone/>
+        <a:defRPr sz="1733" kern="1200">
+          <a:solidFill>
+            <a:schemeClr val="tx1"/>
+          </a:solidFill>
+          <a:latin typeface="+mn-lt"/>
+          <a:ea typeface="+mn-lt"/>
+          <a:cs typeface="+mn-lt"/>
+        </a:defRPr>
+      </a:lvl1pPr>
+      <a:lvl2pPr xmlns:a="http://schemas.openxmlformats.org/drawingml/2006/main" marL="433482" algn="l" defTabSz="866118">
+        <a:buNone/>
+        <a:defRPr sz="1733" kern="1200">
+          <a:solidFill>
+            <a:schemeClr val="tx1"/>
+          </a:solidFill>
+          <a:latin typeface="+mn-lt"/>
+          <a:ea typeface="+mn-lt"/>
+          <a:cs typeface="+mn-lt"/>
+        </a:defRPr>
+      </a:lvl2pPr>
+      <a:lvl3pPr xmlns:a="http://schemas.openxmlformats.org/drawingml/2006/main" marL="866965" algn="l" defTabSz="866118">
+        <a:buNone/>
+        <a:defRPr sz="1733" kern="1200">
+          <a:solidFill>
+            <a:schemeClr val="tx1"/>
+          </a:solidFill>
+          <a:latin typeface="+mn-lt"/>
+          <a:ea typeface="+mn-lt"/>
+          <a:cs typeface="+mn-lt"/>
+        </a:defRPr>
+      </a:lvl3pPr>
+      <a:lvl4pPr xmlns:a="http://schemas.openxmlformats.org/drawingml/2006/main" marL="1300447" algn="l" defTabSz="866118">
+        <a:buNone/>
+        <a:defRPr sz="1733" kern="1200">
+          <a:solidFill>
+            <a:schemeClr val="tx1"/>
+          </a:solidFill>
+          <a:latin typeface="+mn-lt"/>
+          <a:ea typeface="+mn-lt"/>
+          <a:cs typeface="+mn-lt"/>
+        </a:defRPr>
+      </a:lvl4pPr>
+      <a:lvl5pPr xmlns:a="http://schemas.openxmlformats.org/drawingml/2006/main" marL="1733930" algn="l" defTabSz="866118">
+        <a:buNone/>
+        <a:defRPr sz="1733" kern="1200">
+          <a:solidFill>
+            <a:schemeClr val="tx1"/>
+          </a:solidFill>
+          <a:latin typeface="+mn-lt"/>
+          <a:ea typeface="+mn-lt"/>
+          <a:cs typeface="+mn-lt"/>
+        </a:defRPr>
+      </a:lvl5pPr>
+      <a:lvl6pPr xmlns:a="http://schemas.openxmlformats.org/drawingml/2006/main" marL="2167412" algn="l" defTabSz="866118">
+        <a:buNone/>
+        <a:defRPr sz="1733" kern="1200">
+          <a:solidFill>
+            <a:schemeClr val="tx1"/>
+          </a:solidFill>
+          <a:latin typeface="+mn-lt"/>
+          <a:ea typeface="+mn-lt"/>
+          <a:cs typeface="+mn-lt"/>
+        </a:defRPr>
+      </a:lvl6pPr>
+      <a:lvl7pPr xmlns:a="http://schemas.openxmlformats.org/drawingml/2006/main" marL="2600895" algn="l" defTabSz="866118">
+        <a:buNone/>
+        <a:defRPr sz="1733" kern="1200">
+          <a:solidFill>
+            <a:schemeClr val="tx1"/>
+          </a:solidFill>
+          <a:latin typeface="+mn-lt"/>
+          <a:ea typeface="+mn-lt"/>
+          <a:cs typeface="+mn-lt"/>
+        </a:defRPr>
+      </a:lvl7pPr>
+      <a:lvl8pPr xmlns:a="http://schemas.openxmlformats.org/drawingml/2006/main" marL="3034377" algn="l" defTabSz="866118">
+        <a:buNone/>
+        <a:defRPr sz="1733" kern="1200">
+          <a:solidFill>
+            <a:schemeClr val="tx1"/>
+          </a:solidFill>
+          <a:latin typeface="+mn-lt"/>
+          <a:ea typeface="+mn-lt"/>
+          <a:cs typeface="+mn-lt"/>
+        </a:defRPr>
+      </a:lvl8pPr>
+      <a:lvl9pPr xmlns:a="http://schemas.openxmlformats.org/drawingml/2006/main" marL="3467860" algn="l" defTabSz="866118">
+        <a:buNone/>
+        <a:defRPr sz="1733" kern="1200">
           <a:solidFill>
             <a:schemeClr val="tx1"/>
           </a:solidFill>
@@ -789,64 +5689,124 @@
 </file>
 
 <file path=ppt/slideMasters/theme/theme2.xml><?xml version="1.0" encoding="utf-8"?>
-<a:theme xmlns:a="http://schemas.openxmlformats.org/drawingml/2006/main" name="ChatGPT">
+<a:theme xmlns:a="http://schemas.openxmlformats.org/drawingml/2006/main" name="Office 主题​​">
   <a:themeElements>
-    <a:clrScheme name="ChatGPT">
+    <a:clrScheme name="Office">
       <a:dk1>
-        <a:srgbClr val="000000"/>
+        <a:sysClr val="windowText" lastClr="000000"/>
       </a:dk1>
       <a:lt1>
-        <a:srgbClr val="FFFFFF"/>
+        <a:sysClr val="window" lastClr="FFFFFF"/>
       </a:lt1>
       <a:dk2>
-        <a:srgbClr val="0E2841"/>
+        <a:srgbClr val="44546A"/>
       </a:dk2>
       <a:lt2>
-        <a:srgbClr val="E8E8E8"/>
+        <a:srgbClr val="E7E6E6"/>
       </a:lt2>
       <a:accent1>
-        <a:srgbClr val="156082"/>
+        <a:srgbClr val="4472C4"/>
       </a:accent1>
       <a:accent2>
-        <a:srgbClr val="E97132"/>
+        <a:srgbClr val="ED7D31"/>
       </a:accent2>
       <a:accent3>
-        <a:srgbClr val="196B24"/>
+        <a:srgbClr val="A5A5A5"/>
       </a:accent3>
       <a:accent4>
-        <a:srgbClr val="0F9ED5"/>
+        <a:srgbClr val="FFC000"/>
       </a:accent4>
       <a:accent5>
-        <a:srgbClr val="A02B93"/>
+        <a:srgbClr val="5B9BD5"/>
       </a:accent5>
       <a:accent6>
-        <a:srgbClr val="4EA72E"/>
+        <a:srgbClr val="70AD47"/>
       </a:accent6>
       <a:hlink>
-        <a:srgbClr val="467886"/>
+        <a:srgbClr val="0563C1"/>
       </a:hlink>
       <a:folHlink>
-        <a:srgbClr val="96607D"/>
+        <a:srgbClr val="954F72"/>
       </a:folHlink>
     </a:clrScheme>
     <a:fontScheme name="Office">
       <a:majorFont>
-        <a:latin typeface="Calibri Light"/>
-        <a:ea typeface="Calibri Light"/>
-        <a:cs typeface="Calibri Light"/>
+        <a:latin typeface="等线 Light"/>
+        <a:ea typeface=""/>
+        <a:cs typeface=""/>
+        <a:font script="Jpan" typeface="游ゴシック Light"/>
+        <a:font script="Hang" typeface="맑은 고딕"/>
+        <a:font script="Hans" typeface="等线 Light"/>
+        <a:font script="Hant" typeface="新細明體"/>
+        <a:font script="Arab" typeface="Times New Roman"/>
+        <a:font script="Hebr" typeface="Times New Roman"/>
+        <a:font script="Thai" typeface="Angsana New"/>
+        <a:font script="Ethi" typeface="Nyala"/>
+        <a:font script="Beng" typeface="Vrinda"/>
+        <a:font script="Gujr" typeface="Shruti"/>
+        <a:font script="Khmr" typeface="MoolBoran"/>
+        <a:font script="Knda" typeface="Tunga"/>
+        <a:font script="Guru" typeface="Raavi"/>
+        <a:font script="Cans" typeface="Euphemia"/>
+        <a:font script="Cher" typeface="Plantagenet Cherokee"/>
+        <a:font script="Yiii" typeface="Microsoft Yi Baiti"/>
+        <a:font script="Tibt" typeface="Microsoft Himalaya"/>
+        <a:font script="Thaa" typeface="MV Boli"/>
+        <a:font script="Deva" typeface="Mangal"/>
+        <a:font script="Telu" typeface="Gautami"/>
+        <a:font script="Taml" typeface="Latha"/>
+        <a:font script="Syrc" typeface="Estrangelo Edessa"/>
+        <a:font script="Orya" typeface="Kalinga"/>
+        <a:font script="Mlym" typeface="Kartika"/>
+        <a:font script="Laoo" typeface="DokChampa"/>
+        <a:font script="Sinh" typeface="Iskoola Pota"/>
+        <a:font script="Mong" typeface="Mongolian Baiti"/>
+        <a:font script="Viet" typeface="Times New Roman"/>
+        <a:font script="Uigh" typeface="Microsoft Uighur"/>
+        <a:font script="Geor" typeface="Sylfaen"/>
       </a:majorFont>
       <a:minorFont>
-        <a:latin typeface="Calibri"/>
-        <a:ea typeface="Calibri"/>
-        <a:cs typeface="Calibri"/>
+        <a:latin typeface="等线"/>
+        <a:ea typeface=""/>
+        <a:cs typeface=""/>
+        <a:font script="Jpan" typeface="游ゴシック"/>
+        <a:font script="Hang" typeface="맑은 고딕"/>
+        <a:font script="Hans" typeface="等线"/>
+        <a:font script="Hant" typeface="新細明體"/>
+        <a:font script="Arab" typeface="Arial"/>
+        <a:font script="Hebr" typeface="Arial"/>
+        <a:font script="Thai" typeface="Cordia New"/>
+        <a:font script="Ethi" typeface="Nyala"/>
+        <a:font script="Beng" typeface="Vrinda"/>
+        <a:font script="Gujr" typeface="Shruti"/>
+        <a:font script="Khmr" typeface="DaunPenh"/>
+        <a:font script="Knda" typeface="Tunga"/>
+        <a:font script="Guru" typeface="Raavi"/>
+        <a:font script="Cans" typeface="Euphemia"/>
+        <a:font script="Cher" typeface="Plantagenet Cherokee"/>
+        <a:font script="Yiii" typeface="Microsoft Yi Baiti"/>
+        <a:font script="Tibt" typeface="Microsoft Himalaya"/>
+        <a:font script="Thaa" typeface="MV Boli"/>
+        <a:font script="Deva" typeface="Mangal"/>
+        <a:font script="Telu" typeface="Gautami"/>
+        <a:font script="Taml" typeface="Latha"/>
+        <a:font script="Syrc" typeface="Estrangelo Edessa"/>
+        <a:font script="Orya" typeface="Kalinga"/>
+        <a:font script="Mlym" typeface="Kartika"/>
+        <a:font script="Laoo" typeface="DokChampa"/>
+        <a:font script="Sinh" typeface="Iskoola Pota"/>
+        <a:font script="Mong" typeface="Mongolian Baiti"/>
+        <a:font script="Viet" typeface="Arial"/>
+        <a:font script="Uigh" typeface="Microsoft Uighur"/>
+        <a:font script="Geor" typeface="Sylfaen"/>
       </a:minorFont>
     </a:fontScheme>
-    <a:fmtScheme name="ChatGPT">
+    <a:fmtScheme name="Office">
       <a:fillStyleLst>
         <a:solidFill>
           <a:schemeClr val="phClr"/>
         </a:solidFill>
-        <a:gradFill>
+        <a:gradFill rotWithShape="1">
           <a:gsLst>
             <a:gs pos="0">
               <a:schemeClr val="phClr">
@@ -872,7 +5832,7 @@
           </a:gsLst>
           <a:lin ang="5400000" scaled="0"/>
         </a:gradFill>
-        <a:gradFill>
+        <a:gradFill rotWithShape="1">
           <a:gsLst>
             <a:gs pos="0">
               <a:schemeClr val="phClr">
@@ -900,6 +5860,12 @@
         </a:gradFill>
       </a:fillStyleLst>
       <a:lnStyleLst>
+        <a:ln w="6350">
+          <a:solidFill>
+            <a:schemeClr val="phClr"/>
+          </a:solidFill>
+          <a:prstDash val="solid"/>
+        </a:ln>
         <a:ln w="12700">
           <a:solidFill>
             <a:schemeClr val="phClr"/>
@@ -907,12 +5873,6 @@
           <a:prstDash val="solid"/>
         </a:ln>
         <a:ln w="19050">
-          <a:solidFill>
-            <a:schemeClr val="phClr"/>
-          </a:solidFill>
-          <a:prstDash val="solid"/>
-        </a:ln>
-        <a:ln w="25400">
           <a:solidFill>
             <a:schemeClr val="phClr"/>
           </a:solidFill>
@@ -928,63 +5888,9 @@
         </a:effectStyle>
         <a:effectStyle>
           <a:effectLst>
-            <a:outerShdw blurRad="57150" dist="19050" dir="5400000">
+            <a:outerShdw blurRad="57150" dist="19050" dir="5400000" algn="ctr" rotWithShape="0">
               <a:srgbClr val="000000">
-                <a:alpha val="16000"/>
-              </a:srgbClr>
-            </a:outerShdw>
-          </a:effectLst>
-        </a:effectStyle>
-        <a:effectStyle>
-          <a:effectLst>
-            <a:outerShdw blurRad="19050" dist="9525" dir="5400000">
-              <a:srgbClr val="000000">
-                <a:alpha val="6000"/>
-              </a:srgbClr>
-            </a:outerShdw>
-          </a:effectLst>
-        </a:effectStyle>
-        <a:effectStyle>
-          <a:effectLst>
-            <a:outerShdw blurRad="28575" dist="9525" dir="5400000">
-              <a:srgbClr val="000000">
-                <a:alpha val="8000"/>
-              </a:srgbClr>
-            </a:outerShdw>
-          </a:effectLst>
-        </a:effectStyle>
-        <a:effectStyle>
-          <a:effectLst>
-            <a:outerShdw blurRad="57150" dist="19050" dir="5400000">
-              <a:srgbClr val="000000">
-                <a:alpha val="10000"/>
-              </a:srgbClr>
-            </a:outerShdw>
-          </a:effectLst>
-        </a:effectStyle>
-        <a:effectStyle>
-          <a:effectLst>
-            <a:outerShdw blurRad="114300" dist="38100" dir="5400000">
-              <a:srgbClr val="000000">
-                <a:alpha val="12000"/>
-              </a:srgbClr>
-            </a:outerShdw>
-          </a:effectLst>
-        </a:effectStyle>
-        <a:effectStyle>
-          <a:effectLst>
-            <a:outerShdw blurRad="171450" dist="57150" dir="5400000">
-              <a:srgbClr val="000000">
-                <a:alpha val="16000"/>
-              </a:srgbClr>
-            </a:outerShdw>
-          </a:effectLst>
-        </a:effectStyle>
-        <a:effectStyle>
-          <a:effectLst>
-            <a:outerShdw blurRad="266700" dist="95250" dir="5400000">
-              <a:srgbClr val="000000">
-                <a:alpha val="24000"/>
+                <a:alpha val="63000"/>
               </a:srgbClr>
             </a:outerShdw>
           </a:effectLst>
@@ -1000,7 +5906,509 @@
             <a:satMod val="170000"/>
           </a:schemeClr>
         </a:solidFill>
-        <a:gradFill>
+        <a:gradFill rotWithShape="1">
+          <a:gsLst>
+            <a:gs pos="0">
+              <a:schemeClr val="phClr">
+                <a:tint val="93000"/>
+                <a:shade val="98000"/>
+                <a:lumMod val="102000"/>
+                <a:satMod val="150000"/>
+              </a:schemeClr>
+            </a:gs>
+            <a:gs pos="50000">
+              <a:schemeClr val="phClr">
+                <a:tint val="98000"/>
+                <a:shade val="90000"/>
+                <a:lumMod val="103000"/>
+                <a:satMod val="130000"/>
+              </a:schemeClr>
+            </a:gs>
+            <a:gs pos="100000">
+              <a:schemeClr val="phClr">
+                <a:shade val="63000"/>
+                <a:satMod val="120000"/>
+              </a:schemeClr>
+            </a:gs>
+          </a:gsLst>
+          <a:lin ang="5400000" scaled="0"/>
+        </a:gradFill>
+      </a:bgFillStyleLst>
+    </a:fmtScheme>
+  </a:themeElements>
+</a:theme>
+</file>
+
+<file path=ppt/slideMasters/theme/theme3.xml><?xml version="1.0" encoding="utf-8"?>
+<a:theme xmlns:a="http://schemas.openxmlformats.org/drawingml/2006/main" name="2_自定义设计方案">
+  <a:themeElements>
+    <a:clrScheme name="Office">
+      <a:dk1>
+        <a:sysClr val="windowText" lastClr="000000"/>
+      </a:dk1>
+      <a:lt1>
+        <a:sysClr val="window" lastClr="FFFFFF"/>
+      </a:lt1>
+      <a:dk2>
+        <a:srgbClr val="1F497D"/>
+      </a:dk2>
+      <a:lt2>
+        <a:srgbClr val="EEECE1"/>
+      </a:lt2>
+      <a:accent1>
+        <a:srgbClr val="4F81BD"/>
+      </a:accent1>
+      <a:accent2>
+        <a:srgbClr val="C0504D"/>
+      </a:accent2>
+      <a:accent3>
+        <a:srgbClr val="9BBB59"/>
+      </a:accent3>
+      <a:accent4>
+        <a:srgbClr val="8064A2"/>
+      </a:accent4>
+      <a:accent5>
+        <a:srgbClr val="4BACC6"/>
+      </a:accent5>
+      <a:accent6>
+        <a:srgbClr val="F79646"/>
+      </a:accent6>
+      <a:hlink>
+        <a:srgbClr val="0000FF"/>
+      </a:hlink>
+      <a:folHlink>
+        <a:srgbClr val="800080"/>
+      </a:folHlink>
+    </a:clrScheme>
+    <a:fontScheme name="Office">
+      <a:majorFont>
+        <a:latin typeface="Calibri Light"/>
+        <a:ea typeface=""/>
+        <a:cs typeface=""/>
+        <a:font script="Jpan" typeface="ＭＳ Ｐゴシック"/>
+        <a:font script="Hang" typeface="맑은 고딕"/>
+        <a:font script="Hans" typeface="宋体"/>
+        <a:font script="Hant" typeface="新細明體"/>
+        <a:font script="Arab" typeface="Times New Roman"/>
+        <a:font script="Hebr" typeface="Times New Roman"/>
+        <a:font script="Thai" typeface="Angsana New"/>
+        <a:font script="Ethi" typeface="Nyala"/>
+        <a:font script="Beng" typeface="Vrinda"/>
+        <a:font script="Gujr" typeface="Shruti"/>
+        <a:font script="Khmr" typeface="MoolBoran"/>
+        <a:font script="Knda" typeface="Tunga"/>
+        <a:font script="Guru" typeface="Raavi"/>
+        <a:font script="Cans" typeface="Euphemia"/>
+        <a:font script="Cher" typeface="Plantagenet Cherokee"/>
+        <a:font script="Yiii" typeface="Microsoft Yi Baiti"/>
+        <a:font script="Tibt" typeface="Microsoft Himalaya"/>
+        <a:font script="Thaa" typeface="MV Boli"/>
+        <a:font script="Deva" typeface="Mangal"/>
+        <a:font script="Telu" typeface="Gautami"/>
+        <a:font script="Taml" typeface="Latha"/>
+        <a:font script="Syrc" typeface="Estrangelo Edessa"/>
+        <a:font script="Orya" typeface="Kalinga"/>
+        <a:font script="Mlym" typeface="Kartika"/>
+        <a:font script="Laoo" typeface="DokChampa"/>
+        <a:font script="Sinh" typeface="Iskoola Pota"/>
+        <a:font script="Mong" typeface="Mongolian Baiti"/>
+        <a:font script="Viet" typeface="Times New Roman"/>
+        <a:font script="Uigh" typeface="Microsoft Uighur"/>
+        <a:font script="Geor" typeface="Sylfaen"/>
+      </a:majorFont>
+      <a:minorFont>
+        <a:latin typeface="Calibri"/>
+        <a:ea typeface=""/>
+        <a:cs typeface=""/>
+        <a:font script="Jpan" typeface="ＭＳ Ｐゴシック"/>
+        <a:font script="Hang" typeface="맑은 고딕"/>
+        <a:font script="Hans" typeface="宋体"/>
+        <a:font script="Hant" typeface="新細明體"/>
+        <a:font script="Arab" typeface="Arial"/>
+        <a:font script="Hebr" typeface="Arial"/>
+        <a:font script="Thai" typeface="Cordia New"/>
+        <a:font script="Ethi" typeface="Nyala"/>
+        <a:font script="Beng" typeface="Vrinda"/>
+        <a:font script="Gujr" typeface="Shruti"/>
+        <a:font script="Khmr" typeface="DaunPenh"/>
+        <a:font script="Knda" typeface="Tunga"/>
+        <a:font script="Guru" typeface="Raavi"/>
+        <a:font script="Cans" typeface="Euphemia"/>
+        <a:font script="Cher" typeface="Plantagenet Cherokee"/>
+        <a:font script="Yiii" typeface="Microsoft Yi Baiti"/>
+        <a:font script="Tibt" typeface="Microsoft Himalaya"/>
+        <a:font script="Thaa" typeface="MV Boli"/>
+        <a:font script="Deva" typeface="Mangal"/>
+        <a:font script="Telu" typeface="Gautami"/>
+        <a:font script="Taml" typeface="Latha"/>
+        <a:font script="Syrc" typeface="Estrangelo Edessa"/>
+        <a:font script="Orya" typeface="Kalinga"/>
+        <a:font script="Mlym" typeface="Kartika"/>
+        <a:font script="Laoo" typeface="DokChampa"/>
+        <a:font script="Sinh" typeface="Iskoola Pota"/>
+        <a:font script="Mong" typeface="Mongolian Baiti"/>
+        <a:font script="Viet" typeface="Arial"/>
+        <a:font script="Uigh" typeface="Microsoft Uighur"/>
+        <a:font script="Geor" typeface="Sylfaen"/>
+      </a:minorFont>
+    </a:fontScheme>
+    <a:fmtScheme name="Office">
+      <a:fillStyleLst>
+        <a:solidFill>
+          <a:schemeClr val="phClr"/>
+        </a:solidFill>
+        <a:gradFill rotWithShape="1">
+          <a:gsLst>
+            <a:gs pos="0">
+              <a:schemeClr val="phClr">
+                <a:tint val="67000"/>
+                <a:lumMod val="110000"/>
+                <a:satMod val="105000"/>
+              </a:schemeClr>
+            </a:gs>
+            <a:gs pos="50000">
+              <a:schemeClr val="phClr">
+                <a:tint val="73000"/>
+                <a:lumMod val="105000"/>
+                <a:satMod val="103000"/>
+              </a:schemeClr>
+            </a:gs>
+            <a:gs pos="100000">
+              <a:schemeClr val="phClr">
+                <a:tint val="81000"/>
+                <a:lumMod val="105000"/>
+                <a:satMod val="109000"/>
+              </a:schemeClr>
+            </a:gs>
+          </a:gsLst>
+          <a:lin ang="5400000" scaled="0"/>
+        </a:gradFill>
+        <a:gradFill rotWithShape="1">
+          <a:gsLst>
+            <a:gs pos="0">
+              <a:schemeClr val="phClr">
+                <a:tint val="94000"/>
+                <a:lumMod val="102000"/>
+                <a:satMod val="103000"/>
+              </a:schemeClr>
+            </a:gs>
+            <a:gs pos="50000">
+              <a:schemeClr val="phClr">
+                <a:shade val="100000"/>
+                <a:lumMod val="100000"/>
+                <a:satMod val="110000"/>
+              </a:schemeClr>
+            </a:gs>
+            <a:gs pos="100000">
+              <a:schemeClr val="phClr">
+                <a:shade val="78000"/>
+                <a:lumMod val="99000"/>
+                <a:satMod val="120000"/>
+              </a:schemeClr>
+            </a:gs>
+          </a:gsLst>
+          <a:lin ang="5400000" scaled="0"/>
+        </a:gradFill>
+      </a:fillStyleLst>
+      <a:lnStyleLst>
+        <a:ln w="6350">
+          <a:solidFill>
+            <a:schemeClr val="phClr"/>
+          </a:solidFill>
+          <a:prstDash val="solid"/>
+        </a:ln>
+        <a:ln w="12700">
+          <a:solidFill>
+            <a:schemeClr val="phClr"/>
+          </a:solidFill>
+          <a:prstDash val="solid"/>
+        </a:ln>
+        <a:ln w="19050">
+          <a:solidFill>
+            <a:schemeClr val="phClr"/>
+          </a:solidFill>
+          <a:prstDash val="solid"/>
+        </a:ln>
+      </a:lnStyleLst>
+      <a:effectStyleLst>
+        <a:effectStyle>
+          <a:effectLst/>
+        </a:effectStyle>
+        <a:effectStyle>
+          <a:effectLst/>
+        </a:effectStyle>
+        <a:effectStyle>
+          <a:effectLst>
+            <a:outerShdw blurRad="57150" dist="19050" dir="5400000" algn="ctr" rotWithShape="0">
+              <a:srgbClr val="000000">
+                <a:alpha val="63000"/>
+              </a:srgbClr>
+            </a:outerShdw>
+          </a:effectLst>
+        </a:effectStyle>
+      </a:effectStyleLst>
+      <a:bgFillStyleLst>
+        <a:solidFill>
+          <a:schemeClr val="phClr"/>
+        </a:solidFill>
+        <a:solidFill>
+          <a:schemeClr val="phClr">
+            <a:tint val="95000"/>
+            <a:satMod val="170000"/>
+          </a:schemeClr>
+        </a:solidFill>
+        <a:gradFill rotWithShape="1">
+          <a:gsLst>
+            <a:gs pos="0">
+              <a:schemeClr val="phClr">
+                <a:tint val="93000"/>
+                <a:shade val="98000"/>
+                <a:lumMod val="102000"/>
+                <a:satMod val="150000"/>
+              </a:schemeClr>
+            </a:gs>
+            <a:gs pos="50000">
+              <a:schemeClr val="phClr">
+                <a:tint val="98000"/>
+                <a:shade val="90000"/>
+                <a:lumMod val="103000"/>
+                <a:satMod val="130000"/>
+              </a:schemeClr>
+            </a:gs>
+            <a:gs pos="100000">
+              <a:schemeClr val="phClr">
+                <a:shade val="63000"/>
+                <a:satMod val="120000"/>
+              </a:schemeClr>
+            </a:gs>
+          </a:gsLst>
+          <a:lin ang="5400000" scaled="0"/>
+        </a:gradFill>
+      </a:bgFillStyleLst>
+    </a:fmtScheme>
+  </a:themeElements>
+</a:theme>
+</file>
+
+<file path=ppt/slideMasters/theme/theme4.xml><?xml version="1.0" encoding="utf-8"?>
+<a:theme xmlns:a="http://schemas.openxmlformats.org/drawingml/2006/main" name="3_自定义设计方案">
+  <a:themeElements>
+    <a:clrScheme name="Office">
+      <a:dk1>
+        <a:sysClr val="windowText" lastClr="000000"/>
+      </a:dk1>
+      <a:lt1>
+        <a:sysClr val="window" lastClr="FFFFFF"/>
+      </a:lt1>
+      <a:dk2>
+        <a:srgbClr val="1F497D"/>
+      </a:dk2>
+      <a:lt2>
+        <a:srgbClr val="EEECE1"/>
+      </a:lt2>
+      <a:accent1>
+        <a:srgbClr val="4F81BD"/>
+      </a:accent1>
+      <a:accent2>
+        <a:srgbClr val="C0504D"/>
+      </a:accent2>
+      <a:accent3>
+        <a:srgbClr val="9BBB59"/>
+      </a:accent3>
+      <a:accent4>
+        <a:srgbClr val="8064A2"/>
+      </a:accent4>
+      <a:accent5>
+        <a:srgbClr val="4BACC6"/>
+      </a:accent5>
+      <a:accent6>
+        <a:srgbClr val="F79646"/>
+      </a:accent6>
+      <a:hlink>
+        <a:srgbClr val="0000FF"/>
+      </a:hlink>
+      <a:folHlink>
+        <a:srgbClr val="800080"/>
+      </a:folHlink>
+    </a:clrScheme>
+    <a:fontScheme name="Office">
+      <a:majorFont>
+        <a:latin typeface="Calibri Light"/>
+        <a:ea typeface=""/>
+        <a:cs typeface=""/>
+        <a:font script="Jpan" typeface="ＭＳ Ｐゴシック"/>
+        <a:font script="Hang" typeface="맑은 고딕"/>
+        <a:font script="Hans" typeface="宋体"/>
+        <a:font script="Hant" typeface="新細明體"/>
+        <a:font script="Arab" typeface="Times New Roman"/>
+        <a:font script="Hebr" typeface="Times New Roman"/>
+        <a:font script="Thai" typeface="Angsana New"/>
+        <a:font script="Ethi" typeface="Nyala"/>
+        <a:font script="Beng" typeface="Vrinda"/>
+        <a:font script="Gujr" typeface="Shruti"/>
+        <a:font script="Khmr" typeface="MoolBoran"/>
+        <a:font script="Knda" typeface="Tunga"/>
+        <a:font script="Guru" typeface="Raavi"/>
+        <a:font script="Cans" typeface="Euphemia"/>
+        <a:font script="Cher" typeface="Plantagenet Cherokee"/>
+        <a:font script="Yiii" typeface="Microsoft Yi Baiti"/>
+        <a:font script="Tibt" typeface="Microsoft Himalaya"/>
+        <a:font script="Thaa" typeface="MV Boli"/>
+        <a:font script="Deva" typeface="Mangal"/>
+        <a:font script="Telu" typeface="Gautami"/>
+        <a:font script="Taml" typeface="Latha"/>
+        <a:font script="Syrc" typeface="Estrangelo Edessa"/>
+        <a:font script="Orya" typeface="Kalinga"/>
+        <a:font script="Mlym" typeface="Kartika"/>
+        <a:font script="Laoo" typeface="DokChampa"/>
+        <a:font script="Sinh" typeface="Iskoola Pota"/>
+        <a:font script="Mong" typeface="Mongolian Baiti"/>
+        <a:font script="Viet" typeface="Times New Roman"/>
+        <a:font script="Uigh" typeface="Microsoft Uighur"/>
+        <a:font script="Geor" typeface="Sylfaen"/>
+      </a:majorFont>
+      <a:minorFont>
+        <a:latin typeface="Calibri"/>
+        <a:ea typeface=""/>
+        <a:cs typeface=""/>
+        <a:font script="Jpan" typeface="ＭＳ Ｐゴシック"/>
+        <a:font script="Hang" typeface="맑은 고딕"/>
+        <a:font script="Hans" typeface="宋体"/>
+        <a:font script="Hant" typeface="新細明體"/>
+        <a:font script="Arab" typeface="Arial"/>
+        <a:font script="Hebr" typeface="Arial"/>
+        <a:font script="Thai" typeface="Cordia New"/>
+        <a:font script="Ethi" typeface="Nyala"/>
+        <a:font script="Beng" typeface="Vrinda"/>
+        <a:font script="Gujr" typeface="Shruti"/>
+        <a:font script="Khmr" typeface="DaunPenh"/>
+        <a:font script="Knda" typeface="Tunga"/>
+        <a:font script="Guru" typeface="Raavi"/>
+        <a:font script="Cans" typeface="Euphemia"/>
+        <a:font script="Cher" typeface="Plantagenet Cherokee"/>
+        <a:font script="Yiii" typeface="Microsoft Yi Baiti"/>
+        <a:font script="Tibt" typeface="Microsoft Himalaya"/>
+        <a:font script="Thaa" typeface="MV Boli"/>
+        <a:font script="Deva" typeface="Mangal"/>
+        <a:font script="Telu" typeface="Gautami"/>
+        <a:font script="Taml" typeface="Latha"/>
+        <a:font script="Syrc" typeface="Estrangelo Edessa"/>
+        <a:font script="Orya" typeface="Kalinga"/>
+        <a:font script="Mlym" typeface="Kartika"/>
+        <a:font script="Laoo" typeface="DokChampa"/>
+        <a:font script="Sinh" typeface="Iskoola Pota"/>
+        <a:font script="Mong" typeface="Mongolian Baiti"/>
+        <a:font script="Viet" typeface="Arial"/>
+        <a:font script="Uigh" typeface="Microsoft Uighur"/>
+        <a:font script="Geor" typeface="Sylfaen"/>
+      </a:minorFont>
+    </a:fontScheme>
+    <a:fmtScheme name="Office">
+      <a:fillStyleLst>
+        <a:solidFill>
+          <a:schemeClr val="phClr"/>
+        </a:solidFill>
+        <a:gradFill rotWithShape="1">
+          <a:gsLst>
+            <a:gs pos="0">
+              <a:schemeClr val="phClr">
+                <a:tint val="67000"/>
+                <a:lumMod val="110000"/>
+                <a:satMod val="105000"/>
+              </a:schemeClr>
+            </a:gs>
+            <a:gs pos="50000">
+              <a:schemeClr val="phClr">
+                <a:tint val="73000"/>
+                <a:lumMod val="105000"/>
+                <a:satMod val="103000"/>
+              </a:schemeClr>
+            </a:gs>
+            <a:gs pos="100000">
+              <a:schemeClr val="phClr">
+                <a:tint val="81000"/>
+                <a:lumMod val="105000"/>
+                <a:satMod val="109000"/>
+              </a:schemeClr>
+            </a:gs>
+          </a:gsLst>
+          <a:lin ang="5400000" scaled="0"/>
+        </a:gradFill>
+        <a:gradFill rotWithShape="1">
+          <a:gsLst>
+            <a:gs pos="0">
+              <a:schemeClr val="phClr">
+                <a:tint val="94000"/>
+                <a:lumMod val="102000"/>
+                <a:satMod val="103000"/>
+              </a:schemeClr>
+            </a:gs>
+            <a:gs pos="50000">
+              <a:schemeClr val="phClr">
+                <a:shade val="100000"/>
+                <a:lumMod val="100000"/>
+                <a:satMod val="110000"/>
+              </a:schemeClr>
+            </a:gs>
+            <a:gs pos="100000">
+              <a:schemeClr val="phClr">
+                <a:shade val="78000"/>
+                <a:lumMod val="99000"/>
+                <a:satMod val="120000"/>
+              </a:schemeClr>
+            </a:gs>
+          </a:gsLst>
+          <a:lin ang="5400000" scaled="0"/>
+        </a:gradFill>
+      </a:fillStyleLst>
+      <a:lnStyleLst>
+        <a:ln w="6350">
+          <a:solidFill>
+            <a:schemeClr val="phClr"/>
+          </a:solidFill>
+          <a:prstDash val="solid"/>
+        </a:ln>
+        <a:ln w="12700">
+          <a:solidFill>
+            <a:schemeClr val="phClr"/>
+          </a:solidFill>
+          <a:prstDash val="solid"/>
+        </a:ln>
+        <a:ln w="19050">
+          <a:solidFill>
+            <a:schemeClr val="phClr"/>
+          </a:solidFill>
+          <a:prstDash val="solid"/>
+        </a:ln>
+      </a:lnStyleLst>
+      <a:effectStyleLst>
+        <a:effectStyle>
+          <a:effectLst/>
+        </a:effectStyle>
+        <a:effectStyle>
+          <a:effectLst/>
+        </a:effectStyle>
+        <a:effectStyle>
+          <a:effectLst>
+            <a:outerShdw blurRad="57150" dist="19050" dir="5400000" algn="ctr" rotWithShape="0">
+              <a:srgbClr val="000000">
+                <a:alpha val="63000"/>
+              </a:srgbClr>
+            </a:outerShdw>
+          </a:effectLst>
+        </a:effectStyle>
+      </a:effectStyleLst>
+      <a:bgFillStyleLst>
+        <a:solidFill>
+          <a:schemeClr val="phClr"/>
+        </a:solidFill>
+        <a:solidFill>
+          <a:schemeClr val="phClr">
+            <a:tint val="95000"/>
+            <a:satMod val="170000"/>
+          </a:schemeClr>
+        </a:solidFill>
+        <a:gradFill rotWithShape="1">
           <a:gsLst>
             <a:gs pos="0">
               <a:schemeClr val="phClr">
@@ -1036,13 +6444,6 @@
 <file path=ppt/slides/slide1.xml><?xml version="1.0" encoding="utf-8"?>
 <p:sld xmlns:p="http://schemas.openxmlformats.org/presentationml/2006/main">
   <p:cSld>
-    <p:bg>
-      <p:bgPr>
-        <a:solidFill xmlns:a="http://schemas.openxmlformats.org/drawingml/2006/main">
-          <a:srgbClr val="F7FAFC"/>
-        </a:solidFill>
-      </p:bgPr>
-    </p:bg>
     <p:spTree>
       <p:nvGrpSpPr>
         <p:cNvPr id="1" name=""/>
@@ -1054,10 +6455,10 @@
       </p:grpSpPr>
       <p:sp>
         <p:nvSpPr>
-          <p:cNvPr id="22" name="">
-            <a:extLst xmlns:a="http://schemas.openxmlformats.org/drawingml/2006/main">
-              <a:ext uri="{FF2B5EF4-FFF2-40B4-BE49-F238E27FC236}">
-                <a16:creationId xmlns:a16="http://schemas.microsoft.com/office/drawing/2014/main" id="{EA59DB0F-0A2E-4AF4-9B66-13241CCBD7C6}"/>
+          <p:cNvPr id="5" name="文本框 4">
+            <a:extLst xmlns:a="http://schemas.openxmlformats.org/drawingml/2006/main">
+              <a:ext uri="{FF2B5EF4-FFF2-40B4-BE49-F238E27FC236}">
+                <a16:creationId xmlns:a16="http://schemas.microsoft.com/office/drawing/2014/main" id="{0A32DC30-C2A0-B777-A0BD-E3A71B0442C1}"/>
               </a:ext>
             </a:extLst>
           </p:cNvPr>
@@ -1068,54 +6469,48 @@
         </p:nvSpPr>
         <p:spPr>
           <a:xfrm xmlns:a="http://schemas.openxmlformats.org/drawingml/2006/main">
-            <a:off x="685800" y="400050"/>
-            <a:ext cx="8382000" cy="457200"/>
+            <a:off x="86140" y="846307"/>
+            <a:ext cx="11911467" cy="461665"/>
           </a:xfrm>
           <a:prstGeom xmlns:a="http://schemas.openxmlformats.org/drawingml/2006/main" prst="rect">
             <a:avLst/>
           </a:prstGeom>
           <a:noFill xmlns:a="http://schemas.openxmlformats.org/drawingml/2006/main"/>
-          <a:ln xmlns:a="http://schemas.openxmlformats.org/drawingml/2006/main" w="0">
-            <a:noFill/>
-            <a:prstDash val="solid"/>
-          </a:ln>
         </p:spPr>
         <p:txBody>
-          <a:bodyPr xmlns:a="http://schemas.openxmlformats.org/drawingml/2006/main" lIns="0" tIns="0" rIns="0" bIns="0" anchor="ctr">
-            <a:normAutofit fontScale="100000"/>
+          <a:bodyPr xmlns:a="http://schemas.openxmlformats.org/drawingml/2006/main" wrap="square">
+            <a:noAutofit/>
           </a:bodyPr>
           <a:lstStyle xmlns:a="http://schemas.openxmlformats.org/drawingml/2006/main"/>
           <a:p xmlns:a="http://schemas.openxmlformats.org/drawingml/2006/main">
-            <a:pPr algn="l">
-              <a:defRPr sz="2700" b="1">
-                <a:solidFill>
-                  <a:srgbClr val="1677C8"/>
-                </a:solidFill>
-                <a:latin typeface="Microsoft YaHei"/>
-                <a:ea typeface="Microsoft YaHei"/>
-                <a:cs typeface="Microsoft YaHei"/>
+            <a:pPr marL="323850">
+              <a:buNone/>
+              <a:defRPr sz="2250" b="1">
+                <a:latin typeface="HYWenRunSongYun U"/>
+                <a:ea typeface="HYWenRunSongYun U"/>
+                <a:cs typeface="HYWenRunSongYun U"/>
               </a:defRPr>
             </a:pPr>
             <a:r>
-              <a:rPr sz="2700" b="1">
+              <a:rPr sz="2250" b="1" spc="-150">
                 <a:solidFill>
-                  <a:srgbClr val="1677C8"/>
+                  <a:schemeClr val="bg1"/>
                 </a:solidFill>
-                <a:latin typeface="Microsoft YaHei"/>
-                <a:ea typeface="Microsoft YaHei"/>
-                <a:cs typeface="Microsoft YaHei"/>
+                <a:latin typeface="HYWenRunSongYun U"/>
+                <a:ea typeface="HYWenRunSongYun U"/>
+                <a:cs typeface="HYWenRunSongYun U"/>
               </a:rPr>
-              <a:t>顺序流程</a:t>
+              <a:t>工作流程的步骤扩展｜4项</a:t>
             </a:r>
           </a:p>
         </p:txBody>
       </p:sp>
       <p:sp>
         <p:nvSpPr>
-          <p:cNvPr id="2" name="">
-            <a:extLst xmlns:a="http://schemas.openxmlformats.org/drawingml/2006/main">
-              <a:ext uri="{FF2B5EF4-FFF2-40B4-BE49-F238E27FC236}">
-                <a16:creationId xmlns:a16="http://schemas.microsoft.com/office/drawing/2014/main" id="{4A3D313D-5974-44E8-9F2A-BA67A819BD87}"/>
+          <p:cNvPr id="7" name="文本框 6">
+            <a:extLst xmlns:a="http://schemas.openxmlformats.org/drawingml/2006/main">
+              <a:ext uri="{FF2B5EF4-FFF2-40B4-BE49-F238E27FC236}">
+                <a16:creationId xmlns:a16="http://schemas.microsoft.com/office/drawing/2014/main" id="{E5C6A7C2-09F8-0206-1327-C63D0456D05C}"/>
               </a:ext>
             </a:extLst>
           </p:cNvPr>
@@ -1126,54 +6521,146 @@
         </p:nvSpPr>
         <p:spPr>
           <a:xfrm xmlns:a="http://schemas.openxmlformats.org/drawingml/2006/main">
-            <a:off x="704850" y="876300"/>
-            <a:ext cx="4953000" cy="247650"/>
+            <a:off x="941707" y="303885"/>
+            <a:ext cx="1694813" cy="430887"/>
           </a:xfrm>
           <a:prstGeom xmlns:a="http://schemas.openxmlformats.org/drawingml/2006/main" prst="rect">
             <a:avLst/>
           </a:prstGeom>
           <a:noFill xmlns:a="http://schemas.openxmlformats.org/drawingml/2006/main"/>
-          <a:ln xmlns:a="http://schemas.openxmlformats.org/drawingml/2006/main" w="0">
-            <a:noFill/>
-            <a:prstDash val="solid"/>
+        </p:spPr>
+        <p:txBody>
+          <a:bodyPr xmlns:a="http://schemas.openxmlformats.org/drawingml/2006/main" wrap="square">
+            <a:spAutoFit/>
+          </a:bodyPr>
+          <a:lstStyle xmlns:a="http://schemas.openxmlformats.org/drawingml/2006/main"/>
+          <a:p xmlns:a="http://schemas.openxmlformats.org/drawingml/2006/main">
+            <a:r>
+              <a:rPr sz="2200">
+                <a:solidFill>
+                  <a:schemeClr val="tx1">
+                    <a:lumMod val="75000"/>
+                    <a:lumOff val="25000"/>
+                  </a:schemeClr>
+                </a:solidFill>
+                <a:latin typeface="汉仪粗宋简"/>
+                <a:ea typeface="汉仪粗宋简"/>
+                <a:cs typeface="汉仪粗宋简"/>
+              </a:rPr>
+              <a:t>顺序关系</a:t>
+            </a:r>
+            <a:endParaRPr sz="2200">
+              <a:solidFill>
+                <a:schemeClr val="tx1">
+                  <a:lumMod val="75000"/>
+                  <a:lumOff val="25000"/>
+                </a:schemeClr>
+              </a:solidFill>
+              <a:latin typeface="汉仪粗宋简"/>
+              <a:ea typeface="汉仪粗宋简"/>
+              <a:cs typeface="汉仪粗宋简"/>
+            </a:endParaRPr>
+          </a:p>
+        </p:txBody>
+      </p:sp>
+      <p:sp>
+        <p:nvSpPr>
+          <p:cNvPr id="8" name="直接连接符 7">
+            <a:extLst xmlns:a="http://schemas.openxmlformats.org/drawingml/2006/main">
+              <a:ext uri="{FF2B5EF4-FFF2-40B4-BE49-F238E27FC236}">
+                <a16:creationId xmlns:a16="http://schemas.microsoft.com/office/drawing/2014/main" id="{A50741FC-80B9-4243-99EF-BD50B86FC888}"/>
+              </a:ext>
+            </a:extLst>
+          </p:cNvPr>
+          <p:cNvSpPr>
+            <a:spLocks xmlns:a="http://schemas.openxmlformats.org/drawingml/2006/main" noGrp="1"/>
+          </p:cNvSpPr>
+          <p:nvPr/>
+        </p:nvSpPr>
+        <p:spPr>
+          <a:xfrm xmlns:a="http://schemas.openxmlformats.org/drawingml/2006/main" flipV="1">
+            <a:off x="925195" y="400251"/>
+            <a:ext cx="0" cy="267690"/>
+          </a:xfrm>
+          <a:prstGeom xmlns:a="http://schemas.openxmlformats.org/drawingml/2006/main" prst="line">
+            <a:avLst/>
+          </a:prstGeom>
+          <a:ln xmlns:a="http://schemas.openxmlformats.org/drawingml/2006/main">
+            <a:solidFill>
+              <a:schemeClr val="bg1">
+                <a:lumMod val="50000"/>
+              </a:schemeClr>
+            </a:solidFill>
           </a:ln>
         </p:spPr>
-        <p:txBody>
-          <a:bodyPr xmlns:a="http://schemas.openxmlformats.org/drawingml/2006/main" lIns="0" tIns="0" rIns="0" bIns="0" anchor="ctr">
-            <a:normAutofit fontScale="100000"/>
+        <p:style>
+          <a:lnRef xmlns:a="http://schemas.openxmlformats.org/drawingml/2006/main" idx="1">
+            <a:schemeClr val="accent1"/>
+          </a:lnRef>
+          <a:fillRef xmlns:a="http://schemas.openxmlformats.org/drawingml/2006/main" idx="0">
+            <a:schemeClr val="accent1"/>
+          </a:fillRef>
+          <a:effectRef xmlns:a="http://schemas.openxmlformats.org/drawingml/2006/main" idx="0">
+            <a:schemeClr val="accent1"/>
+          </a:effectRef>
+          <a:fontRef xmlns:a="http://schemas.openxmlformats.org/drawingml/2006/main" idx="minor">
+            <a:schemeClr val="tx1"/>
+          </a:fontRef>
+        </p:style>
+      </p:sp>
+      <p:sp>
+        <p:nvSpPr>
+          <p:cNvPr id="9" name="文本框 8">
+            <a:extLst xmlns:a="http://schemas.openxmlformats.org/drawingml/2006/main">
+              <a:ext uri="{FF2B5EF4-FFF2-40B4-BE49-F238E27FC236}">
+                <a16:creationId xmlns:a16="http://schemas.microsoft.com/office/drawing/2014/main" id="{9054E96B-96ED-9B43-5394-020B05B5D55E}"/>
+              </a:ext>
+            </a:extLst>
+          </p:cNvPr>
+          <p:cNvSpPr>
+            <a:spLocks xmlns:a="http://schemas.openxmlformats.org/drawingml/2006/main" noGrp="1"/>
+          </p:cNvSpPr>
+          <p:nvPr/>
+        </p:nvSpPr>
+        <p:spPr>
+          <a:xfrm xmlns:a="http://schemas.openxmlformats.org/drawingml/2006/main">
+            <a:off x="423364" y="303885"/>
+            <a:ext cx="678422" cy="461665"/>
+          </a:xfrm>
+          <a:prstGeom xmlns:a="http://schemas.openxmlformats.org/drawingml/2006/main" prst="rect">
+            <a:avLst/>
+          </a:prstGeom>
+          <a:noFill xmlns:a="http://schemas.openxmlformats.org/drawingml/2006/main"/>
+        </p:spPr>
+        <p:txBody>
+          <a:bodyPr xmlns:a="http://schemas.openxmlformats.org/drawingml/2006/main" wrap="square">
+            <a:spAutoFit/>
           </a:bodyPr>
           <a:lstStyle xmlns:a="http://schemas.openxmlformats.org/drawingml/2006/main"/>
           <a:p xmlns:a="http://schemas.openxmlformats.org/drawingml/2006/main">
-            <a:pPr algn="l">
-              <a:defRPr sz="1200" b="0">
+            <a:r>
+              <a:rPr sz="2400">
                 <a:solidFill>
-                  <a:srgbClr val="7C8A9A"/>
+                  <a:schemeClr val="tx1">
+                    <a:lumMod val="75000"/>
+                    <a:lumOff val="25000"/>
+                  </a:schemeClr>
                 </a:solidFill>
-                <a:latin typeface="Microsoft YaHei"/>
-                <a:ea typeface="Microsoft YaHei"/>
-                <a:cs typeface="Microsoft YaHei"/>
-              </a:defRPr>
-            </a:pPr>
-            <a:r>
-              <a:rPr sz="1200" b="0">
-                <a:solidFill>
-                  <a:srgbClr val="7C8A9A"/>
-                </a:solidFill>
-                <a:latin typeface="Microsoft YaHei"/>
-                <a:ea typeface="Microsoft YaHei"/>
-                <a:cs typeface="Microsoft YaHei"/>
+                <a:latin typeface="汉仪粗宋简"/>
+                <a:ea typeface="汉仪粗宋简"/>
+                <a:cs typeface="汉仪粗宋简"/>
               </a:rPr>
-              <a:t>顺序流程</a:t>
+              <a:t>07</a:t>
             </a:r>
           </a:p>
         </p:txBody>
       </p:sp>
       <p:sp>
         <p:nvSpPr>
-          <p:cNvPr id="3" name="PPAGENT_QA|parent=sequential-step-0|domains=sequential-steps">
-            <a:extLst xmlns:a="http://schemas.openxmlformats.org/drawingml/2006/main">
-              <a:ext uri="{FF2B5EF4-FFF2-40B4-BE49-F238E27FC236}">
-                <a16:creationId xmlns:a16="http://schemas.microsoft.com/office/drawing/2014/main" id="{D01C4B88-D267-4B4A-B7EA-58E6D22524BA}"/>
+          <p:cNvPr id="14" name="文本框 13">
+            <a:extLst xmlns:a="http://schemas.openxmlformats.org/drawingml/2006/main">
+              <a:ext uri="{FF2B5EF4-FFF2-40B4-BE49-F238E27FC236}">
+                <a16:creationId xmlns:a16="http://schemas.microsoft.com/office/drawing/2014/main" id="{8E3A9D33-0809-B306-6EFD-C4FD9D6F2A29}"/>
               </a:ext>
             </a:extLst>
           </p:cNvPr>
@@ -1184,16 +6671,53 @@
         </p:nvSpPr>
         <p:spPr>
           <a:xfrm xmlns:a="http://schemas.openxmlformats.org/drawingml/2006/main">
-            <a:off x="742950" y="2190750"/>
-            <a:ext cx="2476500" cy="2571750"/>
+            <a:off x="445568" y="2211309"/>
+            <a:ext cx="3850462" cy="369332"/>
+          </a:xfrm>
+          <a:prstGeom xmlns:a="http://schemas.openxmlformats.org/drawingml/2006/main" prst="rect">
+            <a:avLst/>
+          </a:prstGeom>
+          <a:noFill xmlns:a="http://schemas.openxmlformats.org/drawingml/2006/main"/>
+        </p:spPr>
+        <p:txBody>
+          <a:bodyPr xmlns:a="http://schemas.openxmlformats.org/drawingml/2006/main" wrap="square">
+            <a:spAutoFit/>
+          </a:bodyPr>
+          <a:lstStyle xmlns:a="http://schemas.openxmlformats.org/drawingml/2006/main"/>
+          <a:p xmlns:a="http://schemas.openxmlformats.org/drawingml/2006/main">
+            <a:r>
+              <a:t/>
+            </a:r>
+            <a:endParaRPr/>
+          </a:p>
+        </p:txBody>
+      </p:sp>
+      <p:sp>
+        <p:nvSpPr>
+          <p:cNvPr id="15" name="PPAGENT_QA|parent=sequential-step-0|domains=sequential-steps">
+            <a:extLst xmlns:a="http://schemas.openxmlformats.org/drawingml/2006/main">
+              <a:ext uri="{FF2B5EF4-FFF2-40B4-BE49-F238E27FC236}">
+                <a16:creationId xmlns:a16="http://schemas.microsoft.com/office/drawing/2014/main" id="{487DD8A8-C940-4A51-8812-D3E07C3B3BF9}"/>
+              </a:ext>
+            </a:extLst>
+          </p:cNvPr>
+          <p:cNvSpPr>
+            <a:spLocks xmlns:a="http://schemas.openxmlformats.org/drawingml/2006/main" noGrp="1"/>
+          </p:cNvSpPr>
+          <p:nvPr/>
+        </p:nvSpPr>
+        <p:spPr>
+          <a:xfrm xmlns:a="http://schemas.openxmlformats.org/drawingml/2006/main">
+            <a:off x="1031191" y="2437301"/>
+            <a:ext cx="2343150" cy="2433271"/>
           </a:xfrm>
           <a:prstGeom xmlns:a="http://schemas.openxmlformats.org/drawingml/2006/main" prst="roundRect">
             <a:avLst>
-              <a:gd name="adj" fmla="val 4615"/>
+              <a:gd name="adj" fmla="val 4878"/>
             </a:avLst>
           </a:prstGeom>
           <a:solidFill xmlns:a="http://schemas.openxmlformats.org/drawingml/2006/main">
-            <a:srgbClr val="1677C8"/>
+            <a:srgbClr val="2F5EA8"/>
           </a:solidFill>
           <a:ln xmlns:a="http://schemas.openxmlformats.org/drawingml/2006/main" w="0">
             <a:noFill/>
@@ -1209,10 +6733,10 @@
       </p:sp>
       <p:sp>
         <p:nvSpPr>
-          <p:cNvPr id="4" name="PPAGENT_QA|parent=sequential-step-1|domains=sequential-steps">
-            <a:extLst xmlns:a="http://schemas.openxmlformats.org/drawingml/2006/main">
-              <a:ext uri="{FF2B5EF4-FFF2-40B4-BE49-F238E27FC236}">
-                <a16:creationId xmlns:a16="http://schemas.microsoft.com/office/drawing/2014/main" id="{E5ADBB9B-B6FB-4322-AA10-2CC674B2EC8A}"/>
+          <p:cNvPr id="16" name="PPAGENT_QA|parent=sequential-step-1|domains=sequential-steps">
+            <a:extLst xmlns:a="http://schemas.openxmlformats.org/drawingml/2006/main">
+              <a:ext uri="{FF2B5EF4-FFF2-40B4-BE49-F238E27FC236}">
+                <a16:creationId xmlns:a16="http://schemas.microsoft.com/office/drawing/2014/main" id="{ADDFD2E1-7631-498E-80EE-FE8F1427936F}"/>
               </a:ext>
             </a:extLst>
           </p:cNvPr>
@@ -1223,16 +6747,16 @@
         </p:nvSpPr>
         <p:spPr>
           <a:xfrm xmlns:a="http://schemas.openxmlformats.org/drawingml/2006/main">
-            <a:off x="3486150" y="2190750"/>
-            <a:ext cx="2476500" cy="2571750"/>
+            <a:off x="3626680" y="2437301"/>
+            <a:ext cx="2343150" cy="2433271"/>
           </a:xfrm>
           <a:prstGeom xmlns:a="http://schemas.openxmlformats.org/drawingml/2006/main" prst="roundRect">
             <a:avLst>
-              <a:gd name="adj" fmla="val 4615"/>
+              <a:gd name="adj" fmla="val 4878"/>
             </a:avLst>
           </a:prstGeom>
           <a:solidFill xmlns:a="http://schemas.openxmlformats.org/drawingml/2006/main">
-            <a:srgbClr val="00A8D8"/>
+            <a:srgbClr val="4C88E8"/>
           </a:solidFill>
           <a:ln xmlns:a="http://schemas.openxmlformats.org/drawingml/2006/main" w="0">
             <a:noFill/>
@@ -1248,10 +6772,10 @@
       </p:sp>
       <p:sp>
         <p:nvSpPr>
-          <p:cNvPr id="5" name="PPAGENT_QA|parent=sequential-step-2|domains=sequential-steps">
-            <a:extLst xmlns:a="http://schemas.openxmlformats.org/drawingml/2006/main">
-              <a:ext uri="{FF2B5EF4-FFF2-40B4-BE49-F238E27FC236}">
-                <a16:creationId xmlns:a16="http://schemas.microsoft.com/office/drawing/2014/main" id="{65F1334A-2EBC-4CBC-978E-FCAE87E16558}"/>
+          <p:cNvPr id="17" name="PPAGENT_QA|parent=sequential-step-2|domains=sequential-steps">
+            <a:extLst xmlns:a="http://schemas.openxmlformats.org/drawingml/2006/main">
+              <a:ext uri="{FF2B5EF4-FFF2-40B4-BE49-F238E27FC236}">
+                <a16:creationId xmlns:a16="http://schemas.microsoft.com/office/drawing/2014/main" id="{0B133F52-3B9C-49D2-ADC3-93138BAFADD4}"/>
               </a:ext>
             </a:extLst>
           </p:cNvPr>
@@ -1262,16 +6786,16 @@
         </p:nvSpPr>
         <p:spPr>
           <a:xfrm xmlns:a="http://schemas.openxmlformats.org/drawingml/2006/main">
-            <a:off x="6229350" y="2190750"/>
-            <a:ext cx="2476500" cy="2571750"/>
+            <a:off x="6222170" y="2437301"/>
+            <a:ext cx="2343150" cy="2433271"/>
           </a:xfrm>
           <a:prstGeom xmlns:a="http://schemas.openxmlformats.org/drawingml/2006/main" prst="roundRect">
             <a:avLst>
-              <a:gd name="adj" fmla="val 4615"/>
+              <a:gd name="adj" fmla="val 4878"/>
             </a:avLst>
           </a:prstGeom>
           <a:solidFill xmlns:a="http://schemas.openxmlformats.org/drawingml/2006/main">
-            <a:srgbClr val="1677C8"/>
+            <a:srgbClr val="2F5EA8"/>
           </a:solidFill>
           <a:ln xmlns:a="http://schemas.openxmlformats.org/drawingml/2006/main" w="0">
             <a:noFill/>
@@ -1287,10 +6811,10 @@
       </p:sp>
       <p:sp>
         <p:nvSpPr>
-          <p:cNvPr id="6" name="PPAGENT_QA|parent=sequential-step-3|domains=sequential-steps">
-            <a:extLst xmlns:a="http://schemas.openxmlformats.org/drawingml/2006/main">
-              <a:ext uri="{FF2B5EF4-FFF2-40B4-BE49-F238E27FC236}">
-                <a16:creationId xmlns:a16="http://schemas.microsoft.com/office/drawing/2014/main" id="{CF6461C7-9C8E-4446-8404-6541D1129F34}"/>
+          <p:cNvPr id="18" name="PPAGENT_QA|parent=sequential-step-3|domains=sequential-steps">
+            <a:extLst xmlns:a="http://schemas.openxmlformats.org/drawingml/2006/main">
+              <a:ext uri="{FF2B5EF4-FFF2-40B4-BE49-F238E27FC236}">
+                <a16:creationId xmlns:a16="http://schemas.microsoft.com/office/drawing/2014/main" id="{98580BF9-11CF-40E7-8F3D-AD0FD0365833}"/>
               </a:ext>
             </a:extLst>
           </p:cNvPr>
@@ -1301,16 +6825,16 @@
         </p:nvSpPr>
         <p:spPr>
           <a:xfrm xmlns:a="http://schemas.openxmlformats.org/drawingml/2006/main">
-            <a:off x="8972550" y="2190750"/>
-            <a:ext cx="2476500" cy="2571750"/>
+            <a:off x="8817659" y="2437301"/>
+            <a:ext cx="2343150" cy="2433271"/>
           </a:xfrm>
           <a:prstGeom xmlns:a="http://schemas.openxmlformats.org/drawingml/2006/main" prst="roundRect">
             <a:avLst>
-              <a:gd name="adj" fmla="val 4615"/>
+              <a:gd name="adj" fmla="val 4878"/>
             </a:avLst>
           </a:prstGeom>
           <a:solidFill xmlns:a="http://schemas.openxmlformats.org/drawingml/2006/main">
-            <a:srgbClr val="00A8D8"/>
+            <a:srgbClr val="4C88E8"/>
           </a:solidFill>
           <a:ln xmlns:a="http://schemas.openxmlformats.org/drawingml/2006/main" w="0">
             <a:noFill/>
@@ -1326,24 +6850,24 @@
       </p:sp>
       <p:cxnSp>
         <p:nvCxnSpPr>
-          <p:cNvPr id="28" name=""/>
+          <p:cNvPr id="55" name=""/>
           <p:cNvCxnSpPr>
-            <a:stCxn xmlns:a="http://schemas.openxmlformats.org/drawingml/2006/main" id="3" idx="3"/>
-            <a:endCxn xmlns:a="http://schemas.openxmlformats.org/drawingml/2006/main" id="4" idx="1"/>
+            <a:stCxn xmlns:a="http://schemas.openxmlformats.org/drawingml/2006/main" id="15" idx="3"/>
+            <a:endCxn xmlns:a="http://schemas.openxmlformats.org/drawingml/2006/main" id="16" idx="1"/>
           </p:cNvCxnSpPr>
           <p:nvPr/>
         </p:nvCxnSpPr>
         <p:spPr>
           <a:xfrm xmlns:a="http://schemas.openxmlformats.org/drawingml/2006/main">
-            <a:off x="3219450" y="3476625"/>
-            <a:ext cx="266700" cy="0"/>
+            <a:off x="3374341" y="3653937"/>
+            <a:ext cx="252339" cy="0"/>
           </a:xfrm>
           <a:prstGeom xmlns:a="http://schemas.openxmlformats.org/drawingml/2006/main" prst="straightConnector1">
             <a:avLst/>
           </a:prstGeom>
           <a:ln xmlns:a="http://schemas.openxmlformats.org/drawingml/2006/main" w="28575">
             <a:solidFill>
-              <a:srgbClr val="1677C8"/>
+              <a:srgbClr val="2F5EA8"/>
             </a:solidFill>
             <a:prstDash val="solid"/>
             <a:tailEnd type="triangle" w="med" len="med"/>
@@ -1352,24 +6876,24 @@
       </p:cxnSp>
       <p:cxnSp>
         <p:nvCxnSpPr>
-          <p:cNvPr id="29" name=""/>
+          <p:cNvPr id="56" name=""/>
           <p:cNvCxnSpPr>
-            <a:stCxn xmlns:a="http://schemas.openxmlformats.org/drawingml/2006/main" id="4" idx="3"/>
-            <a:endCxn xmlns:a="http://schemas.openxmlformats.org/drawingml/2006/main" id="5" idx="1"/>
+            <a:stCxn xmlns:a="http://schemas.openxmlformats.org/drawingml/2006/main" id="16" idx="3"/>
+            <a:endCxn xmlns:a="http://schemas.openxmlformats.org/drawingml/2006/main" id="17" idx="1"/>
           </p:cNvCxnSpPr>
           <p:nvPr/>
         </p:nvCxnSpPr>
         <p:spPr>
           <a:xfrm xmlns:a="http://schemas.openxmlformats.org/drawingml/2006/main">
-            <a:off x="5962650" y="3476625"/>
-            <a:ext cx="266700" cy="0"/>
+            <a:off x="5969830" y="3653937"/>
+            <a:ext cx="252340" cy="0"/>
           </a:xfrm>
           <a:prstGeom xmlns:a="http://schemas.openxmlformats.org/drawingml/2006/main" prst="straightConnector1">
             <a:avLst/>
           </a:prstGeom>
           <a:ln xmlns:a="http://schemas.openxmlformats.org/drawingml/2006/main" w="28575">
             <a:solidFill>
-              <a:srgbClr val="1677C8"/>
+              <a:srgbClr val="2F5EA8"/>
             </a:solidFill>
             <a:prstDash val="solid"/>
             <a:tailEnd type="triangle" w="med" len="med"/>
@@ -1378,24 +6902,24 @@
       </p:cxnSp>
       <p:cxnSp>
         <p:nvCxnSpPr>
-          <p:cNvPr id="30" name=""/>
+          <p:cNvPr id="57" name=""/>
           <p:cNvCxnSpPr>
-            <a:stCxn xmlns:a="http://schemas.openxmlformats.org/drawingml/2006/main" id="5" idx="3"/>
-            <a:endCxn xmlns:a="http://schemas.openxmlformats.org/drawingml/2006/main" id="6" idx="1"/>
+            <a:stCxn xmlns:a="http://schemas.openxmlformats.org/drawingml/2006/main" id="17" idx="3"/>
+            <a:endCxn xmlns:a="http://schemas.openxmlformats.org/drawingml/2006/main" id="18" idx="1"/>
           </p:cNvCxnSpPr>
           <p:nvPr/>
         </p:nvCxnSpPr>
         <p:spPr>
           <a:xfrm xmlns:a="http://schemas.openxmlformats.org/drawingml/2006/main">
-            <a:off x="8705850" y="3476625"/>
-            <a:ext cx="266700" cy="0"/>
+            <a:off x="8565320" y="3653937"/>
+            <a:ext cx="252339" cy="0"/>
           </a:xfrm>
           <a:prstGeom xmlns:a="http://schemas.openxmlformats.org/drawingml/2006/main" prst="straightConnector1">
             <a:avLst/>
           </a:prstGeom>
           <a:ln xmlns:a="http://schemas.openxmlformats.org/drawingml/2006/main" w="28575">
             <a:solidFill>
-              <a:srgbClr val="1677C8"/>
+              <a:srgbClr val="2F5EA8"/>
             </a:solidFill>
             <a:prstDash val="solid"/>
             <a:tailEnd type="triangle" w="med" len="med"/>
@@ -1404,10 +6928,10 @@
       </p:cxnSp>
       <p:sp>
         <p:nvSpPr>
-          <p:cNvPr id="10" name="">
-            <a:extLst xmlns:a="http://schemas.openxmlformats.org/drawingml/2006/main">
-              <a:ext uri="{FF2B5EF4-FFF2-40B4-BE49-F238E27FC236}">
-                <a16:creationId xmlns:a16="http://schemas.microsoft.com/office/drawing/2014/main" id="{9A23AEDE-A9A8-4461-BFC0-4967E8309847}"/>
+          <p:cNvPr id="22" name="">
+            <a:extLst xmlns:a="http://schemas.openxmlformats.org/drawingml/2006/main">
+              <a:ext uri="{FF2B5EF4-FFF2-40B4-BE49-F238E27FC236}">
+                <a16:creationId xmlns:a16="http://schemas.microsoft.com/office/drawing/2014/main" id="{F4D380E0-7674-4EAE-8261-ECD1AB792271}"/>
               </a:ext>
             </a:extLst>
           </p:cNvPr>
@@ -1418,8 +6942,8 @@
         </p:nvSpPr>
         <p:spPr>
           <a:xfrm xmlns:a="http://schemas.openxmlformats.org/drawingml/2006/main">
-            <a:off x="914400" y="2381250"/>
-            <a:ext cx="495300" cy="495300"/>
+            <a:off x="1193409" y="2617543"/>
+            <a:ext cx="468630" cy="468630"/>
           </a:xfrm>
           <a:prstGeom xmlns:a="http://schemas.openxmlformats.org/drawingml/2006/main" prst="ellipse">
             <a:avLst/>
@@ -1439,9 +6963,10 @@
           <a:lstStyle xmlns:a="http://schemas.openxmlformats.org/drawingml/2006/main"/>
           <a:p xmlns:a="http://schemas.openxmlformats.org/drawingml/2006/main">
             <a:pPr algn="ctr">
-              <a:defRPr sz="1350" b="1">
+              <a:buNone/>
+              <a:defRPr sz="1275" b="1">
                 <a:solidFill>
-                  <a:srgbClr val="1677C8"/>
+                  <a:srgbClr val="2F5EA8"/>
                 </a:solidFill>
                 <a:latin typeface="Microsoft YaHei"/>
                 <a:ea typeface="Microsoft YaHei"/>
@@ -1449,9 +6974,9 @@
               </a:defRPr>
             </a:pPr>
             <a:r>
-              <a:rPr sz="1350" b="1">
+              <a:rPr sz="1275" b="1">
                 <a:solidFill>
-                  <a:srgbClr val="1677C8"/>
+                  <a:srgbClr val="2F5EA8"/>
                 </a:solidFill>
                 <a:latin typeface="Microsoft YaHei"/>
                 <a:ea typeface="Microsoft YaHei"/>
@@ -1464,10 +6989,10 @@
       </p:sp>
       <p:sp>
         <p:nvSpPr>
-          <p:cNvPr id="11" name="PPAGENT_QA|within=sequential-step-0|role=title">
-            <a:extLst xmlns:a="http://schemas.openxmlformats.org/drawingml/2006/main">
-              <a:ext uri="{FF2B5EF4-FFF2-40B4-BE49-F238E27FC236}">
-                <a16:creationId xmlns:a16="http://schemas.microsoft.com/office/drawing/2014/main" id="{506D057F-7BAA-44ED-92BA-49B9C53C79CA}"/>
+          <p:cNvPr id="23" name="PPAGENT_QA|within=sequential-step-0|role=title">
+            <a:extLst xmlns:a="http://schemas.openxmlformats.org/drawingml/2006/main">
+              <a:ext uri="{FF2B5EF4-FFF2-40B4-BE49-F238E27FC236}">
+                <a16:creationId xmlns:a16="http://schemas.microsoft.com/office/drawing/2014/main" id="{568042A3-7984-4D2E-8642-7DE53904BCBF}"/>
               </a:ext>
             </a:extLst>
           </p:cNvPr>
@@ -1478,8 +7003,8 @@
         </p:nvSpPr>
         <p:spPr>
           <a:xfrm xmlns:a="http://schemas.openxmlformats.org/drawingml/2006/main">
-            <a:off x="952500" y="3105150"/>
-            <a:ext cx="2057400" cy="495300"/>
+            <a:off x="1229458" y="3302464"/>
+            <a:ext cx="1946617" cy="468630"/>
           </a:xfrm>
           <a:prstGeom xmlns:a="http://schemas.openxmlformats.org/drawingml/2006/main" prst="rect">
             <a:avLst/>
@@ -1497,7 +7022,8 @@
           <a:lstStyle xmlns:a="http://schemas.openxmlformats.org/drawingml/2006/main"/>
           <a:p xmlns:a="http://schemas.openxmlformats.org/drawingml/2006/main">
             <a:pPr algn="ctr">
-              <a:defRPr sz="1800" b="1">
+              <a:buNone/>
+              <a:defRPr sz="1725" b="1">
                 <a:solidFill>
                   <a:srgbClr val="FFFFFF"/>
                 </a:solidFill>
@@ -1507,7 +7033,7 @@
               </a:defRPr>
             </a:pPr>
             <a:r>
-              <a:rPr sz="1800" b="1">
+              <a:rPr sz="1725" b="1">
                 <a:solidFill>
                   <a:srgbClr val="FFFFFF"/>
                 </a:solidFill>
@@ -1515,17 +7041,17 @@
                 <a:ea typeface="Microsoft YaHei"/>
                 <a:cs typeface="Microsoft YaHei"/>
               </a:rPr>
-              <a:t>需求确认</a:t>
+              <a:t>需求澄清</a:t>
             </a:r>
           </a:p>
         </p:txBody>
       </p:sp>
       <p:sp>
         <p:nvSpPr>
-          <p:cNvPr id="12" name="PPAGENT_QA|within=sequential-step-0|role=body">
-            <a:extLst xmlns:a="http://schemas.openxmlformats.org/drawingml/2006/main">
-              <a:ext uri="{FF2B5EF4-FFF2-40B4-BE49-F238E27FC236}">
-                <a16:creationId xmlns:a16="http://schemas.microsoft.com/office/drawing/2014/main" id="{603191C5-909B-46A1-9909-2D8032570616}"/>
+          <p:cNvPr id="24" name="PPAGENT_QA|within=sequential-step-0|role=body">
+            <a:extLst xmlns:a="http://schemas.openxmlformats.org/drawingml/2006/main">
+              <a:ext uri="{FF2B5EF4-FFF2-40B4-BE49-F238E27FC236}">
+                <a16:creationId xmlns:a16="http://schemas.microsoft.com/office/drawing/2014/main" id="{91AD7D7A-528F-41EA-982A-A7DCD7F42F76}"/>
               </a:ext>
             </a:extLst>
           </p:cNvPr>
@@ -1536,8 +7062,8 @@
         </p:nvSpPr>
         <p:spPr>
           <a:xfrm xmlns:a="http://schemas.openxmlformats.org/drawingml/2006/main">
-            <a:off x="952500" y="3752850"/>
-            <a:ext cx="2057400" cy="723900"/>
+            <a:off x="1229458" y="3915288"/>
+            <a:ext cx="1946617" cy="684921"/>
           </a:xfrm>
           <a:prstGeom xmlns:a="http://schemas.openxmlformats.org/drawingml/2006/main" prst="rect">
             <a:avLst/>
@@ -1555,7 +7081,8 @@
           <a:lstStyle xmlns:a="http://schemas.openxmlformats.org/drawingml/2006/main"/>
           <a:p xmlns:a="http://schemas.openxmlformats.org/drawingml/2006/main">
             <a:pPr algn="ctr">
-              <a:defRPr sz="1350" b="0">
+              <a:buNone/>
+              <a:defRPr sz="1275" b="0">
                 <a:solidFill>
                   <a:srgbClr val="EAF6FF"/>
                 </a:solidFill>
@@ -1565,7 +7092,7 @@
               </a:defRPr>
             </a:pPr>
             <a:r>
-              <a:rPr sz="1350" b="0">
+              <a:rPr sz="1275" b="0">
                 <a:solidFill>
                   <a:srgbClr val="EAF6FF"/>
                 </a:solidFill>
@@ -1573,17 +7100,17 @@
                 <a:ea typeface="Microsoft YaHei"/>
                 <a:cs typeface="Microsoft YaHei"/>
               </a:rPr>
-              <a:t>明确目标、范围与输入</a:t>
+              <a:t>明确目标、边界与输入</a:t>
             </a:r>
           </a:p>
         </p:txBody>
       </p:sp>
       <p:sp>
         <p:nvSpPr>
-          <p:cNvPr id="13" name="">
-            <a:extLst xmlns:a="http://schemas.openxmlformats.org/drawingml/2006/main">
-              <a:ext uri="{FF2B5EF4-FFF2-40B4-BE49-F238E27FC236}">
-                <a16:creationId xmlns:a16="http://schemas.microsoft.com/office/drawing/2014/main" id="{9144BBEE-862C-4091-86A0-2ED15D7D2E3E}"/>
+          <p:cNvPr id="25" name="">
+            <a:extLst xmlns:a="http://schemas.openxmlformats.org/drawingml/2006/main">
+              <a:ext uri="{FF2B5EF4-FFF2-40B4-BE49-F238E27FC236}">
+                <a16:creationId xmlns:a16="http://schemas.microsoft.com/office/drawing/2014/main" id="{2DB59CB3-8DF6-4C78-A13F-ADFDA44A3060}"/>
               </a:ext>
             </a:extLst>
           </p:cNvPr>
@@ -1594,8 +7121,8 @@
         </p:nvSpPr>
         <p:spPr>
           <a:xfrm xmlns:a="http://schemas.openxmlformats.org/drawingml/2006/main">
-            <a:off x="3657600" y="2381250"/>
-            <a:ext cx="495300" cy="495300"/>
+            <a:off x="3788898" y="2617543"/>
+            <a:ext cx="468630" cy="468630"/>
           </a:xfrm>
           <a:prstGeom xmlns:a="http://schemas.openxmlformats.org/drawingml/2006/main" prst="ellipse">
             <a:avLst/>
@@ -1615,9 +7142,10 @@
           <a:lstStyle xmlns:a="http://schemas.openxmlformats.org/drawingml/2006/main"/>
           <a:p xmlns:a="http://schemas.openxmlformats.org/drawingml/2006/main">
             <a:pPr algn="ctr">
-              <a:defRPr sz="1350" b="1">
+              <a:buNone/>
+              <a:defRPr sz="1275" b="1">
                 <a:solidFill>
-                  <a:srgbClr val="00A8D8"/>
+                  <a:srgbClr val="4C88E8"/>
                 </a:solidFill>
                 <a:latin typeface="Microsoft YaHei"/>
                 <a:ea typeface="Microsoft YaHei"/>
@@ -1625,9 +7153,9 @@
               </a:defRPr>
             </a:pPr>
             <a:r>
-              <a:rPr sz="1350" b="1">
+              <a:rPr sz="1275" b="1">
                 <a:solidFill>
-                  <a:srgbClr val="00A8D8"/>
+                  <a:srgbClr val="4C88E8"/>
                 </a:solidFill>
                 <a:latin typeface="Microsoft YaHei"/>
                 <a:ea typeface="Microsoft YaHei"/>
@@ -1640,10 +7168,10 @@
       </p:sp>
       <p:sp>
         <p:nvSpPr>
-          <p:cNvPr id="14" name="PPAGENT_QA|within=sequential-step-1|role=title">
-            <a:extLst xmlns:a="http://schemas.openxmlformats.org/drawingml/2006/main">
-              <a:ext uri="{FF2B5EF4-FFF2-40B4-BE49-F238E27FC236}">
-                <a16:creationId xmlns:a16="http://schemas.microsoft.com/office/drawing/2014/main" id="{1D37EF8F-2841-4E23-84D9-BA11B9CC5DF5}"/>
+          <p:cNvPr id="26" name="PPAGENT_QA|within=sequential-step-1|role=title">
+            <a:extLst xmlns:a="http://schemas.openxmlformats.org/drawingml/2006/main">
+              <a:ext uri="{FF2B5EF4-FFF2-40B4-BE49-F238E27FC236}">
+                <a16:creationId xmlns:a16="http://schemas.microsoft.com/office/drawing/2014/main" id="{0A181F01-3778-4B01-9973-5E07A9799DB8}"/>
               </a:ext>
             </a:extLst>
           </p:cNvPr>
@@ -1654,8 +7182,8 @@
         </p:nvSpPr>
         <p:spPr>
           <a:xfrm xmlns:a="http://schemas.openxmlformats.org/drawingml/2006/main">
-            <a:off x="3695700" y="3105150"/>
-            <a:ext cx="2057400" cy="495300"/>
+            <a:off x="3824947" y="3302464"/>
+            <a:ext cx="1946617" cy="468630"/>
           </a:xfrm>
           <a:prstGeom xmlns:a="http://schemas.openxmlformats.org/drawingml/2006/main" prst="rect">
             <a:avLst/>
@@ -1673,7 +7201,8 @@
           <a:lstStyle xmlns:a="http://schemas.openxmlformats.org/drawingml/2006/main"/>
           <a:p xmlns:a="http://schemas.openxmlformats.org/drawingml/2006/main">
             <a:pPr algn="ctr">
-              <a:defRPr sz="1800" b="1">
+              <a:buNone/>
+              <a:defRPr sz="1725" b="1">
                 <a:solidFill>
                   <a:srgbClr val="FFFFFF"/>
                 </a:solidFill>
@@ -1683,7 +7212,7 @@
               </a:defRPr>
             </a:pPr>
             <a:r>
-              <a:rPr sz="1800" b="1">
+              <a:rPr sz="1725" b="1">
                 <a:solidFill>
                   <a:srgbClr val="FFFFFF"/>
                 </a:solidFill>
@@ -1691,17 +7220,17 @@
                 <a:ea typeface="Microsoft YaHei"/>
                 <a:cs typeface="Microsoft YaHei"/>
               </a:rPr>
-              <a:t>方案设计</a:t>
+              <a:t>资料整理</a:t>
             </a:r>
           </a:p>
         </p:txBody>
       </p:sp>
       <p:sp>
         <p:nvSpPr>
-          <p:cNvPr id="15" name="PPAGENT_QA|within=sequential-step-1|role=body">
-            <a:extLst xmlns:a="http://schemas.openxmlformats.org/drawingml/2006/main">
-              <a:ext uri="{FF2B5EF4-FFF2-40B4-BE49-F238E27FC236}">
-                <a16:creationId xmlns:a16="http://schemas.microsoft.com/office/drawing/2014/main" id="{8D91A8A4-75E2-4ED8-83E4-63A816A17A5D}"/>
+          <p:cNvPr id="27" name="PPAGENT_QA|within=sequential-step-1|role=body">
+            <a:extLst xmlns:a="http://schemas.openxmlformats.org/drawingml/2006/main">
+              <a:ext uri="{FF2B5EF4-FFF2-40B4-BE49-F238E27FC236}">
+                <a16:creationId xmlns:a16="http://schemas.microsoft.com/office/drawing/2014/main" id="{2A1CC1B0-7F3B-43FF-B353-738D52957A31}"/>
               </a:ext>
             </a:extLst>
           </p:cNvPr>
@@ -1712,8 +7241,8 @@
         </p:nvSpPr>
         <p:spPr>
           <a:xfrm xmlns:a="http://schemas.openxmlformats.org/drawingml/2006/main">
-            <a:off x="3695700" y="3752850"/>
-            <a:ext cx="2057400" cy="723900"/>
+            <a:off x="3824947" y="3915288"/>
+            <a:ext cx="1946617" cy="684921"/>
           </a:xfrm>
           <a:prstGeom xmlns:a="http://schemas.openxmlformats.org/drawingml/2006/main" prst="rect">
             <a:avLst/>
@@ -1731,7 +7260,8 @@
           <a:lstStyle xmlns:a="http://schemas.openxmlformats.org/drawingml/2006/main"/>
           <a:p xmlns:a="http://schemas.openxmlformats.org/drawingml/2006/main">
             <a:pPr algn="ctr">
-              <a:defRPr sz="1350" b="0">
+              <a:buNone/>
+              <a:defRPr sz="1275" b="0">
                 <a:solidFill>
                   <a:srgbClr val="EAF6FF"/>
                 </a:solidFill>
@@ -1741,7 +7271,7 @@
               </a:defRPr>
             </a:pPr>
             <a:r>
-              <a:rPr sz="1350" b="0">
+              <a:rPr sz="1275" b="0">
                 <a:solidFill>
                   <a:srgbClr val="EAF6FF"/>
                 </a:solidFill>
@@ -1749,17 +7279,17 @@
                 <a:ea typeface="Microsoft YaHei"/>
                 <a:cs typeface="Microsoft YaHei"/>
               </a:rPr>
-              <a:t>形成结构和执行方案</a:t>
+              <a:t>形成统一可靠的信息底座</a:t>
             </a:r>
           </a:p>
         </p:txBody>
       </p:sp>
       <p:sp>
         <p:nvSpPr>
-          <p:cNvPr id="16" name="">
-            <a:extLst xmlns:a="http://schemas.openxmlformats.org/drawingml/2006/main">
-              <a:ext uri="{FF2B5EF4-FFF2-40B4-BE49-F238E27FC236}">
-                <a16:creationId xmlns:a16="http://schemas.microsoft.com/office/drawing/2014/main" id="{FE3513FF-0DF3-4AC1-9601-B263E53DD767}"/>
+          <p:cNvPr id="28" name="">
+            <a:extLst xmlns:a="http://schemas.openxmlformats.org/drawingml/2006/main">
+              <a:ext uri="{FF2B5EF4-FFF2-40B4-BE49-F238E27FC236}">
+                <a16:creationId xmlns:a16="http://schemas.microsoft.com/office/drawing/2014/main" id="{69EE729C-BFCC-4F3E-A7A1-6DAB1D7A2410}"/>
               </a:ext>
             </a:extLst>
           </p:cNvPr>
@@ -1770,8 +7300,8 @@
         </p:nvSpPr>
         <p:spPr>
           <a:xfrm xmlns:a="http://schemas.openxmlformats.org/drawingml/2006/main">
-            <a:off x="6400800" y="2381250"/>
-            <a:ext cx="495300" cy="495300"/>
+            <a:off x="6384388" y="2617543"/>
+            <a:ext cx="468630" cy="468630"/>
           </a:xfrm>
           <a:prstGeom xmlns:a="http://schemas.openxmlformats.org/drawingml/2006/main" prst="ellipse">
             <a:avLst/>
@@ -1791,9 +7321,10 @@
           <a:lstStyle xmlns:a="http://schemas.openxmlformats.org/drawingml/2006/main"/>
           <a:p xmlns:a="http://schemas.openxmlformats.org/drawingml/2006/main">
             <a:pPr algn="ctr">
-              <a:defRPr sz="1350" b="1">
+              <a:buNone/>
+              <a:defRPr sz="1275" b="1">
                 <a:solidFill>
-                  <a:srgbClr val="1677C8"/>
+                  <a:srgbClr val="2F5EA8"/>
                 </a:solidFill>
                 <a:latin typeface="Microsoft YaHei"/>
                 <a:ea typeface="Microsoft YaHei"/>
@@ -1801,9 +7332,9 @@
               </a:defRPr>
             </a:pPr>
             <a:r>
-              <a:rPr sz="1350" b="1">
+              <a:rPr sz="1275" b="1">
                 <a:solidFill>
-                  <a:srgbClr val="1677C8"/>
+                  <a:srgbClr val="2F5EA8"/>
                 </a:solidFill>
                 <a:latin typeface="Microsoft YaHei"/>
                 <a:ea typeface="Microsoft YaHei"/>
@@ -1816,10 +7347,10 @@
       </p:sp>
       <p:sp>
         <p:nvSpPr>
-          <p:cNvPr id="17" name="PPAGENT_QA|within=sequential-step-2|role=title">
-            <a:extLst xmlns:a="http://schemas.openxmlformats.org/drawingml/2006/main">
-              <a:ext uri="{FF2B5EF4-FFF2-40B4-BE49-F238E27FC236}">
-                <a16:creationId xmlns:a16="http://schemas.microsoft.com/office/drawing/2014/main" id="{97564F43-3A57-472F-A4E2-9E2DEF7A1AE3}"/>
+          <p:cNvPr id="29" name="PPAGENT_QA|within=sequential-step-2|role=title">
+            <a:extLst xmlns:a="http://schemas.openxmlformats.org/drawingml/2006/main">
+              <a:ext uri="{FF2B5EF4-FFF2-40B4-BE49-F238E27FC236}">
+                <a16:creationId xmlns:a16="http://schemas.microsoft.com/office/drawing/2014/main" id="{4D70E7FC-F4CB-46FB-9903-C02BB119B521}"/>
               </a:ext>
             </a:extLst>
           </p:cNvPr>
@@ -1830,8 +7361,8 @@
         </p:nvSpPr>
         <p:spPr>
           <a:xfrm xmlns:a="http://schemas.openxmlformats.org/drawingml/2006/main">
-            <a:off x="6438900" y="3105150"/>
-            <a:ext cx="2057400" cy="495300"/>
+            <a:off x="6420436" y="3302464"/>
+            <a:ext cx="1946617" cy="468630"/>
           </a:xfrm>
           <a:prstGeom xmlns:a="http://schemas.openxmlformats.org/drawingml/2006/main" prst="rect">
             <a:avLst/>
@@ -1849,7 +7380,8 @@
           <a:lstStyle xmlns:a="http://schemas.openxmlformats.org/drawingml/2006/main"/>
           <a:p xmlns:a="http://schemas.openxmlformats.org/drawingml/2006/main">
             <a:pPr algn="ctr">
-              <a:defRPr sz="1800" b="1">
+              <a:buNone/>
+              <a:defRPr sz="1725" b="1">
                 <a:solidFill>
                   <a:srgbClr val="FFFFFF"/>
                 </a:solidFill>
@@ -1859,7 +7391,7 @@
               </a:defRPr>
             </a:pPr>
             <a:r>
-              <a:rPr sz="1800" b="1">
+              <a:rPr sz="1725" b="1">
                 <a:solidFill>
                   <a:srgbClr val="FFFFFF"/>
                 </a:solidFill>
@@ -1867,17 +7399,17 @@
                 <a:ea typeface="Microsoft YaHei"/>
                 <a:cs typeface="Microsoft YaHei"/>
               </a:rPr>
-              <a:t>实施验证</a:t>
+              <a:t>方案设计</a:t>
             </a:r>
           </a:p>
         </p:txBody>
       </p:sp>
       <p:sp>
         <p:nvSpPr>
-          <p:cNvPr id="18" name="PPAGENT_QA|within=sequential-step-2|role=body">
-            <a:extLst xmlns:a="http://schemas.openxmlformats.org/drawingml/2006/main">
-              <a:ext uri="{FF2B5EF4-FFF2-40B4-BE49-F238E27FC236}">
-                <a16:creationId xmlns:a16="http://schemas.microsoft.com/office/drawing/2014/main" id="{95AC3E6C-F54D-4D87-A30B-F9E0FBEBC3C8}"/>
+          <p:cNvPr id="30" name="PPAGENT_QA|within=sequential-step-2|role=body">
+            <a:extLst xmlns:a="http://schemas.openxmlformats.org/drawingml/2006/main">
+              <a:ext uri="{FF2B5EF4-FFF2-40B4-BE49-F238E27FC236}">
+                <a16:creationId xmlns:a16="http://schemas.microsoft.com/office/drawing/2014/main" id="{02F27FC2-3C1F-40AE-9D97-F95CEBE18B04}"/>
               </a:ext>
             </a:extLst>
           </p:cNvPr>
@@ -1888,8 +7420,8 @@
         </p:nvSpPr>
         <p:spPr>
           <a:xfrm xmlns:a="http://schemas.openxmlformats.org/drawingml/2006/main">
-            <a:off x="6438900" y="3752850"/>
-            <a:ext cx="2057400" cy="723900"/>
+            <a:off x="6420436" y="3915288"/>
+            <a:ext cx="1946617" cy="684921"/>
           </a:xfrm>
           <a:prstGeom xmlns:a="http://schemas.openxmlformats.org/drawingml/2006/main" prst="rect">
             <a:avLst/>
@@ -1907,7 +7439,8 @@
           <a:lstStyle xmlns:a="http://schemas.openxmlformats.org/drawingml/2006/main"/>
           <a:p xmlns:a="http://schemas.openxmlformats.org/drawingml/2006/main">
             <a:pPr algn="ctr">
-              <a:defRPr sz="1350" b="0">
+              <a:buNone/>
+              <a:defRPr sz="1275" b="0">
                 <a:solidFill>
                   <a:srgbClr val="EAF6FF"/>
                 </a:solidFill>
@@ -1917,7 +7450,7 @@
               </a:defRPr>
             </a:pPr>
             <a:r>
-              <a:rPr sz="1350" b="0">
+              <a:rPr sz="1275" b="0">
                 <a:solidFill>
                   <a:srgbClr val="EAF6FF"/>
                 </a:solidFill>
@@ -1925,17 +7458,17 @@
                 <a:ea typeface="Microsoft YaHei"/>
                 <a:cs typeface="Microsoft YaHei"/>
               </a:rPr>
-              <a:t>完成执行并检查结果</a:t>
+              <a:t>建立结构和执行规则</a:t>
             </a:r>
           </a:p>
         </p:txBody>
       </p:sp>
       <p:sp>
         <p:nvSpPr>
-          <p:cNvPr id="19" name="">
-            <a:extLst xmlns:a="http://schemas.openxmlformats.org/drawingml/2006/main">
-              <a:ext uri="{FF2B5EF4-FFF2-40B4-BE49-F238E27FC236}">
-                <a16:creationId xmlns:a16="http://schemas.microsoft.com/office/drawing/2014/main" id="{BA574999-E959-4258-85A3-FC13FBB261F0}"/>
+          <p:cNvPr id="31" name="">
+            <a:extLst xmlns:a="http://schemas.openxmlformats.org/drawingml/2006/main">
+              <a:ext uri="{FF2B5EF4-FFF2-40B4-BE49-F238E27FC236}">
+                <a16:creationId xmlns:a16="http://schemas.microsoft.com/office/drawing/2014/main" id="{A7CF853D-9358-4525-9F43-454353E2EA25}"/>
               </a:ext>
             </a:extLst>
           </p:cNvPr>
@@ -1946,8 +7479,8 @@
         </p:nvSpPr>
         <p:spPr>
           <a:xfrm xmlns:a="http://schemas.openxmlformats.org/drawingml/2006/main">
-            <a:off x="9144000" y="2381250"/>
-            <a:ext cx="495300" cy="495300"/>
+            <a:off x="8979877" y="2617543"/>
+            <a:ext cx="468630" cy="468630"/>
           </a:xfrm>
           <a:prstGeom xmlns:a="http://schemas.openxmlformats.org/drawingml/2006/main" prst="ellipse">
             <a:avLst/>
@@ -1967,9 +7500,10 @@
           <a:lstStyle xmlns:a="http://schemas.openxmlformats.org/drawingml/2006/main"/>
           <a:p xmlns:a="http://schemas.openxmlformats.org/drawingml/2006/main">
             <a:pPr algn="ctr">
-              <a:defRPr sz="1350" b="1">
+              <a:buNone/>
+              <a:defRPr sz="1275" b="1">
                 <a:solidFill>
-                  <a:srgbClr val="00A8D8"/>
+                  <a:srgbClr val="4C88E8"/>
                 </a:solidFill>
                 <a:latin typeface="Microsoft YaHei"/>
                 <a:ea typeface="Microsoft YaHei"/>
@@ -1977,9 +7511,9 @@
               </a:defRPr>
             </a:pPr>
             <a:r>
-              <a:rPr sz="1350" b="1">
+              <a:rPr sz="1275" b="1">
                 <a:solidFill>
-                  <a:srgbClr val="00A8D8"/>
+                  <a:srgbClr val="4C88E8"/>
                 </a:solidFill>
                 <a:latin typeface="Microsoft YaHei"/>
                 <a:ea typeface="Microsoft YaHei"/>
@@ -1992,10 +7526,10 @@
       </p:sp>
       <p:sp>
         <p:nvSpPr>
-          <p:cNvPr id="20" name="PPAGENT_QA|within=sequential-step-3|role=title">
-            <a:extLst xmlns:a="http://schemas.openxmlformats.org/drawingml/2006/main">
-              <a:ext uri="{FF2B5EF4-FFF2-40B4-BE49-F238E27FC236}">
-                <a16:creationId xmlns:a16="http://schemas.microsoft.com/office/drawing/2014/main" id="{80923ECD-7F88-4DCE-A42C-527F569F821A}"/>
+          <p:cNvPr id="32" name="PPAGENT_QA|within=sequential-step-3|role=title">
+            <a:extLst xmlns:a="http://schemas.openxmlformats.org/drawingml/2006/main">
+              <a:ext uri="{FF2B5EF4-FFF2-40B4-BE49-F238E27FC236}">
+                <a16:creationId xmlns:a16="http://schemas.microsoft.com/office/drawing/2014/main" id="{E5B0726C-884A-4629-816D-191B7050C616}"/>
               </a:ext>
             </a:extLst>
           </p:cNvPr>
@@ -2006,8 +7540,8 @@
         </p:nvSpPr>
         <p:spPr>
           <a:xfrm xmlns:a="http://schemas.openxmlformats.org/drawingml/2006/main">
-            <a:off x="9182100" y="3105150"/>
-            <a:ext cx="2057400" cy="495300"/>
+            <a:off x="9015925" y="3302464"/>
+            <a:ext cx="1946617" cy="468630"/>
           </a:xfrm>
           <a:prstGeom xmlns:a="http://schemas.openxmlformats.org/drawingml/2006/main" prst="rect">
             <a:avLst/>
@@ -2025,7 +7559,8 @@
           <a:lstStyle xmlns:a="http://schemas.openxmlformats.org/drawingml/2006/main"/>
           <a:p xmlns:a="http://schemas.openxmlformats.org/drawingml/2006/main">
             <a:pPr algn="ctr">
-              <a:defRPr sz="1800" b="1">
+              <a:buNone/>
+              <a:defRPr sz="1725" b="1">
                 <a:solidFill>
                   <a:srgbClr val="FFFFFF"/>
                 </a:solidFill>
@@ -2035,7 +7570,7 @@
               </a:defRPr>
             </a:pPr>
             <a:r>
-              <a:rPr sz="1800" b="1">
+              <a:rPr sz="1725" b="1">
                 <a:solidFill>
                   <a:srgbClr val="FFFFFF"/>
                 </a:solidFill>
@@ -2043,17 +7578,17 @@
                 <a:ea typeface="Microsoft YaHei"/>
                 <a:cs typeface="Microsoft YaHei"/>
               </a:rPr>
-              <a:t>复盘改进</a:t>
+              <a:t>实施生成</a:t>
             </a:r>
           </a:p>
         </p:txBody>
       </p:sp>
       <p:sp>
         <p:nvSpPr>
-          <p:cNvPr id="21" name="PPAGENT_QA|within=sequential-step-3|role=body">
-            <a:extLst xmlns:a="http://schemas.openxmlformats.org/drawingml/2006/main">
-              <a:ext uri="{FF2B5EF4-FFF2-40B4-BE49-F238E27FC236}">
-                <a16:creationId xmlns:a16="http://schemas.microsoft.com/office/drawing/2014/main" id="{C85D1FC0-EFB6-4BFA-9767-3E72C3F7C392}"/>
+          <p:cNvPr id="33" name="PPAGENT_QA|within=sequential-step-3|role=body">
+            <a:extLst xmlns:a="http://schemas.openxmlformats.org/drawingml/2006/main">
+              <a:ext uri="{FF2B5EF4-FFF2-40B4-BE49-F238E27FC236}">
+                <a16:creationId xmlns:a16="http://schemas.microsoft.com/office/drawing/2014/main" id="{2FA6AEF1-9A99-4EA7-8009-B479A1B8CF8F}"/>
               </a:ext>
             </a:extLst>
           </p:cNvPr>
@@ -2064,8 +7599,8 @@
         </p:nvSpPr>
         <p:spPr>
           <a:xfrm xmlns:a="http://schemas.openxmlformats.org/drawingml/2006/main">
-            <a:off x="9182100" y="3752850"/>
-            <a:ext cx="2057400" cy="723900"/>
+            <a:off x="9015925" y="3915288"/>
+            <a:ext cx="1946617" cy="684921"/>
           </a:xfrm>
           <a:prstGeom xmlns:a="http://schemas.openxmlformats.org/drawingml/2006/main" prst="rect">
             <a:avLst/>
@@ -2083,7 +7618,8 @@
           <a:lstStyle xmlns:a="http://schemas.openxmlformats.org/drawingml/2006/main"/>
           <a:p xmlns:a="http://schemas.openxmlformats.org/drawingml/2006/main">
             <a:pPr algn="ctr">
-              <a:defRPr sz="1350" b="0">
+              <a:buNone/>
+              <a:defRPr sz="1275" b="0">
                 <a:solidFill>
                   <a:srgbClr val="EAF6FF"/>
                 </a:solidFill>
@@ -2093,7 +7629,7 @@
               </a:defRPr>
             </a:pPr>
             <a:r>
-              <a:rPr sz="1350" b="0">
+              <a:rPr sz="1275" b="0">
                 <a:solidFill>
                   <a:srgbClr val="EAF6FF"/>
                 </a:solidFill>
@@ -2101,7 +7637,7 @@
                 <a:ea typeface="Microsoft YaHei"/>
                 <a:cs typeface="Microsoft YaHei"/>
               </a:rPr>
-              <a:t>总结问题并持续优化</a:t>
+              <a:t>按规则完成确定性输出</a:t>
             </a:r>
           </a:p>
         </p:txBody>
@@ -2109,7 +7645,7 @@
     </p:spTree>
     <p:extLst>
       <p:ext uri="{BB962C8B-B14F-4D97-AF65-F5344CB8AC3E}">
-        <p14:creationId xmlns:p14="http://schemas.microsoft.com/office/powerpoint/2010/main" val="1717892373"/>
+        <p14:creationId xmlns:p14="http://schemas.microsoft.com/office/powerpoint/2010/main" val="2761379775"/>
       </p:ext>
     </p:extLst>
   </p:cSld>
@@ -2117,64 +7653,124 @@
 </file>
 
 <file path=ppt/theme/theme1.xml><?xml version="1.0" encoding="utf-8"?>
-<a:theme xmlns:a="http://schemas.openxmlformats.org/drawingml/2006/main" name="ChatGPT">
+<a:theme xmlns:a="http://schemas.openxmlformats.org/drawingml/2006/main" name="Office 主题​​">
   <a:themeElements>
-    <a:clrScheme name="ChatGPT">
+    <a:clrScheme name="Office">
       <a:dk1>
-        <a:srgbClr val="000000"/>
+        <a:sysClr val="windowText" lastClr="000000"/>
       </a:dk1>
       <a:lt1>
-        <a:srgbClr val="FFFFFF"/>
+        <a:sysClr val="window" lastClr="FFFFFF"/>
       </a:lt1>
       <a:dk2>
-        <a:srgbClr val="0E2841"/>
+        <a:srgbClr val="44546A"/>
       </a:dk2>
       <a:lt2>
-        <a:srgbClr val="E8E8E8"/>
+        <a:srgbClr val="E7E6E6"/>
       </a:lt2>
       <a:accent1>
-        <a:srgbClr val="156082"/>
+        <a:srgbClr val="4472C4"/>
       </a:accent1>
       <a:accent2>
-        <a:srgbClr val="E97132"/>
+        <a:srgbClr val="ED7D31"/>
       </a:accent2>
       <a:accent3>
-        <a:srgbClr val="196B24"/>
+        <a:srgbClr val="A5A5A5"/>
       </a:accent3>
       <a:accent4>
-        <a:srgbClr val="0F9ED5"/>
+        <a:srgbClr val="FFC000"/>
       </a:accent4>
       <a:accent5>
-        <a:srgbClr val="A02B93"/>
+        <a:srgbClr val="5B9BD5"/>
       </a:accent5>
       <a:accent6>
-        <a:srgbClr val="4EA72E"/>
+        <a:srgbClr val="70AD47"/>
       </a:accent6>
       <a:hlink>
-        <a:srgbClr val="467886"/>
+        <a:srgbClr val="0563C1"/>
       </a:hlink>
       <a:folHlink>
-        <a:srgbClr val="96607D"/>
+        <a:srgbClr val="954F72"/>
       </a:folHlink>
     </a:clrScheme>
     <a:fontScheme name="Office">
       <a:majorFont>
-        <a:latin typeface="Calibri Light"/>
-        <a:ea typeface="Calibri Light"/>
-        <a:cs typeface="Calibri Light"/>
+        <a:latin typeface="等线 Light"/>
+        <a:ea typeface=""/>
+        <a:cs typeface=""/>
+        <a:font script="Jpan" typeface="游ゴシック Light"/>
+        <a:font script="Hang" typeface="맑은 고딕"/>
+        <a:font script="Hans" typeface="等线 Light"/>
+        <a:font script="Hant" typeface="新細明體"/>
+        <a:font script="Arab" typeface="Times New Roman"/>
+        <a:font script="Hebr" typeface="Times New Roman"/>
+        <a:font script="Thai" typeface="Angsana New"/>
+        <a:font script="Ethi" typeface="Nyala"/>
+        <a:font script="Beng" typeface="Vrinda"/>
+        <a:font script="Gujr" typeface="Shruti"/>
+        <a:font script="Khmr" typeface="MoolBoran"/>
+        <a:font script="Knda" typeface="Tunga"/>
+        <a:font script="Guru" typeface="Raavi"/>
+        <a:font script="Cans" typeface="Euphemia"/>
+        <a:font script="Cher" typeface="Plantagenet Cherokee"/>
+        <a:font script="Yiii" typeface="Microsoft Yi Baiti"/>
+        <a:font script="Tibt" typeface="Microsoft Himalaya"/>
+        <a:font script="Thaa" typeface="MV Boli"/>
+        <a:font script="Deva" typeface="Mangal"/>
+        <a:font script="Telu" typeface="Gautami"/>
+        <a:font script="Taml" typeface="Latha"/>
+        <a:font script="Syrc" typeface="Estrangelo Edessa"/>
+        <a:font script="Orya" typeface="Kalinga"/>
+        <a:font script="Mlym" typeface="Kartika"/>
+        <a:font script="Laoo" typeface="DokChampa"/>
+        <a:font script="Sinh" typeface="Iskoola Pota"/>
+        <a:font script="Mong" typeface="Mongolian Baiti"/>
+        <a:font script="Viet" typeface="Times New Roman"/>
+        <a:font script="Uigh" typeface="Microsoft Uighur"/>
+        <a:font script="Geor" typeface="Sylfaen"/>
       </a:majorFont>
       <a:minorFont>
-        <a:latin typeface="Calibri"/>
-        <a:ea typeface="Calibri"/>
-        <a:cs typeface="Calibri"/>
+        <a:latin typeface="等线"/>
+        <a:ea typeface=""/>
+        <a:cs typeface=""/>
+        <a:font script="Jpan" typeface="游ゴシック"/>
+        <a:font script="Hang" typeface="맑은 고딕"/>
+        <a:font script="Hans" typeface="等线"/>
+        <a:font script="Hant" typeface="新細明體"/>
+        <a:font script="Arab" typeface="Arial"/>
+        <a:font script="Hebr" typeface="Arial"/>
+        <a:font script="Thai" typeface="Cordia New"/>
+        <a:font script="Ethi" typeface="Nyala"/>
+        <a:font script="Beng" typeface="Vrinda"/>
+        <a:font script="Gujr" typeface="Shruti"/>
+        <a:font script="Khmr" typeface="DaunPenh"/>
+        <a:font script="Knda" typeface="Tunga"/>
+        <a:font script="Guru" typeface="Raavi"/>
+        <a:font script="Cans" typeface="Euphemia"/>
+        <a:font script="Cher" typeface="Plantagenet Cherokee"/>
+        <a:font script="Yiii" typeface="Microsoft Yi Baiti"/>
+        <a:font script="Tibt" typeface="Microsoft Himalaya"/>
+        <a:font script="Thaa" typeface="MV Boli"/>
+        <a:font script="Deva" typeface="Mangal"/>
+        <a:font script="Telu" typeface="Gautami"/>
+        <a:font script="Taml" typeface="Latha"/>
+        <a:font script="Syrc" typeface="Estrangelo Edessa"/>
+        <a:font script="Orya" typeface="Kalinga"/>
+        <a:font script="Mlym" typeface="Kartika"/>
+        <a:font script="Laoo" typeface="DokChampa"/>
+        <a:font script="Sinh" typeface="Iskoola Pota"/>
+        <a:font script="Mong" typeface="Mongolian Baiti"/>
+        <a:font script="Viet" typeface="Arial"/>
+        <a:font script="Uigh" typeface="Microsoft Uighur"/>
+        <a:font script="Geor" typeface="Sylfaen"/>
       </a:minorFont>
     </a:fontScheme>
-    <a:fmtScheme name="ChatGPT">
+    <a:fmtScheme name="Office">
       <a:fillStyleLst>
         <a:solidFill>
           <a:schemeClr val="phClr"/>
         </a:solidFill>
-        <a:gradFill>
+        <a:gradFill rotWithShape="1">
           <a:gsLst>
             <a:gs pos="0">
               <a:schemeClr val="phClr">
@@ -2200,7 +7796,7 @@
           </a:gsLst>
           <a:lin ang="5400000" scaled="0"/>
         </a:gradFill>
-        <a:gradFill>
+        <a:gradFill rotWithShape="1">
           <a:gsLst>
             <a:gs pos="0">
               <a:schemeClr val="phClr">
@@ -2228,6 +7824,12 @@
         </a:gradFill>
       </a:fillStyleLst>
       <a:lnStyleLst>
+        <a:ln w="6350">
+          <a:solidFill>
+            <a:schemeClr val="phClr"/>
+          </a:solidFill>
+          <a:prstDash val="solid"/>
+        </a:ln>
         <a:ln w="12700">
           <a:solidFill>
             <a:schemeClr val="phClr"/>
@@ -2235,12 +7837,6 @@
           <a:prstDash val="solid"/>
         </a:ln>
         <a:ln w="19050">
-          <a:solidFill>
-            <a:schemeClr val="phClr"/>
-          </a:solidFill>
-          <a:prstDash val="solid"/>
-        </a:ln>
-        <a:ln w="25400">
           <a:solidFill>
             <a:schemeClr val="phClr"/>
           </a:solidFill>
@@ -2256,63 +7852,9 @@
         </a:effectStyle>
         <a:effectStyle>
           <a:effectLst>
-            <a:outerShdw blurRad="57150" dist="19050" dir="5400000">
+            <a:outerShdw blurRad="57150" dist="19050" dir="5400000" algn="ctr" rotWithShape="0">
               <a:srgbClr val="000000">
-                <a:alpha val="16000"/>
-              </a:srgbClr>
-            </a:outerShdw>
-          </a:effectLst>
-        </a:effectStyle>
-        <a:effectStyle>
-          <a:effectLst>
-            <a:outerShdw blurRad="19050" dist="9525" dir="5400000">
-              <a:srgbClr val="000000">
-                <a:alpha val="6000"/>
-              </a:srgbClr>
-            </a:outerShdw>
-          </a:effectLst>
-        </a:effectStyle>
-        <a:effectStyle>
-          <a:effectLst>
-            <a:outerShdw blurRad="28575" dist="9525" dir="5400000">
-              <a:srgbClr val="000000">
-                <a:alpha val="8000"/>
-              </a:srgbClr>
-            </a:outerShdw>
-          </a:effectLst>
-        </a:effectStyle>
-        <a:effectStyle>
-          <a:effectLst>
-            <a:outerShdw blurRad="57150" dist="19050" dir="5400000">
-              <a:srgbClr val="000000">
-                <a:alpha val="10000"/>
-              </a:srgbClr>
-            </a:outerShdw>
-          </a:effectLst>
-        </a:effectStyle>
-        <a:effectStyle>
-          <a:effectLst>
-            <a:outerShdw blurRad="114300" dist="38100" dir="5400000">
-              <a:srgbClr val="000000">
-                <a:alpha val="12000"/>
-              </a:srgbClr>
-            </a:outerShdw>
-          </a:effectLst>
-        </a:effectStyle>
-        <a:effectStyle>
-          <a:effectLst>
-            <a:outerShdw blurRad="171450" dist="57150" dir="5400000">
-              <a:srgbClr val="000000">
-                <a:alpha val="16000"/>
-              </a:srgbClr>
-            </a:outerShdw>
-          </a:effectLst>
-        </a:effectStyle>
-        <a:effectStyle>
-          <a:effectLst>
-            <a:outerShdw blurRad="266700" dist="95250" dir="5400000">
-              <a:srgbClr val="000000">
-                <a:alpha val="24000"/>
+                <a:alpha val="63000"/>
               </a:srgbClr>
             </a:outerShdw>
           </a:effectLst>
@@ -2328,7 +7870,7 @@
             <a:satMod val="170000"/>
           </a:schemeClr>
         </a:solidFill>
-        <a:gradFill>
+        <a:gradFill rotWithShape="1">
           <a:gsLst>
             <a:gs pos="0">
               <a:schemeClr val="phClr">
